--- a/materials/aacl_presentation.pptx
+++ b/materials/aacl_presentation.pptx
@@ -7,13 +7,13 @@
   <p:sldIdLst>
     <p:sldId id="264" r:id="rId2"/>
     <p:sldId id="257" r:id="rId3"/>
-    <p:sldId id="262" r:id="rId4"/>
-    <p:sldId id="263" r:id="rId5"/>
-    <p:sldId id="258" r:id="rId6"/>
-    <p:sldId id="275" r:id="rId7"/>
-    <p:sldId id="259" r:id="rId8"/>
-    <p:sldId id="260" r:id="rId9"/>
-    <p:sldId id="265" r:id="rId10"/>
+    <p:sldId id="263" r:id="rId4"/>
+    <p:sldId id="258" r:id="rId5"/>
+    <p:sldId id="275" r:id="rId6"/>
+    <p:sldId id="259" r:id="rId7"/>
+    <p:sldId id="260" r:id="rId8"/>
+    <p:sldId id="265" r:id="rId9"/>
+    <p:sldId id="276" r:id="rId10"/>
     <p:sldId id="261" r:id="rId11"/>
     <p:sldId id="266" r:id="rId12"/>
     <p:sldId id="267" r:id="rId13"/>
@@ -132,7 +132,7 @@
 <file path=ppt/revisionInfo.xml><?xml version="1.0" encoding="utf-8"?>
 <p1510:revInfo xmlns:a="http://schemas.openxmlformats.org/drawingml/2006/main" xmlns:r="http://schemas.openxmlformats.org/officeDocument/2006/relationships" xmlns:p1510="http://schemas.microsoft.com/office/powerpoint/2015/10/main">
   <p1510:revLst>
-    <p1510:client id="{88A60433-6414-4BD0-8EB6-31796CC6DF80}" v="72" dt="2020-10-17T12:48:46.262"/>
+    <p1510:client id="{88A60433-6414-4BD0-8EB6-31796CC6DF80}" v="783" dt="2020-10-20T18:54:48.100"/>
   </p1510:revLst>
 </p1510:revInfo>
 </file>
@@ -142,27 +142,82 @@
   <pc:docChgLst>
     <pc:chgData name="YUAN HE" userId="83267edd7d760aca" providerId="LiveId" clId="{88A60433-6414-4BD0-8EB6-31796CC6DF80}"/>
     <pc:docChg chg="undo custSel addSld delSld modSld sldOrd">
-      <pc:chgData name="YUAN HE" userId="83267edd7d760aca" providerId="LiveId" clId="{88A60433-6414-4BD0-8EB6-31796CC6DF80}" dt="2020-10-17T12:50:57.765" v="2788" actId="207"/>
+      <pc:chgData name="YUAN HE" userId="83267edd7d760aca" providerId="LiveId" clId="{88A60433-6414-4BD0-8EB6-31796CC6DF80}" dt="2020-10-20T18:54:48.100" v="4003" actId="20577"/>
       <pc:docMkLst>
         <pc:docMk/>
       </pc:docMkLst>
       <pc:sldChg chg="modSp mod">
-        <pc:chgData name="YUAN HE" userId="83267edd7d760aca" providerId="LiveId" clId="{88A60433-6414-4BD0-8EB6-31796CC6DF80}" dt="2020-10-15T17:12:45.800" v="1498" actId="20577"/>
+        <pc:chgData name="YUAN HE" userId="83267edd7d760aca" providerId="LiveId" clId="{88A60433-6414-4BD0-8EB6-31796CC6DF80}" dt="2020-10-19T22:33:16.754" v="3029" actId="20577"/>
         <pc:sldMkLst>
           <pc:docMk/>
           <pc:sldMk cId="2619330505" sldId="257"/>
         </pc:sldMkLst>
         <pc:spChg chg="mod">
-          <ac:chgData name="YUAN HE" userId="83267edd7d760aca" providerId="LiveId" clId="{88A60433-6414-4BD0-8EB6-31796CC6DF80}" dt="2020-10-15T17:12:45.800" v="1498" actId="20577"/>
+          <ac:chgData name="YUAN HE" userId="83267edd7d760aca" providerId="LiveId" clId="{88A60433-6414-4BD0-8EB6-31796CC6DF80}" dt="2020-10-19T22:33:16.754" v="3029" actId="20577"/>
           <ac:spMkLst>
             <pc:docMk/>
             <pc:sldMk cId="2619330505" sldId="257"/>
             <ac:spMk id="3" creationId="{59199C4C-5AA4-49CE-81AC-CBF428574A2B}"/>
           </ac:spMkLst>
         </pc:spChg>
+        <pc:graphicFrameChg chg="mod">
+          <ac:chgData name="YUAN HE" userId="83267edd7d760aca" providerId="LiveId" clId="{88A60433-6414-4BD0-8EB6-31796CC6DF80}" dt="2020-10-19T14:33:51.589" v="3026" actId="1076"/>
+          <ac:graphicFrameMkLst>
+            <pc:docMk/>
+            <pc:sldMk cId="2619330505" sldId="257"/>
+            <ac:graphicFrameMk id="48" creationId="{1354A80C-5E28-4A40-932B-6A8E52C46433}"/>
+          </ac:graphicFrameMkLst>
+        </pc:graphicFrameChg>
       </pc:sldChg>
-      <pc:sldChg chg="addSp modSp mod">
-        <pc:chgData name="YUAN HE" userId="83267edd7d760aca" providerId="LiveId" clId="{88A60433-6414-4BD0-8EB6-31796CC6DF80}" dt="2020-10-17T12:50:57.765" v="2788" actId="207"/>
+      <pc:sldChg chg="delSp setBg delDesignElem">
+        <pc:chgData name="YUAN HE" userId="83267edd7d760aca" providerId="LiveId" clId="{88A60433-6414-4BD0-8EB6-31796CC6DF80}" dt="2020-10-19T23:42:53.543" v="3216"/>
+        <pc:sldMkLst>
+          <pc:docMk/>
+          <pc:sldMk cId="4188249468" sldId="258"/>
+        </pc:sldMkLst>
+        <pc:spChg chg="del">
+          <ac:chgData name="YUAN HE" userId="83267edd7d760aca" providerId="LiveId" clId="{88A60433-6414-4BD0-8EB6-31796CC6DF80}" dt="2020-10-19T23:42:53.543" v="3216"/>
+          <ac:spMkLst>
+            <pc:docMk/>
+            <pc:sldMk cId="4188249468" sldId="258"/>
+            <ac:spMk id="17" creationId="{2B566528-1B12-4246-9431-5C2D7D081168}"/>
+          </ac:spMkLst>
+        </pc:spChg>
+        <pc:spChg chg="del">
+          <ac:chgData name="YUAN HE" userId="83267edd7d760aca" providerId="LiveId" clId="{88A60433-6414-4BD0-8EB6-31796CC6DF80}" dt="2020-10-19T23:42:53.543" v="3216"/>
+          <ac:spMkLst>
+            <pc:docMk/>
+            <pc:sldMk cId="4188249468" sldId="258"/>
+            <ac:spMk id="19" creationId="{2E80C965-DB6D-4F81-9E9E-B027384D0BD6}"/>
+          </ac:spMkLst>
+        </pc:spChg>
+        <pc:spChg chg="del">
+          <ac:chgData name="YUAN HE" userId="83267edd7d760aca" providerId="LiveId" clId="{88A60433-6414-4BD0-8EB6-31796CC6DF80}" dt="2020-10-19T23:42:53.543" v="3216"/>
+          <ac:spMkLst>
+            <pc:docMk/>
+            <pc:sldMk cId="4188249468" sldId="258"/>
+            <ac:spMk id="20" creationId="{A580F890-B085-4E95-96AA-55AEBEC5CE6E}"/>
+          </ac:spMkLst>
+        </pc:spChg>
+        <pc:spChg chg="del">
+          <ac:chgData name="YUAN HE" userId="83267edd7d760aca" providerId="LiveId" clId="{88A60433-6414-4BD0-8EB6-31796CC6DF80}" dt="2020-10-19T23:42:53.543" v="3216"/>
+          <ac:spMkLst>
+            <pc:docMk/>
+            <pc:sldMk cId="4188249468" sldId="258"/>
+            <ac:spMk id="21" creationId="{D3F51FEB-38FB-4F6C-9F7B-2F2AFAB65463}"/>
+          </ac:spMkLst>
+        </pc:spChg>
+        <pc:spChg chg="del">
+          <ac:chgData name="YUAN HE" userId="83267edd7d760aca" providerId="LiveId" clId="{88A60433-6414-4BD0-8EB6-31796CC6DF80}" dt="2020-10-19T23:42:53.543" v="3216"/>
+          <ac:spMkLst>
+            <pc:docMk/>
+            <pc:sldMk cId="4188249468" sldId="258"/>
+            <ac:spMk id="22" creationId="{1E547BA6-BAE0-43BB-A7CA-60F69CE252F0}"/>
+          </ac:spMkLst>
+        </pc:spChg>
+      </pc:sldChg>
+      <pc:sldChg chg="addSp delSp modSp mod modAnim">
+        <pc:chgData name="YUAN HE" userId="83267edd7d760aca" providerId="LiveId" clId="{88A60433-6414-4BD0-8EB6-31796CC6DF80}" dt="2020-10-19T23:17:33.853" v="3155" actId="1076"/>
         <pc:sldMkLst>
           <pc:docMk/>
           <pc:sldMk cId="171567685" sldId="259"/>
@@ -175,6 +230,150 @@
             <ac:spMk id="3" creationId="{1686257F-1489-4987-9D52-DC6E34642DC7}"/>
           </ac:spMkLst>
         </pc:spChg>
+        <pc:spChg chg="mod">
+          <ac:chgData name="YUAN HE" userId="83267edd7d760aca" providerId="LiveId" clId="{88A60433-6414-4BD0-8EB6-31796CC6DF80}" dt="2020-10-19T12:32:23.872" v="2800" actId="20577"/>
+          <ac:spMkLst>
+            <pc:docMk/>
+            <pc:sldMk cId="171567685" sldId="259"/>
+            <ac:spMk id="6" creationId="{97FD4057-FB99-47B3-8AE6-5B7CD6A36659}"/>
+          </ac:spMkLst>
+        </pc:spChg>
+        <pc:spChg chg="add del mod">
+          <ac:chgData name="YUAN HE" userId="83267edd7d760aca" providerId="LiveId" clId="{88A60433-6414-4BD0-8EB6-31796CC6DF80}" dt="2020-10-19T23:12:53.191" v="3031" actId="22"/>
+          <ac:spMkLst>
+            <pc:docMk/>
+            <pc:sldMk cId="171567685" sldId="259"/>
+            <ac:spMk id="7" creationId="{6201A401-7035-49AA-ABA4-B2819067D5BC}"/>
+          </ac:spMkLst>
+        </pc:spChg>
+        <pc:spChg chg="add mod">
+          <ac:chgData name="YUAN HE" userId="83267edd7d760aca" providerId="LiveId" clId="{88A60433-6414-4BD0-8EB6-31796CC6DF80}" dt="2020-10-19T23:17:33.853" v="3155" actId="1076"/>
+          <ac:spMkLst>
+            <pc:docMk/>
+            <pc:sldMk cId="171567685" sldId="259"/>
+            <ac:spMk id="14" creationId="{4112B937-9A31-4D96-A9B5-B47F6255EA2A}"/>
+          </ac:spMkLst>
+        </pc:spChg>
+        <pc:spChg chg="add mod">
+          <ac:chgData name="YUAN HE" userId="83267edd7d760aca" providerId="LiveId" clId="{88A60433-6414-4BD0-8EB6-31796CC6DF80}" dt="2020-10-19T23:17:33.853" v="3155" actId="1076"/>
+          <ac:spMkLst>
+            <pc:docMk/>
+            <pc:sldMk cId="171567685" sldId="259"/>
+            <ac:spMk id="23" creationId="{296CBED8-097A-4557-8B5A-D29585E63106}"/>
+          </ac:spMkLst>
+        </pc:spChg>
+        <pc:spChg chg="add del mod">
+          <ac:chgData name="YUAN HE" userId="83267edd7d760aca" providerId="LiveId" clId="{88A60433-6414-4BD0-8EB6-31796CC6DF80}" dt="2020-10-19T23:14:50.551" v="3075"/>
+          <ac:spMkLst>
+            <pc:docMk/>
+            <pc:sldMk cId="171567685" sldId="259"/>
+            <ac:spMk id="24" creationId="{4E94D90B-A607-4FE4-8AE5-C161130F9668}"/>
+          </ac:spMkLst>
+        </pc:spChg>
+        <pc:spChg chg="add mod">
+          <ac:chgData name="YUAN HE" userId="83267edd7d760aca" providerId="LiveId" clId="{88A60433-6414-4BD0-8EB6-31796CC6DF80}" dt="2020-10-19T23:17:33.853" v="3155" actId="1076"/>
+          <ac:spMkLst>
+            <pc:docMk/>
+            <pc:sldMk cId="171567685" sldId="259"/>
+            <ac:spMk id="26" creationId="{E808F97D-D539-4597-9F5C-27BDD79C0E5A}"/>
+          </ac:spMkLst>
+        </pc:spChg>
+        <pc:spChg chg="add mod">
+          <ac:chgData name="YUAN HE" userId="83267edd7d760aca" providerId="LiveId" clId="{88A60433-6414-4BD0-8EB6-31796CC6DF80}" dt="2020-10-19T23:17:33.853" v="3155" actId="1076"/>
+          <ac:spMkLst>
+            <pc:docMk/>
+            <pc:sldMk cId="171567685" sldId="259"/>
+            <ac:spMk id="41" creationId="{533F3CA4-0267-4D21-B7BC-E8036EFF4680}"/>
+          </ac:spMkLst>
+        </pc:spChg>
+        <pc:spChg chg="add mod">
+          <ac:chgData name="YUAN HE" userId="83267edd7d760aca" providerId="LiveId" clId="{88A60433-6414-4BD0-8EB6-31796CC6DF80}" dt="2020-10-19T23:17:33.853" v="3155" actId="1076"/>
+          <ac:spMkLst>
+            <pc:docMk/>
+            <pc:sldMk cId="171567685" sldId="259"/>
+            <ac:spMk id="43" creationId="{E8A8CA55-EB27-41E0-B1DF-AE613B8335D9}"/>
+          </ac:spMkLst>
+        </pc:spChg>
+        <pc:picChg chg="del mod">
+          <ac:chgData name="YUAN HE" userId="83267edd7d760aca" providerId="LiveId" clId="{88A60433-6414-4BD0-8EB6-31796CC6DF80}" dt="2020-10-19T23:12:38.601" v="3030" actId="478"/>
+          <ac:picMkLst>
+            <pc:docMk/>
+            <pc:sldMk cId="171567685" sldId="259"/>
+            <ac:picMk id="5" creationId="{3D656B5E-D102-4259-8D90-2D6E9CCA1186}"/>
+          </ac:picMkLst>
+        </pc:picChg>
+        <pc:picChg chg="add mod ord">
+          <ac:chgData name="YUAN HE" userId="83267edd7d760aca" providerId="LiveId" clId="{88A60433-6414-4BD0-8EB6-31796CC6DF80}" dt="2020-10-19T23:17:33.853" v="3155" actId="1076"/>
+          <ac:picMkLst>
+            <pc:docMk/>
+            <pc:sldMk cId="171567685" sldId="259"/>
+            <ac:picMk id="9" creationId="{FCD26A91-1E8A-446E-A77E-3413E8BBF51B}"/>
+          </ac:picMkLst>
+        </pc:picChg>
+        <pc:picChg chg="add mod">
+          <ac:chgData name="YUAN HE" userId="83267edd7d760aca" providerId="LiveId" clId="{88A60433-6414-4BD0-8EB6-31796CC6DF80}" dt="2020-10-19T23:17:33.853" v="3155" actId="1076"/>
+          <ac:picMkLst>
+            <pc:docMk/>
+            <pc:sldMk cId="171567685" sldId="259"/>
+            <ac:picMk id="11" creationId="{6C035A8C-C6EA-484B-A3D3-991A8322F4E4}"/>
+          </ac:picMkLst>
+        </pc:picChg>
+        <pc:picChg chg="add mod">
+          <ac:chgData name="YUAN HE" userId="83267edd7d760aca" providerId="LiveId" clId="{88A60433-6414-4BD0-8EB6-31796CC6DF80}" dt="2020-10-19T23:17:33.853" v="3155" actId="1076"/>
+          <ac:picMkLst>
+            <pc:docMk/>
+            <pc:sldMk cId="171567685" sldId="259"/>
+            <ac:picMk id="13" creationId="{BA22DA1A-1B44-4431-9CAA-C476E2EF284C}"/>
+          </ac:picMkLst>
+        </pc:picChg>
+        <pc:cxnChg chg="add mod">
+          <ac:chgData name="YUAN HE" userId="83267edd7d760aca" providerId="LiveId" clId="{88A60433-6414-4BD0-8EB6-31796CC6DF80}" dt="2020-10-19T23:17:33.853" v="3155" actId="1076"/>
+          <ac:cxnSpMkLst>
+            <pc:docMk/>
+            <pc:sldMk cId="171567685" sldId="259"/>
+            <ac:cxnSpMk id="16" creationId="{F4B1CEF7-F680-4A6C-A040-227D353EE5A2}"/>
+          </ac:cxnSpMkLst>
+        </pc:cxnChg>
+        <pc:cxnChg chg="add del mod">
+          <ac:chgData name="YUAN HE" userId="83267edd7d760aca" providerId="LiveId" clId="{88A60433-6414-4BD0-8EB6-31796CC6DF80}" dt="2020-10-19T23:15:36.366" v="3094" actId="11529"/>
+          <ac:cxnSpMkLst>
+            <pc:docMk/>
+            <pc:sldMk cId="171567685" sldId="259"/>
+            <ac:cxnSpMk id="28" creationId="{60C5D71B-DE32-4619-A119-E6E9B05EACE9}"/>
+          </ac:cxnSpMkLst>
+        </pc:cxnChg>
+        <pc:cxnChg chg="add mod">
+          <ac:chgData name="YUAN HE" userId="83267edd7d760aca" providerId="LiveId" clId="{88A60433-6414-4BD0-8EB6-31796CC6DF80}" dt="2020-10-19T23:17:33.853" v="3155" actId="1076"/>
+          <ac:cxnSpMkLst>
+            <pc:docMk/>
+            <pc:sldMk cId="171567685" sldId="259"/>
+            <ac:cxnSpMk id="30" creationId="{D8A8AA11-1484-4849-A6A3-B710314EE0EA}"/>
+          </ac:cxnSpMkLst>
+        </pc:cxnChg>
+        <pc:cxnChg chg="add mod">
+          <ac:chgData name="YUAN HE" userId="83267edd7d760aca" providerId="LiveId" clId="{88A60433-6414-4BD0-8EB6-31796CC6DF80}" dt="2020-10-19T23:17:33.853" v="3155" actId="1076"/>
+          <ac:cxnSpMkLst>
+            <pc:docMk/>
+            <pc:sldMk cId="171567685" sldId="259"/>
+            <ac:cxnSpMk id="32" creationId="{FF9F4255-DC60-42E2-AF8F-028D796B21FE}"/>
+          </ac:cxnSpMkLst>
+        </pc:cxnChg>
+        <pc:cxnChg chg="add mod">
+          <ac:chgData name="YUAN HE" userId="83267edd7d760aca" providerId="LiveId" clId="{88A60433-6414-4BD0-8EB6-31796CC6DF80}" dt="2020-10-19T23:17:33.853" v="3155" actId="1076"/>
+          <ac:cxnSpMkLst>
+            <pc:docMk/>
+            <pc:sldMk cId="171567685" sldId="259"/>
+            <ac:cxnSpMk id="35" creationId="{BD2151A4-9278-44F5-8887-58896897322D}"/>
+          </ac:cxnSpMkLst>
+        </pc:cxnChg>
+        <pc:cxnChg chg="add mod">
+          <ac:chgData name="YUAN HE" userId="83267edd7d760aca" providerId="LiveId" clId="{88A60433-6414-4BD0-8EB6-31796CC6DF80}" dt="2020-10-19T23:17:33.853" v="3155" actId="1076"/>
+          <ac:cxnSpMkLst>
+            <pc:docMk/>
+            <pc:sldMk cId="171567685" sldId="259"/>
+            <ac:cxnSpMk id="37" creationId="{87A2B083-1255-46B1-8B15-D611FAE34ABF}"/>
+          </ac:cxnSpMkLst>
+        </pc:cxnChg>
       </pc:sldChg>
       <pc:sldChg chg="ord">
         <pc:chgData name="YUAN HE" userId="83267edd7d760aca" providerId="LiveId" clId="{88A60433-6414-4BD0-8EB6-31796CC6DF80}" dt="2020-10-15T17:19:32.946" v="1550"/>
@@ -183,14 +382,14 @@
           <pc:sldMk cId="733360352" sldId="261"/>
         </pc:sldMkLst>
       </pc:sldChg>
-      <pc:sldChg chg="modSp mod">
-        <pc:chgData name="YUAN HE" userId="83267edd7d760aca" providerId="LiveId" clId="{88A60433-6414-4BD0-8EB6-31796CC6DF80}" dt="2020-10-15T18:20:55.570" v="2774" actId="20577"/>
+      <pc:sldChg chg="modSp del mod">
+        <pc:chgData name="YUAN HE" userId="83267edd7d760aca" providerId="LiveId" clId="{88A60433-6414-4BD0-8EB6-31796CC6DF80}" dt="2020-10-19T14:34:00.360" v="3027" actId="2696"/>
         <pc:sldMkLst>
           <pc:docMk/>
           <pc:sldMk cId="745682792" sldId="262"/>
         </pc:sldMkLst>
         <pc:spChg chg="mod">
-          <ac:chgData name="YUAN HE" userId="83267edd7d760aca" providerId="LiveId" clId="{88A60433-6414-4BD0-8EB6-31796CC6DF80}" dt="2020-10-15T18:20:55.570" v="2774" actId="20577"/>
+          <ac:chgData name="YUAN HE" userId="83267edd7d760aca" providerId="LiveId" clId="{88A60433-6414-4BD0-8EB6-31796CC6DF80}" dt="2020-10-19T14:31:52.274" v="2911" actId="20577"/>
           <ac:spMkLst>
             <pc:docMk/>
             <pc:sldMk cId="745682792" sldId="262"/>
@@ -199,13 +398,13 @@
         </pc:spChg>
       </pc:sldChg>
       <pc:sldChg chg="modSp mod">
-        <pc:chgData name="YUAN HE" userId="83267edd7d760aca" providerId="LiveId" clId="{88A60433-6414-4BD0-8EB6-31796CC6DF80}" dt="2020-10-15T13:12:05.381" v="142" actId="20577"/>
+        <pc:chgData name="YUAN HE" userId="83267edd7d760aca" providerId="LiveId" clId="{88A60433-6414-4BD0-8EB6-31796CC6DF80}" dt="2020-10-19T14:30:50.032" v="2881" actId="20577"/>
         <pc:sldMkLst>
           <pc:docMk/>
           <pc:sldMk cId="2960609488" sldId="263"/>
         </pc:sldMkLst>
         <pc:spChg chg="mod">
-          <ac:chgData name="YUAN HE" userId="83267edd7d760aca" providerId="LiveId" clId="{88A60433-6414-4BD0-8EB6-31796CC6DF80}" dt="2020-10-15T13:12:05.381" v="142" actId="20577"/>
+          <ac:chgData name="YUAN HE" userId="83267edd7d760aca" providerId="LiveId" clId="{88A60433-6414-4BD0-8EB6-31796CC6DF80}" dt="2020-10-19T14:30:50.032" v="2881" actId="20577"/>
           <ac:spMkLst>
             <pc:docMk/>
             <pc:sldMk cId="2960609488" sldId="263"/>
@@ -214,11 +413,19 @@
         </pc:spChg>
       </pc:sldChg>
       <pc:sldChg chg="addSp delSp modSp mod">
-        <pc:chgData name="YUAN HE" userId="83267edd7d760aca" providerId="LiveId" clId="{88A60433-6414-4BD0-8EB6-31796CC6DF80}" dt="2020-10-15T18:17:24.322" v="2768" actId="1076"/>
+        <pc:chgData name="YUAN HE" userId="83267edd7d760aca" providerId="LiveId" clId="{88A60433-6414-4BD0-8EB6-31796CC6DF80}" dt="2020-10-19T13:17:13.751" v="2871" actId="1076"/>
         <pc:sldMkLst>
           <pc:docMk/>
           <pc:sldMk cId="1596913002" sldId="264"/>
         </pc:sldMkLst>
+        <pc:spChg chg="add mod">
+          <ac:chgData name="YUAN HE" userId="83267edd7d760aca" providerId="LiveId" clId="{88A60433-6414-4BD0-8EB6-31796CC6DF80}" dt="2020-10-19T13:16:56.862" v="2869" actId="1076"/>
+          <ac:spMkLst>
+            <pc:docMk/>
+            <pc:sldMk cId="1596913002" sldId="264"/>
+            <ac:spMk id="2" creationId="{A076D033-2E0A-408A-942F-14147FA790A1}"/>
+          </ac:spMkLst>
+        </pc:spChg>
         <pc:spChg chg="add del mod">
           <ac:chgData name="YUAN HE" userId="83267edd7d760aca" providerId="LiveId" clId="{88A60433-6414-4BD0-8EB6-31796CC6DF80}" dt="2020-10-15T18:11:26.670" v="2721" actId="21"/>
           <ac:spMkLst>
@@ -241,6 +448,14 @@
             <pc:docMk/>
             <pc:sldMk cId="1596913002" sldId="264"/>
             <ac:picMk id="5" creationId="{8A4F0420-78CB-413F-8F08-185DBECCA38C}"/>
+          </ac:picMkLst>
+        </pc:picChg>
+        <pc:picChg chg="mod">
+          <ac:chgData name="YUAN HE" userId="83267edd7d760aca" providerId="LiveId" clId="{88A60433-6414-4BD0-8EB6-31796CC6DF80}" dt="2020-10-19T13:17:13.751" v="2871" actId="1076"/>
+          <ac:picMkLst>
+            <pc:docMk/>
+            <pc:sldMk cId="1596913002" sldId="264"/>
+            <ac:picMk id="6" creationId="{DD8586BC-D237-42CF-ACE9-D27AE622C2A6}"/>
           </ac:picMkLst>
         </pc:picChg>
         <pc:picChg chg="add mod">
@@ -283,8 +498,8 @@
             <ac:picMk id="12" creationId="{AEC354F3-987B-4FD6-9EF6-17479F6E45A7}"/>
           </ac:picMkLst>
         </pc:picChg>
-        <pc:picChg chg="mod">
-          <ac:chgData name="YUAN HE" userId="83267edd7d760aca" providerId="LiveId" clId="{88A60433-6414-4BD0-8EB6-31796CC6DF80}" dt="2020-10-15T18:16:04.211" v="2764" actId="1076"/>
+        <pc:picChg chg="del mod">
+          <ac:chgData name="YUAN HE" userId="83267edd7d760aca" providerId="LiveId" clId="{88A60433-6414-4BD0-8EB6-31796CC6DF80}" dt="2020-10-19T12:34:36.862" v="2803" actId="21"/>
           <ac:picMkLst>
             <pc:docMk/>
             <pc:sldMk cId="1596913002" sldId="264"/>
@@ -292,14 +507,22 @@
           </ac:picMkLst>
         </pc:picChg>
       </pc:sldChg>
-      <pc:sldChg chg="addSp delSp modSp mod modAnim">
-        <pc:chgData name="YUAN HE" userId="83267edd7d760aca" providerId="LiveId" clId="{88A60433-6414-4BD0-8EB6-31796CC6DF80}" dt="2020-10-15T13:37:16.595" v="1296"/>
+      <pc:sldChg chg="addSp delSp modSp mod delAnim modAnim">
+        <pc:chgData name="YUAN HE" userId="83267edd7d760aca" providerId="LiveId" clId="{88A60433-6414-4BD0-8EB6-31796CC6DF80}" dt="2020-10-19T23:30:45.490" v="3169" actId="1076"/>
         <pc:sldMkLst>
           <pc:docMk/>
           <pc:sldMk cId="1982144043" sldId="265"/>
         </pc:sldMkLst>
+        <pc:spChg chg="mod">
+          <ac:chgData name="YUAN HE" userId="83267edd7d760aca" providerId="LiveId" clId="{88A60433-6414-4BD0-8EB6-31796CC6DF80}" dt="2020-10-19T23:30:18.409" v="3162" actId="20577"/>
+          <ac:spMkLst>
+            <pc:docMk/>
+            <pc:sldMk cId="1982144043" sldId="265"/>
+            <ac:spMk id="3" creationId="{59199C4C-5AA4-49CE-81AC-CBF428574A2B}"/>
+          </ac:spMkLst>
+        </pc:spChg>
         <pc:spChg chg="add mod">
-          <ac:chgData name="YUAN HE" userId="83267edd7d760aca" providerId="LiveId" clId="{88A60433-6414-4BD0-8EB6-31796CC6DF80}" dt="2020-10-15T13:33:25.550" v="1233" actId="208"/>
+          <ac:chgData name="YUAN HE" userId="83267edd7d760aca" providerId="LiveId" clId="{88A60433-6414-4BD0-8EB6-31796CC6DF80}" dt="2020-10-19T23:30:41.537" v="3167" actId="1076"/>
           <ac:spMkLst>
             <pc:docMk/>
             <pc:sldMk cId="1982144043" sldId="265"/>
@@ -307,7 +530,7 @@
           </ac:spMkLst>
         </pc:spChg>
         <pc:spChg chg="add mod">
-          <ac:chgData name="YUAN HE" userId="83267edd7d760aca" providerId="LiveId" clId="{88A60433-6414-4BD0-8EB6-31796CC6DF80}" dt="2020-10-15T13:33:58.954" v="1245" actId="1076"/>
+          <ac:chgData name="YUAN HE" userId="83267edd7d760aca" providerId="LiveId" clId="{88A60433-6414-4BD0-8EB6-31796CC6DF80}" dt="2020-10-19T23:30:45.490" v="3169" actId="1076"/>
           <ac:spMkLst>
             <pc:docMk/>
             <pc:sldMk cId="1982144043" sldId="265"/>
@@ -330,38 +553,46 @@
             <ac:spMk id="8" creationId="{6899E530-F74D-4F96-8A39-CB353FBD4D14}"/>
           </ac:spMkLst>
         </pc:spChg>
-        <pc:spChg chg="add mod">
-          <ac:chgData name="YUAN HE" userId="83267edd7d760aca" providerId="LiveId" clId="{88A60433-6414-4BD0-8EB6-31796CC6DF80}" dt="2020-10-15T13:35:57.649" v="1279" actId="207"/>
+        <pc:spChg chg="add del mod">
+          <ac:chgData name="YUAN HE" userId="83267edd7d760aca" providerId="LiveId" clId="{88A60433-6414-4BD0-8EB6-31796CC6DF80}" dt="2020-10-19T23:30:12.167" v="3158" actId="478"/>
           <ac:spMkLst>
             <pc:docMk/>
             <pc:sldMk cId="1982144043" sldId="265"/>
             <ac:spMk id="14" creationId="{9324BDA6-2044-4211-AD1F-4183F94B1FF5}"/>
           </ac:spMkLst>
         </pc:spChg>
-        <pc:spChg chg="add mod">
-          <ac:chgData name="YUAN HE" userId="83267edd7d760aca" providerId="LiveId" clId="{88A60433-6414-4BD0-8EB6-31796CC6DF80}" dt="2020-10-15T13:36:05.865" v="1281" actId="1076"/>
+        <pc:spChg chg="add del mod">
+          <ac:chgData name="YUAN HE" userId="83267edd7d760aca" providerId="LiveId" clId="{88A60433-6414-4BD0-8EB6-31796CC6DF80}" dt="2020-10-19T23:30:13.967" v="3160" actId="478"/>
           <ac:spMkLst>
             <pc:docMk/>
             <pc:sldMk cId="1982144043" sldId="265"/>
             <ac:spMk id="16" creationId="{A4D9C924-AEBB-42C4-A9FB-29CFE93F123C}"/>
           </ac:spMkLst>
         </pc:spChg>
-        <pc:spChg chg="add mod">
-          <ac:chgData name="YUAN HE" userId="83267edd7d760aca" providerId="LiveId" clId="{88A60433-6414-4BD0-8EB6-31796CC6DF80}" dt="2020-10-15T13:36:42.868" v="1290" actId="1076"/>
+        <pc:spChg chg="add del mod">
+          <ac:chgData name="YUAN HE" userId="83267edd7d760aca" providerId="LiveId" clId="{88A60433-6414-4BD0-8EB6-31796CC6DF80}" dt="2020-10-19T23:30:11.711" v="3157" actId="478"/>
           <ac:spMkLst>
             <pc:docMk/>
             <pc:sldMk cId="1982144043" sldId="265"/>
             <ac:spMk id="18" creationId="{8140A25C-B793-4EC2-BB01-F36E69B7205F}"/>
           </ac:spMkLst>
         </pc:spChg>
-        <pc:spChg chg="add mod">
-          <ac:chgData name="YUAN HE" userId="83267edd7d760aca" providerId="LiveId" clId="{88A60433-6414-4BD0-8EB6-31796CC6DF80}" dt="2020-10-15T13:36:46.629" v="1291" actId="1076"/>
+        <pc:spChg chg="add del mod">
+          <ac:chgData name="YUAN HE" userId="83267edd7d760aca" providerId="LiveId" clId="{88A60433-6414-4BD0-8EB6-31796CC6DF80}" dt="2020-10-19T23:30:12.677" v="3159" actId="478"/>
           <ac:spMkLst>
             <pc:docMk/>
             <pc:sldMk cId="1982144043" sldId="265"/>
             <ac:spMk id="28" creationId="{6835CFAF-991A-48A7-B31E-0D8D0B0BA907}"/>
           </ac:spMkLst>
         </pc:spChg>
+        <pc:graphicFrameChg chg="mod modGraphic">
+          <ac:chgData name="YUAN HE" userId="83267edd7d760aca" providerId="LiveId" clId="{88A60433-6414-4BD0-8EB6-31796CC6DF80}" dt="2020-10-19T23:30:36.061" v="3166" actId="1076"/>
+          <ac:graphicFrameMkLst>
+            <pc:docMk/>
+            <pc:sldMk cId="1982144043" sldId="265"/>
+            <ac:graphicFrameMk id="4" creationId="{73B258A7-2279-4AE3-8317-4103BE58B152}"/>
+          </ac:graphicFrameMkLst>
+        </pc:graphicFrameChg>
         <pc:cxnChg chg="add del mod">
           <ac:chgData name="YUAN HE" userId="83267edd7d760aca" providerId="LiveId" clId="{88A60433-6414-4BD0-8EB6-31796CC6DF80}" dt="2020-10-15T13:34:57.297" v="1272" actId="478"/>
           <ac:cxnSpMkLst>
@@ -388,13 +619,13 @@
         </pc:cxnChg>
       </pc:sldChg>
       <pc:sldChg chg="modSp mod">
-        <pc:chgData name="YUAN HE" userId="83267edd7d760aca" providerId="LiveId" clId="{88A60433-6414-4BD0-8EB6-31796CC6DF80}" dt="2020-10-14T20:21:57.673" v="28" actId="20577"/>
+        <pc:chgData name="YUAN HE" userId="83267edd7d760aca" providerId="LiveId" clId="{88A60433-6414-4BD0-8EB6-31796CC6DF80}" dt="2020-10-19T23:43:29.348" v="3236" actId="207"/>
         <pc:sldMkLst>
           <pc:docMk/>
           <pc:sldMk cId="1553483360" sldId="266"/>
         </pc:sldMkLst>
-        <pc:graphicFrameChg chg="modGraphic">
-          <ac:chgData name="YUAN HE" userId="83267edd7d760aca" providerId="LiveId" clId="{88A60433-6414-4BD0-8EB6-31796CC6DF80}" dt="2020-10-14T20:21:57.673" v="28" actId="20577"/>
+        <pc:graphicFrameChg chg="mod modGraphic">
+          <ac:chgData name="YUAN HE" userId="83267edd7d760aca" providerId="LiveId" clId="{88A60433-6414-4BD0-8EB6-31796CC6DF80}" dt="2020-10-19T23:43:29.348" v="3236" actId="207"/>
           <ac:graphicFrameMkLst>
             <pc:docMk/>
             <pc:sldMk cId="1553483360" sldId="266"/>
@@ -403,7 +634,7 @@
         </pc:graphicFrameChg>
       </pc:sldChg>
       <pc:sldChg chg="addSp delSp modSp mod modAnim">
-        <pc:chgData name="YUAN HE" userId="83267edd7d760aca" providerId="LiveId" clId="{88A60433-6414-4BD0-8EB6-31796CC6DF80}" dt="2020-10-15T13:37:59.163" v="1303"/>
+        <pc:chgData name="YUAN HE" userId="83267edd7d760aca" providerId="LiveId" clId="{88A60433-6414-4BD0-8EB6-31796CC6DF80}" dt="2020-10-19T23:43:50.124" v="3247" actId="1076"/>
         <pc:sldMkLst>
           <pc:docMk/>
           <pc:sldMk cId="2531450280" sldId="267"/>
@@ -441,7 +672,7 @@
           </ac:spMkLst>
         </pc:spChg>
         <pc:spChg chg="add mod">
-          <ac:chgData name="YUAN HE" userId="83267edd7d760aca" providerId="LiveId" clId="{88A60433-6414-4BD0-8EB6-31796CC6DF80}" dt="2020-10-15T13:37:48.115" v="1301" actId="1076"/>
+          <ac:chgData name="YUAN HE" userId="83267edd7d760aca" providerId="LiveId" clId="{88A60433-6414-4BD0-8EB6-31796CC6DF80}" dt="2020-10-19T23:43:50.124" v="3247" actId="1076"/>
           <ac:spMkLst>
             <pc:docMk/>
             <pc:sldMk cId="2531450280" sldId="267"/>
@@ -457,7 +688,7 @@
           </ac:graphicFrameMkLst>
         </pc:graphicFrameChg>
         <pc:graphicFrameChg chg="add mod ord modGraphic">
-          <ac:chgData name="YUAN HE" userId="83267edd7d760aca" providerId="LiveId" clId="{88A60433-6414-4BD0-8EB6-31796CC6DF80}" dt="2020-10-15T13:18:44.455" v="333" actId="113"/>
+          <ac:chgData name="YUAN HE" userId="83267edd7d760aca" providerId="LiveId" clId="{88A60433-6414-4BD0-8EB6-31796CC6DF80}" dt="2020-10-19T23:43:46.742" v="3246" actId="20577"/>
           <ac:graphicFrameMkLst>
             <pc:docMk/>
             <pc:sldMk cId="2531450280" sldId="267"/>
@@ -466,7 +697,7 @@
         </pc:graphicFrameChg>
       </pc:sldChg>
       <pc:sldChg chg="addSp delSp modSp mod ord">
-        <pc:chgData name="YUAN HE" userId="83267edd7d760aca" providerId="LiveId" clId="{88A60433-6414-4BD0-8EB6-31796CC6DF80}" dt="2020-10-15T13:19:20.570" v="416" actId="20577"/>
+        <pc:chgData name="YUAN HE" userId="83267edd7d760aca" providerId="LiveId" clId="{88A60433-6414-4BD0-8EB6-31796CC6DF80}" dt="2020-10-19T23:44:04.484" v="3255" actId="20577"/>
         <pc:sldMkLst>
           <pc:docMk/>
           <pc:sldMk cId="1315378316" sldId="268"/>
@@ -480,7 +711,7 @@
           </ac:spMkLst>
         </pc:spChg>
         <pc:graphicFrameChg chg="add mod ord modGraphic">
-          <ac:chgData name="YUAN HE" userId="83267edd7d760aca" providerId="LiveId" clId="{88A60433-6414-4BD0-8EB6-31796CC6DF80}" dt="2020-10-15T13:19:20.570" v="416" actId="20577"/>
+          <ac:chgData name="YUAN HE" userId="83267edd7d760aca" providerId="LiveId" clId="{88A60433-6414-4BD0-8EB6-31796CC6DF80}" dt="2020-10-19T23:44:04.484" v="3255" actId="20577"/>
           <ac:graphicFrameMkLst>
             <pc:docMk/>
             <pc:sldMk cId="1315378316" sldId="268"/>
@@ -489,13 +720,13 @@
         </pc:graphicFrameChg>
       </pc:sldChg>
       <pc:sldChg chg="modSp mod">
-        <pc:chgData name="YUAN HE" userId="83267edd7d760aca" providerId="LiveId" clId="{88A60433-6414-4BD0-8EB6-31796CC6DF80}" dt="2020-10-15T13:31:15.276" v="1228" actId="20577"/>
+        <pc:chgData name="YUAN HE" userId="83267edd7d760aca" providerId="LiveId" clId="{88A60433-6414-4BD0-8EB6-31796CC6DF80}" dt="2020-10-19T12:38:05.090" v="2822" actId="20577"/>
         <pc:sldMkLst>
           <pc:docMk/>
           <pc:sldMk cId="3303117943" sldId="269"/>
         </pc:sldMkLst>
         <pc:spChg chg="mod">
-          <ac:chgData name="YUAN HE" userId="83267edd7d760aca" providerId="LiveId" clId="{88A60433-6414-4BD0-8EB6-31796CC6DF80}" dt="2020-10-15T13:31:15.276" v="1228" actId="20577"/>
+          <ac:chgData name="YUAN HE" userId="83267edd7d760aca" providerId="LiveId" clId="{88A60433-6414-4BD0-8EB6-31796CC6DF80}" dt="2020-10-19T12:38:05.090" v="2822" actId="20577"/>
           <ac:spMkLst>
             <pc:docMk/>
             <pc:sldMk cId="3303117943" sldId="269"/>
@@ -658,8 +889,8 @@
           </ac:picMkLst>
         </pc:picChg>
       </pc:sldChg>
-      <pc:sldChg chg="delSp modSp add mod">
-        <pc:chgData name="YUAN HE" userId="83267edd7d760aca" providerId="LiveId" clId="{88A60433-6414-4BD0-8EB6-31796CC6DF80}" dt="2020-10-15T17:23:59.844" v="1603" actId="478"/>
+      <pc:sldChg chg="addSp delSp modSp add mod">
+        <pc:chgData name="YUAN HE" userId="83267edd7d760aca" providerId="LiveId" clId="{88A60433-6414-4BD0-8EB6-31796CC6DF80}" dt="2020-10-19T23:42:12.964" v="3209" actId="1076"/>
         <pc:sldMkLst>
           <pc:docMk/>
           <pc:sldMk cId="3869838074" sldId="274"/>
@@ -673,13 +904,21 @@
           </ac:spMkLst>
         </pc:spChg>
         <pc:spChg chg="mod">
-          <ac:chgData name="YUAN HE" userId="83267edd7d760aca" providerId="LiveId" clId="{88A60433-6414-4BD0-8EB6-31796CC6DF80}" dt="2020-10-15T17:23:49.336" v="1600" actId="114"/>
+          <ac:chgData name="YUAN HE" userId="83267edd7d760aca" providerId="LiveId" clId="{88A60433-6414-4BD0-8EB6-31796CC6DF80}" dt="2020-10-19T23:42:03.855" v="3206" actId="207"/>
           <ac:spMkLst>
             <pc:docMk/>
             <pc:sldMk cId="3869838074" sldId="274"/>
             <ac:spMk id="3" creationId="{01428578-FFEE-4621-943C-3510021ACC65}"/>
           </ac:spMkLst>
         </pc:spChg>
+        <pc:picChg chg="add mod">
+          <ac:chgData name="YUAN HE" userId="83267edd7d760aca" providerId="LiveId" clId="{88A60433-6414-4BD0-8EB6-31796CC6DF80}" dt="2020-10-19T23:42:12.964" v="3209" actId="1076"/>
+          <ac:picMkLst>
+            <pc:docMk/>
+            <pc:sldMk cId="3869838074" sldId="274"/>
+            <ac:picMk id="4" creationId="{2AC814E2-70DF-4100-908B-D5D03D1874BA}"/>
+          </ac:picMkLst>
+        </pc:picChg>
         <pc:picChg chg="del">
           <ac:chgData name="YUAN HE" userId="83267edd7d760aca" providerId="LiveId" clId="{88A60433-6414-4BD0-8EB6-31796CC6DF80}" dt="2020-10-15T17:23:59.844" v="1603" actId="478"/>
           <ac:picMkLst>
@@ -784,6 +1023,53 @@
           </ac:cxnSpMkLst>
         </pc:cxnChg>
       </pc:sldChg>
+      <pc:sldChg chg="delSp modSp add mod delAnim modAnim">
+        <pc:chgData name="YUAN HE" userId="83267edd7d760aca" providerId="LiveId" clId="{88A60433-6414-4BD0-8EB6-31796CC6DF80}" dt="2020-10-20T18:54:48.100" v="4003" actId="20577"/>
+        <pc:sldMkLst>
+          <pc:docMk/>
+          <pc:sldMk cId="3544129574" sldId="276"/>
+        </pc:sldMkLst>
+        <pc:spChg chg="mod">
+          <ac:chgData name="YUAN HE" userId="83267edd7d760aca" providerId="LiveId" clId="{88A60433-6414-4BD0-8EB6-31796CC6DF80}" dt="2020-10-20T18:43:52.592" v="3389" actId="20577"/>
+          <ac:spMkLst>
+            <pc:docMk/>
+            <pc:sldMk cId="3544129574" sldId="276"/>
+            <ac:spMk id="2" creationId="{4DC8D264-9052-48D1-B0D9-F3547DAE2A9F}"/>
+          </ac:spMkLst>
+        </pc:spChg>
+        <pc:spChg chg="mod">
+          <ac:chgData name="YUAN HE" userId="83267edd7d760aca" providerId="LiveId" clId="{88A60433-6414-4BD0-8EB6-31796CC6DF80}" dt="2020-10-20T18:54:48.100" v="4003" actId="20577"/>
+          <ac:spMkLst>
+            <pc:docMk/>
+            <pc:sldMk cId="3544129574" sldId="276"/>
+            <ac:spMk id="3" creationId="{59199C4C-5AA4-49CE-81AC-CBF428574A2B}"/>
+          </ac:spMkLst>
+        </pc:spChg>
+        <pc:spChg chg="del">
+          <ac:chgData name="YUAN HE" userId="83267edd7d760aca" providerId="LiveId" clId="{88A60433-6414-4BD0-8EB6-31796CC6DF80}" dt="2020-10-20T18:43:44.974" v="3387" actId="478"/>
+          <ac:spMkLst>
+            <pc:docMk/>
+            <pc:sldMk cId="3544129574" sldId="276"/>
+            <ac:spMk id="5" creationId="{EC1C9A2F-B0D3-41E4-81AB-A7E671BC4C5F}"/>
+          </ac:spMkLst>
+        </pc:spChg>
+        <pc:spChg chg="del">
+          <ac:chgData name="YUAN HE" userId="83267edd7d760aca" providerId="LiveId" clId="{88A60433-6414-4BD0-8EB6-31796CC6DF80}" dt="2020-10-20T18:43:44.160" v="3386" actId="478"/>
+          <ac:spMkLst>
+            <pc:docMk/>
+            <pc:sldMk cId="3544129574" sldId="276"/>
+            <ac:spMk id="6" creationId="{164A4079-BA18-44BE-B123-D94F55CA1B22}"/>
+          </ac:spMkLst>
+        </pc:spChg>
+        <pc:graphicFrameChg chg="del">
+          <ac:chgData name="YUAN HE" userId="83267edd7d760aca" providerId="LiveId" clId="{88A60433-6414-4BD0-8EB6-31796CC6DF80}" dt="2020-10-20T18:43:41.920" v="3385" actId="21"/>
+          <ac:graphicFrameMkLst>
+            <pc:docMk/>
+            <pc:sldMk cId="3544129574" sldId="276"/>
+            <ac:graphicFrameMk id="4" creationId="{73B258A7-2279-4AE3-8317-4103BE58B152}"/>
+          </ac:graphicFrameMkLst>
+        </pc:graphicFrameChg>
+      </pc:sldChg>
     </pc:docChg>
   </pc:docChgLst>
 </pc:chgInfo>
@@ -938,7 +1224,7 @@
           <a:p>
             <a:fld id="{69843D93-4C90-4B93-A122-C742B4CB8EA4}" type="datetimeFigureOut">
               <a:rPr lang="en-GB" smtClean="0"/>
-              <a:t>17/10/2020</a:t>
+              <a:t>20/10/2020</a:t>
             </a:fld>
             <a:endParaRPr lang="en-GB"/>
           </a:p>
@@ -1138,7 +1424,7 @@
           <a:p>
             <a:fld id="{69843D93-4C90-4B93-A122-C742B4CB8EA4}" type="datetimeFigureOut">
               <a:rPr lang="en-GB" smtClean="0"/>
-              <a:t>17/10/2020</a:t>
+              <a:t>20/10/2020</a:t>
             </a:fld>
             <a:endParaRPr lang="en-GB"/>
           </a:p>
@@ -1348,7 +1634,7 @@
           <a:p>
             <a:fld id="{69843D93-4C90-4B93-A122-C742B4CB8EA4}" type="datetimeFigureOut">
               <a:rPr lang="en-GB" smtClean="0"/>
-              <a:t>17/10/2020</a:t>
+              <a:t>20/10/2020</a:t>
             </a:fld>
             <a:endParaRPr lang="en-GB"/>
           </a:p>
@@ -1548,7 +1834,7 @@
           <a:p>
             <a:fld id="{69843D93-4C90-4B93-A122-C742B4CB8EA4}" type="datetimeFigureOut">
               <a:rPr lang="en-GB" smtClean="0"/>
-              <a:t>17/10/2020</a:t>
+              <a:t>20/10/2020</a:t>
             </a:fld>
             <a:endParaRPr lang="en-GB"/>
           </a:p>
@@ -1824,7 +2110,7 @@
           <a:p>
             <a:fld id="{69843D93-4C90-4B93-A122-C742B4CB8EA4}" type="datetimeFigureOut">
               <a:rPr lang="en-GB" smtClean="0"/>
-              <a:t>17/10/2020</a:t>
+              <a:t>20/10/2020</a:t>
             </a:fld>
             <a:endParaRPr lang="en-GB"/>
           </a:p>
@@ -2092,7 +2378,7 @@
           <a:p>
             <a:fld id="{69843D93-4C90-4B93-A122-C742B4CB8EA4}" type="datetimeFigureOut">
               <a:rPr lang="en-GB" smtClean="0"/>
-              <a:t>17/10/2020</a:t>
+              <a:t>20/10/2020</a:t>
             </a:fld>
             <a:endParaRPr lang="en-GB"/>
           </a:p>
@@ -2507,7 +2793,7 @@
           <a:p>
             <a:fld id="{69843D93-4C90-4B93-A122-C742B4CB8EA4}" type="datetimeFigureOut">
               <a:rPr lang="en-GB" smtClean="0"/>
-              <a:t>17/10/2020</a:t>
+              <a:t>20/10/2020</a:t>
             </a:fld>
             <a:endParaRPr lang="en-GB"/>
           </a:p>
@@ -2649,7 +2935,7 @@
           <a:p>
             <a:fld id="{69843D93-4C90-4B93-A122-C742B4CB8EA4}" type="datetimeFigureOut">
               <a:rPr lang="en-GB" smtClean="0"/>
-              <a:t>17/10/2020</a:t>
+              <a:t>20/10/2020</a:t>
             </a:fld>
             <a:endParaRPr lang="en-GB"/>
           </a:p>
@@ -2762,7 +3048,7 @@
           <a:p>
             <a:fld id="{69843D93-4C90-4B93-A122-C742B4CB8EA4}" type="datetimeFigureOut">
               <a:rPr lang="en-GB" smtClean="0"/>
-              <a:t>17/10/2020</a:t>
+              <a:t>20/10/2020</a:t>
             </a:fld>
             <a:endParaRPr lang="en-GB"/>
           </a:p>
@@ -3075,7 +3361,7 @@
           <a:p>
             <a:fld id="{69843D93-4C90-4B93-A122-C742B4CB8EA4}" type="datetimeFigureOut">
               <a:rPr lang="en-GB" smtClean="0"/>
-              <a:t>17/10/2020</a:t>
+              <a:t>20/10/2020</a:t>
             </a:fld>
             <a:endParaRPr lang="en-GB"/>
           </a:p>
@@ -3364,7 +3650,7 @@
           <a:p>
             <a:fld id="{69843D93-4C90-4B93-A122-C742B4CB8EA4}" type="datetimeFigureOut">
               <a:rPr lang="en-GB" smtClean="0"/>
-              <a:t>17/10/2020</a:t>
+              <a:t>20/10/2020</a:t>
             </a:fld>
             <a:endParaRPr lang="en-GB"/>
           </a:p>
@@ -3607,7 +3893,7 @@
           <a:p>
             <a:fld id="{69843D93-4C90-4B93-A122-C742B4CB8EA4}" type="datetimeFigureOut">
               <a:rPr lang="en-GB" smtClean="0"/>
-              <a:t>17/10/2020</a:t>
+              <a:t>20/10/2020</a:t>
             </a:fld>
             <a:endParaRPr lang="en-GB"/>
           </a:p>
@@ -4496,10 +4782,10 @@
       </p:pic>
       <p:pic>
         <p:nvPicPr>
-          <p:cNvPr id="13" name="Picture 12">
-            <a:extLst>
-              <a:ext uri="{FF2B5EF4-FFF2-40B4-BE49-F238E27FC236}">
-                <a16:creationId xmlns:a16="http://schemas.microsoft.com/office/drawing/2014/main" id="{77E8B936-BA56-459E-B1D9-A44D2980316E}"/>
+          <p:cNvPr id="4" name="Picture 3" descr="A picture containing shape&#10;&#10;Description automatically generated">
+            <a:extLst>
+              <a:ext uri="{FF2B5EF4-FFF2-40B4-BE49-F238E27FC236}">
+                <a16:creationId xmlns:a16="http://schemas.microsoft.com/office/drawing/2014/main" id="{C0CFF55C-177A-4F34-8763-E5C8ED4DE246}"/>
               </a:ext>
             </a:extLst>
           </p:cNvPr>
@@ -4509,37 +4795,7 @@
           <p:nvPr/>
         </p:nvPicPr>
         <p:blipFill>
-          <a:blip r:embed="rId5"/>
-          <a:stretch>
-            <a:fillRect/>
-          </a:stretch>
-        </p:blipFill>
-        <p:spPr>
-          <a:xfrm>
-            <a:off x="5361368" y="2463902"/>
-            <a:ext cx="1469263" cy="493819"/>
-          </a:xfrm>
-          <a:prstGeom prst="rect">
-            <a:avLst/>
-          </a:prstGeom>
-        </p:spPr>
-      </p:pic>
-      <p:pic>
-        <p:nvPicPr>
-          <p:cNvPr id="4" name="Picture 3" descr="A picture containing shape&#10;&#10;Description automatically generated">
-            <a:extLst>
-              <a:ext uri="{FF2B5EF4-FFF2-40B4-BE49-F238E27FC236}">
-                <a16:creationId xmlns:a16="http://schemas.microsoft.com/office/drawing/2014/main" id="{C0CFF55C-177A-4F34-8763-E5C8ED4DE246}"/>
-              </a:ext>
-            </a:extLst>
-          </p:cNvPr>
-          <p:cNvPicPr>
-            <a:picLocks noChangeAspect="1"/>
-          </p:cNvPicPr>
-          <p:nvPr/>
-        </p:nvPicPr>
-        <p:blipFill>
-          <a:blip r:embed="rId6">
+          <a:blip r:embed="rId5">
             <a:extLst>
               <a:ext uri="{28A0092B-C50C-407E-A947-70E740481C1C}">
                 <a14:useLocalDpi xmlns:a14="http://schemas.microsoft.com/office/drawing/2010/main" val="0"/>
@@ -4575,7 +4831,7 @@
           <p:nvPr/>
         </p:nvPicPr>
         <p:blipFill>
-          <a:blip r:embed="rId7">
+          <a:blip r:embed="rId6">
             <a:extLst>
               <a:ext uri="{28A0092B-C50C-407E-A947-70E740481C1C}">
                 <a14:useLocalDpi xmlns:a14="http://schemas.microsoft.com/office/drawing/2010/main" val="0"/>
@@ -4611,7 +4867,7 @@
           <p:nvPr/>
         </p:nvPicPr>
         <p:blipFill>
-          <a:blip r:embed="rId8">
+          <a:blip r:embed="rId7">
             <a:extLst>
               <a:ext uri="{28A0092B-C50C-407E-A947-70E740481C1C}">
                 <a14:useLocalDpi xmlns:a14="http://schemas.microsoft.com/office/drawing/2010/main" val="0"/>
@@ -4647,7 +4903,7 @@
           <p:nvPr/>
         </p:nvPicPr>
         <p:blipFill>
-          <a:blip r:embed="rId9">
+          <a:blip r:embed="rId8">
             <a:extLst>
               <a:ext uri="{28A0092B-C50C-407E-A947-70E740481C1C}">
                 <a14:useLocalDpi xmlns:a14="http://schemas.microsoft.com/office/drawing/2010/main" val="0"/>
@@ -4673,6 +4929,42 @@
           </a:effectLst>
         </p:spPr>
       </p:pic>
+      <p:sp>
+        <p:nvSpPr>
+          <p:cNvPr id="2" name="TextBox 1">
+            <a:extLst>
+              <a:ext uri="{FF2B5EF4-FFF2-40B4-BE49-F238E27FC236}">
+                <a16:creationId xmlns:a16="http://schemas.microsoft.com/office/drawing/2014/main" id="{A076D033-2E0A-408A-942F-14147FA790A1}"/>
+              </a:ext>
+            </a:extLst>
+          </p:cNvPr>
+          <p:cNvSpPr txBox="1"/>
+          <p:nvPr/>
+        </p:nvSpPr>
+        <p:spPr>
+          <a:xfrm>
+            <a:off x="5424017" y="2518249"/>
+            <a:ext cx="1469633" cy="369332"/>
+          </a:xfrm>
+          <a:prstGeom prst="rect">
+            <a:avLst/>
+          </a:prstGeom>
+          <a:noFill/>
+        </p:spPr>
+        <p:txBody>
+          <a:bodyPr wrap="none" rtlCol="0">
+            <a:spAutoFit/>
+          </a:bodyPr>
+          <a:lstStyle/>
+          <a:p>
+            <a:r>
+              <a:rPr lang="en-US" dirty="0"/>
+              <a:t>October 2020</a:t>
+            </a:r>
+            <a:endParaRPr lang="en-GB" dirty="0"/>
+          </a:p>
+        </p:txBody>
+      </p:sp>
     </p:spTree>
     <p:extLst>
       <p:ext uri="{BB962C8B-B14F-4D97-AF65-F5344CB8AC3E}">
@@ -5583,14 +5875,14 @@
             <p:ph idx="1"/>
             <p:extLst>
               <p:ext uri="{D42A27DB-BD31-4B8C-83A1-F6EECF244321}">
-                <p14:modId xmlns:p14="http://schemas.microsoft.com/office/powerpoint/2010/main" val="3255577444"/>
+                <p14:modId xmlns:p14="http://schemas.microsoft.com/office/powerpoint/2010/main" val="1122144875"/>
               </p:ext>
             </p:extLst>
           </p:nvPr>
         </p:nvGraphicFramePr>
         <p:xfrm>
           <a:off x="838200" y="1848864"/>
-          <a:ext cx="10515600" cy="2595880"/>
+          <a:ext cx="10515600" cy="3683000"/>
         </p:xfrm>
         <a:graphic>
           <a:graphicData uri="http://schemas.openxmlformats.org/drawingml/2006/table">
@@ -5841,7 +6133,7 @@
                     <a:p>
                       <a:r>
                         <a:rPr lang="en-GB" dirty="0"/>
-                        <a:t>Baseline</a:t>
+                        <a:t>Baseline (Ours)</a:t>
                       </a:r>
                     </a:p>
                   </a:txBody>
@@ -5913,7 +6205,7 @@
                     <a:p>
                       <a:r>
                         <a:rPr lang="en-GB" dirty="0"/>
-                        <a:t>Multi-task</a:t>
+                        <a:t>Multi-task (Ours)</a:t>
                       </a:r>
                     </a:p>
                   </a:txBody>
@@ -5987,7 +6279,50 @@
                         <a:rPr lang="en-GB" dirty="0" err="1"/>
                         <a:t>BiDeep</a:t>
                       </a:r>
-                      <a:endParaRPr lang="en-GB" dirty="0"/>
+                      <a:r>
+                        <a:rPr lang="en-GB" dirty="0"/>
+                        <a:t> </a:t>
+                      </a:r>
+                      <a:r>
+                        <a:rPr lang="en-GB" dirty="0">
+                          <a:solidFill>
+                            <a:schemeClr val="tx1"/>
+                          </a:solidFill>
+                        </a:rPr>
+                        <a:t>(</a:t>
+                      </a:r>
+                      <a:r>
+                        <a:rPr lang="en-GB" dirty="0" err="1">
+                          <a:solidFill>
+                            <a:schemeClr val="tx1"/>
+                          </a:solidFill>
+                        </a:rPr>
+                        <a:t>Grundkiewicz</a:t>
+                      </a:r>
+                      <a:r>
+                        <a:rPr lang="en-GB" dirty="0">
+                          <a:solidFill>
+                            <a:schemeClr val="tx1"/>
+                          </a:solidFill>
+                        </a:rPr>
+                        <a:t> and </a:t>
+                      </a:r>
+                      <a:r>
+                        <a:rPr lang="en-GB" dirty="0" err="1">
+                          <a:solidFill>
+                            <a:schemeClr val="tx1"/>
+                          </a:solidFill>
+                        </a:rPr>
+                        <a:t>Heafield</a:t>
+                      </a:r>
+                      <a:r>
+                        <a:rPr lang="en-GB" dirty="0">
+                          <a:solidFill>
+                            <a:schemeClr val="tx1"/>
+                          </a:solidFill>
+                        </a:rPr>
+                        <a:t>, 2018)</a:t>
+                      </a:r>
                     </a:p>
                   </a:txBody>
                   <a:tcPr/>
@@ -6062,7 +6397,47 @@
                       </a:r>
                       <a:r>
                         <a:rPr lang="en-GB" dirty="0"/>
-                        <a:t>+</a:t>
+                        <a:t>+ </a:t>
+                      </a:r>
+                      <a:r>
+                        <a:rPr lang="en-GB" dirty="0">
+                          <a:solidFill>
+                            <a:schemeClr val="tx1"/>
+                          </a:solidFill>
+                        </a:rPr>
+                        <a:t>(</a:t>
+                      </a:r>
+                      <a:r>
+                        <a:rPr lang="en-GB" dirty="0" err="1">
+                          <a:solidFill>
+                            <a:schemeClr val="tx1"/>
+                          </a:solidFill>
+                        </a:rPr>
+                        <a:t>Grundkiewicz</a:t>
+                      </a:r>
+                      <a:r>
+                        <a:rPr lang="en-GB" dirty="0">
+                          <a:solidFill>
+                            <a:schemeClr val="tx1"/>
+                          </a:solidFill>
+                        </a:rPr>
+                        <a:t> and </a:t>
+                      </a:r>
+                      <a:r>
+                        <a:rPr lang="en-GB" dirty="0" err="1">
+                          <a:solidFill>
+                            <a:schemeClr val="tx1"/>
+                          </a:solidFill>
+                        </a:rPr>
+                        <a:t>Heafield</a:t>
+                      </a:r>
+                      <a:r>
+                        <a:rPr lang="en-GB" dirty="0">
+                          <a:solidFill>
+                            <a:schemeClr val="tx1"/>
+                          </a:solidFill>
+                        </a:rPr>
+                        <a:t>, 2018)</a:t>
                       </a:r>
                     </a:p>
                   </a:txBody>
@@ -6559,14 +6934,14 @@
             <p:ph idx="1"/>
             <p:extLst>
               <p:ext uri="{D42A27DB-BD31-4B8C-83A1-F6EECF244321}">
-                <p14:modId xmlns:p14="http://schemas.microsoft.com/office/powerpoint/2010/main" val="3298196748"/>
+                <p14:modId xmlns:p14="http://schemas.microsoft.com/office/powerpoint/2010/main" val="3445012188"/>
               </p:ext>
             </p:extLst>
           </p:nvPr>
         </p:nvGraphicFramePr>
         <p:xfrm>
           <a:off x="838200" y="1825625"/>
-          <a:ext cx="10515597" cy="2225040"/>
+          <a:ext cx="10515597" cy="2494280"/>
         </p:xfrm>
         <a:graphic>
           <a:graphicData uri="http://schemas.openxmlformats.org/drawingml/2006/table">
@@ -6707,6 +7082,50 @@
                       <a:r>
                         <a:rPr lang="en-US" dirty="0" err="1"/>
                         <a:t>romang</a:t>
+                      </a:r>
+                      <a:r>
+                        <a:rPr lang="en-US" dirty="0"/>
+                        <a:t> </a:t>
+                      </a:r>
+                      <a:r>
+                        <a:rPr lang="en-GB" dirty="0">
+                          <a:solidFill>
+                            <a:schemeClr val="tx1"/>
+                          </a:solidFill>
+                        </a:rPr>
+                        <a:t>(</a:t>
+                      </a:r>
+                      <a:r>
+                        <a:rPr lang="en-GB" dirty="0" err="1">
+                          <a:solidFill>
+                            <a:schemeClr val="tx1"/>
+                          </a:solidFill>
+                        </a:rPr>
+                        <a:t>Grundkiewicz</a:t>
+                      </a:r>
+                      <a:r>
+                        <a:rPr lang="en-GB" dirty="0">
+                          <a:solidFill>
+                            <a:schemeClr val="tx1"/>
+                          </a:solidFill>
+                        </a:rPr>
+                        <a:t> and </a:t>
+                      </a:r>
+                      <a:r>
+                        <a:rPr lang="en-GB" dirty="0" err="1">
+                          <a:solidFill>
+                            <a:schemeClr val="tx1"/>
+                          </a:solidFill>
+                        </a:rPr>
+                        <a:t>Heafield</a:t>
+                      </a:r>
+                      <a:r>
+                        <a:rPr lang="en-GB" dirty="0">
+                          <a:solidFill>
+                            <a:schemeClr val="tx1"/>
+                          </a:solidFill>
+                        </a:rPr>
+                        <a:t>, 2018)</a:t>
                       </a:r>
                       <a:endParaRPr lang="en-GB" dirty="0"/>
                     </a:p>
@@ -6997,7 +7416,7 @@
         </p:nvSpPr>
         <p:spPr>
           <a:xfrm>
-            <a:off x="7859486" y="2998580"/>
+            <a:off x="7859486" y="3228623"/>
             <a:ext cx="1110343" cy="295812"/>
           </a:xfrm>
           <a:prstGeom prst="ellipse">
@@ -7588,14 +8007,14 @@
             <p:ph idx="1"/>
             <p:extLst>
               <p:ext uri="{D42A27DB-BD31-4B8C-83A1-F6EECF244321}">
-                <p14:modId xmlns:p14="http://schemas.microsoft.com/office/powerpoint/2010/main" val="1891500784"/>
+                <p14:modId xmlns:p14="http://schemas.microsoft.com/office/powerpoint/2010/main" val="1592717264"/>
               </p:ext>
             </p:extLst>
           </p:nvPr>
         </p:nvGraphicFramePr>
         <p:xfrm>
           <a:off x="838200" y="1825625"/>
-          <a:ext cx="10515600" cy="2225040"/>
+          <a:ext cx="10515600" cy="2494280"/>
         </p:xfrm>
         <a:graphic>
           <a:graphicData uri="http://schemas.openxmlformats.org/drawingml/2006/table">
@@ -7940,6 +8359,50 @@
                         <a:rPr lang="en-US" dirty="0" err="1"/>
                         <a:t>BiDeep</a:t>
                       </a:r>
+                      <a:r>
+                        <a:rPr lang="en-US" dirty="0"/>
+                        <a:t> </a:t>
+                      </a:r>
+                      <a:r>
+                        <a:rPr lang="en-GB" dirty="0">
+                          <a:solidFill>
+                            <a:schemeClr val="tx1"/>
+                          </a:solidFill>
+                        </a:rPr>
+                        <a:t>(</a:t>
+                      </a:r>
+                      <a:r>
+                        <a:rPr lang="en-GB" dirty="0" err="1">
+                          <a:solidFill>
+                            <a:schemeClr val="tx1"/>
+                          </a:solidFill>
+                        </a:rPr>
+                        <a:t>Grundkiewicz</a:t>
+                      </a:r>
+                      <a:r>
+                        <a:rPr lang="en-GB" dirty="0">
+                          <a:solidFill>
+                            <a:schemeClr val="tx1"/>
+                          </a:solidFill>
+                        </a:rPr>
+                        <a:t> and </a:t>
+                      </a:r>
+                      <a:r>
+                        <a:rPr lang="en-GB" dirty="0" err="1">
+                          <a:solidFill>
+                            <a:schemeClr val="tx1"/>
+                          </a:solidFill>
+                        </a:rPr>
+                        <a:t>Heafield</a:t>
+                      </a:r>
+                      <a:r>
+                        <a:rPr lang="en-GB" dirty="0">
+                          <a:solidFill>
+                            <a:schemeClr val="tx1"/>
+                          </a:solidFill>
+                        </a:rPr>
+                        <a:t>, 2018)</a:t>
+                      </a:r>
                       <a:endParaRPr lang="en-GB" dirty="0"/>
                     </a:p>
                   </a:txBody>
@@ -8454,13 +8917,6 @@
               <a:t>The idea can be generalized to other transliteration tasks.</a:t>
             </a:r>
           </a:p>
-          <a:p>
-            <a:r>
-              <a:rPr lang="en-US" dirty="0"/>
-              <a:t>Redesign the objective function by treating lambda as a trainable parameter is a possible future work.</a:t>
-            </a:r>
-            <a:endParaRPr lang="en-GB" dirty="0"/>
-          </a:p>
         </p:txBody>
       </p:sp>
     </p:spTree>
@@ -10963,7 +11419,7 @@
         <p:spPr>
           <a:xfrm>
             <a:off x="670705" y="1374660"/>
-            <a:ext cx="8941692" cy="3693319"/>
+            <a:ext cx="8941692" cy="5078313"/>
           </a:xfrm>
           <a:prstGeom prst="rect">
             <a:avLst/>
@@ -11104,6 +11560,71 @@
                 </a:solidFill>
               </a:rPr>
               <a:t>In Proceedings of the 53rd Annual Meeting of the Association for Computational Linguistics and the 7th International Joint Conference on Natural Language Processing (Volume 1: Long Papers), pages 1723–1732, Beijing, China. Association for Computational Linguistics.</a:t>
+            </a:r>
+          </a:p>
+          <a:p>
+            <a:endParaRPr lang="en-GB" i="1" dirty="0">
+              <a:solidFill>
+                <a:schemeClr val="accent5"/>
+              </a:solidFill>
+            </a:endParaRPr>
+          </a:p>
+          <a:p>
+            <a:r>
+              <a:rPr lang="en-GB" dirty="0">
+                <a:solidFill>
+                  <a:srgbClr val="325A94"/>
+                </a:solidFill>
+              </a:rPr>
+              <a:t>Roman </a:t>
+            </a:r>
+            <a:r>
+              <a:rPr lang="en-GB" dirty="0" err="1">
+                <a:solidFill>
+                  <a:srgbClr val="325A94"/>
+                </a:solidFill>
+              </a:rPr>
+              <a:t>Grundkiewicz</a:t>
+            </a:r>
+            <a:r>
+              <a:rPr lang="en-GB" dirty="0">
+                <a:solidFill>
+                  <a:srgbClr val="325A94"/>
+                </a:solidFill>
+              </a:rPr>
+              <a:t> and Kenneth </a:t>
+            </a:r>
+            <a:r>
+              <a:rPr lang="en-GB" dirty="0" err="1">
+                <a:solidFill>
+                  <a:srgbClr val="325A94"/>
+                </a:solidFill>
+              </a:rPr>
+              <a:t>Heafield</a:t>
+            </a:r>
+            <a:r>
+              <a:rPr lang="en-GB" dirty="0">
+                <a:solidFill>
+                  <a:srgbClr val="325A94"/>
+                </a:solidFill>
+              </a:rPr>
+              <a:t>. 2018. </a:t>
+            </a:r>
+          </a:p>
+          <a:p>
+            <a:r>
+              <a:rPr lang="en-GB" dirty="0"/>
+              <a:t>Neural machine translation techniques for named entity transliteration. </a:t>
+            </a:r>
+          </a:p>
+          <a:p>
+            <a:r>
+              <a:rPr lang="en-GB" i="1" dirty="0">
+                <a:solidFill>
+                  <a:schemeClr val="accent5"/>
+                </a:solidFill>
+              </a:rPr>
+              <a:t>In Proceedings of the Seventh Named Entities Workshop, pages 89–94, Melbourne, Australia. Association for Computational Linguistics.</a:t>
             </a:r>
           </a:p>
           <a:p>
@@ -11207,6 +11728,45 @@
         <p:spPr>
           <a:xfrm>
             <a:off x="496150" y="1435759"/>
+            <a:ext cx="265880" cy="265880"/>
+          </a:xfrm>
+          <a:prstGeom prst="rect">
+            <a:avLst/>
+          </a:prstGeom>
+        </p:spPr>
+      </p:pic>
+      <p:pic>
+        <p:nvPicPr>
+          <p:cNvPr id="4" name="Graphic 3" descr="Document">
+            <a:extLst>
+              <a:ext uri="{FF2B5EF4-FFF2-40B4-BE49-F238E27FC236}">
+                <a16:creationId xmlns:a16="http://schemas.microsoft.com/office/drawing/2014/main" id="{2AC814E2-70DF-4100-908B-D5D03D1874BA}"/>
+              </a:ext>
+            </a:extLst>
+          </p:cNvPr>
+          <p:cNvPicPr>
+            <a:picLocks noChangeAspect="1"/>
+          </p:cNvPicPr>
+          <p:nvPr/>
+        </p:nvPicPr>
+        <p:blipFill>
+          <a:blip r:embed="rId2">
+            <a:extLst>
+              <a:ext uri="{28A0092B-C50C-407E-A947-70E740481C1C}">
+                <a14:useLocalDpi xmlns:a14="http://schemas.microsoft.com/office/drawing/2010/main" val="0"/>
+              </a:ext>
+              <a:ext uri="{96DAC541-7B7A-43D3-8B79-37D633B846F1}">
+                <asvg:svgBlip xmlns:asvg="http://schemas.microsoft.com/office/drawing/2016/SVG/main" r:embed="rId3"/>
+              </a:ext>
+            </a:extLst>
+          </a:blip>
+          <a:stretch>
+            <a:fillRect/>
+          </a:stretch>
+        </p:blipFill>
+        <p:spPr>
+          <a:xfrm>
+            <a:off x="496150" y="4169513"/>
             <a:ext cx="265880" cy="265880"/>
           </a:xfrm>
           <a:prstGeom prst="rect">
@@ -11374,8 +11934,8 @@
         </p:nvSpPr>
         <p:spPr>
           <a:xfrm>
-            <a:off x="643467" y="1440361"/>
-            <a:ext cx="10905066" cy="4393982"/>
+            <a:off x="643467" y="1357550"/>
+            <a:ext cx="10905066" cy="5178716"/>
           </a:xfrm>
         </p:spPr>
         <p:txBody>
@@ -11388,9 +11948,6 @@
               <a:rPr lang="en-GB" sz="2400" dirty="0"/>
               <a:t>Transliteration: translation of named entities based on pronunciation.</a:t>
             </a:r>
-          </a:p>
-          <a:p>
-            <a:endParaRPr lang="en-GB" sz="2000" dirty="0"/>
           </a:p>
           <a:p>
             <a:endParaRPr lang="en-GB" sz="2000" dirty="0"/>
@@ -11490,9 +12047,38 @@
             </a:r>
           </a:p>
           <a:p>
-            <a:pPr marL="0" indent="0">
-              <a:buNone/>
-            </a:pPr>
+            <a:r>
+              <a:rPr lang="en-GB" sz="2400" dirty="0"/>
+              <a:t>Why study English-to-Chinese Transliteration?</a:t>
+            </a:r>
+          </a:p>
+          <a:p>
+            <a:pPr lvl="1"/>
+            <a:r>
+              <a:rPr lang="en-GB" sz="2000" dirty="0"/>
+              <a:t>Challenging because: </a:t>
+            </a:r>
+          </a:p>
+          <a:p>
+            <a:pPr lvl="2"/>
+            <a:r>
+              <a:rPr lang="en-GB" dirty="0"/>
+              <a:t>English is alphabetical, characters are not individually meaningful.</a:t>
+            </a:r>
+          </a:p>
+          <a:p>
+            <a:pPr lvl="2"/>
+            <a:r>
+              <a:rPr lang="en-GB" dirty="0"/>
+              <a:t>Chinese is logographic – i.e. each character represents a whole word or phrase.</a:t>
+            </a:r>
+          </a:p>
+          <a:p>
+            <a:pPr lvl="2"/>
+            <a:endParaRPr lang="en-GB" sz="1600" dirty="0"/>
+          </a:p>
+          <a:p>
+            <a:pPr lvl="1"/>
             <a:endParaRPr lang="en-GB" sz="2000" dirty="0"/>
           </a:p>
         </p:txBody>
@@ -11780,13 +12366,13 @@
           <p:nvPr>
             <p:extLst>
               <p:ext uri="{D42A27DB-BD31-4B8C-83A1-F6EECF244321}">
-                <p14:modId xmlns:p14="http://schemas.microsoft.com/office/powerpoint/2010/main" val="2451407286"/>
+                <p14:modId xmlns:p14="http://schemas.microsoft.com/office/powerpoint/2010/main" val="1451146778"/>
               </p:ext>
             </p:extLst>
           </p:nvPr>
         </p:nvGraphicFramePr>
         <p:xfrm>
-          <a:off x="2032000" y="2205258"/>
+          <a:off x="2032000" y="1986363"/>
           <a:ext cx="8128000" cy="741680"/>
         </p:xfrm>
         <a:graphic>
@@ -12151,7 +12737,7 @@
                   </a:schemeClr>
                 </a:solidFill>
               </a:rPr>
-              <a:t>Why study English-to-Chinese Transliteration?</a:t>
+              <a:t>Our Contributions</a:t>
             </a:r>
           </a:p>
         </p:txBody>
@@ -12180,43 +12766,13 @@
         </p:spPr>
         <p:txBody>
           <a:bodyPr>
-            <a:normAutofit/>
+            <a:normAutofit fontScale="92500"/>
           </a:bodyPr>
           <a:lstStyle/>
           <a:p>
             <a:r>
               <a:rPr lang="en-GB" sz="2400" dirty="0"/>
-              <a:t>Challenging:</a:t>
-            </a:r>
-          </a:p>
-          <a:p>
-            <a:pPr lvl="1"/>
-            <a:r>
-              <a:rPr lang="en-GB" sz="2000" dirty="0"/>
-              <a:t>English is alphabetical, characters are not individually meaningful.</a:t>
-            </a:r>
-          </a:p>
-          <a:p>
-            <a:pPr lvl="1"/>
-            <a:r>
-              <a:rPr lang="en-GB" sz="2000" dirty="0"/>
-              <a:t>Chinese is logographic – i.e. each character represents a whole word or phrase.</a:t>
-            </a:r>
-          </a:p>
-          <a:p>
-            <a:endParaRPr lang="en-GB" sz="2400" dirty="0"/>
-          </a:p>
-          <a:p>
-            <a:r>
-              <a:rPr lang="en-GB" sz="2400" dirty="0"/>
-              <a:t>New dataset in this language pair:</a:t>
-            </a:r>
-          </a:p>
-          <a:p>
-            <a:pPr lvl="1"/>
-            <a:r>
-              <a:rPr lang="en-GB" sz="2000" dirty="0"/>
-              <a:t>Extracted from a giant dictionary written by the official news agency.</a:t>
+              <a:t>A new English-to-Chinese named entities dataset (“DICT”) particular to names of people, based on the dictionary:</a:t>
             </a:r>
           </a:p>
           <a:p>
@@ -12224,7 +12780,38 @@
               <a:buNone/>
             </a:pPr>
             <a:r>
-              <a:rPr lang="en-GB" sz="1600">
+              <a:rPr lang="en-GB" sz="2000" dirty="0"/>
+              <a:t> </a:t>
+            </a:r>
+            <a:r>
+              <a:rPr lang="en-GB" sz="2000" i="1" dirty="0">
+                <a:solidFill>
+                  <a:schemeClr val="accent1"/>
+                </a:solidFill>
+              </a:rPr>
+              <a:t>A Comprehensive Dictionary of Names in Roman-Chinese </a:t>
+            </a:r>
+            <a:r>
+              <a:rPr lang="en-GB" sz="2000" i="1" dirty="0">
+                <a:solidFill>
+                  <a:schemeClr val="accent1">
+                    <a:lumMod val="75000"/>
+                  </a:schemeClr>
+                </a:solidFill>
+              </a:rPr>
+              <a:t>(Xinhua News Agency, 2007</a:t>
+            </a:r>
+            <a:r>
+              <a:rPr lang="en-GB" sz="2000" dirty="0"/>
+              <a:t>)</a:t>
+            </a:r>
+          </a:p>
+          <a:p>
+            <a:pPr marL="457200" lvl="1" indent="0">
+              <a:buNone/>
+            </a:pPr>
+            <a:r>
+              <a:rPr lang="en-GB" sz="2000" dirty="0">
                 <a:solidFill>
                   <a:schemeClr val="accent6">
                     <a:lumMod val="60000"/>
@@ -12232,10 +12819,10 @@
                   </a:schemeClr>
                 </a:solidFill>
               </a:rPr>
-              <a:t>     Our </a:t>
-            </a:r>
-            <a:r>
-              <a:rPr lang="en-US" sz="1600" dirty="0">
+              <a:t> Our </a:t>
+            </a:r>
+            <a:r>
+              <a:rPr lang="en-US" sz="2000" dirty="0">
                 <a:solidFill>
                   <a:schemeClr val="accent6">
                     <a:lumMod val="60000"/>
@@ -12246,7 +12833,7 @@
               <a:t>data</a:t>
             </a:r>
             <a:r>
-              <a:rPr lang="en-GB" sz="1600" dirty="0">
+              <a:rPr lang="en-GB" sz="2000" dirty="0">
                 <a:solidFill>
                   <a:schemeClr val="accent6">
                     <a:lumMod val="60000"/>
@@ -12256,14 +12843,7 @@
               </a:rPr>
               <a:t> is available at: https://github.com/Lawhy/Multi-task-NMTransliteration/mnmt/datasets</a:t>
             </a:r>
-            <a:endParaRPr lang="en-GB" sz="2000" dirty="0">
-              <a:solidFill>
-                <a:schemeClr val="accent6">
-                  <a:lumMod val="60000"/>
-                  <a:lumOff val="40000"/>
-                </a:schemeClr>
-              </a:solidFill>
-            </a:endParaRPr>
+            <a:endParaRPr lang="en-GB" sz="2000" dirty="0"/>
           </a:p>
           <a:p>
             <a:endParaRPr lang="en-GB" sz="2400" dirty="0"/>
@@ -12271,21 +12851,38 @@
           <a:p>
             <a:r>
               <a:rPr lang="en-GB" sz="2400" dirty="0"/>
-              <a:t>New Evaluation Metric suitable for a logographic system:</a:t>
+              <a:t>Substitution-based metric called Accuracy with Alternating Character Table (ACC-ACT):</a:t>
             </a:r>
           </a:p>
           <a:p>
             <a:pPr lvl="1"/>
             <a:r>
               <a:rPr lang="en-GB" sz="2000" dirty="0"/>
-              <a:t>The traditional metric used for transliteration does not consider multiple possible transliterations for a given source name.</a:t>
-            </a:r>
-          </a:p>
-          <a:p>
-            <a:pPr marL="457200" lvl="1" indent="0">
-              <a:buNone/>
-            </a:pPr>
-            <a:endParaRPr lang="en-GB" sz="2000" dirty="0"/>
+              <a:t>It gives a better estimation of the system’s quality than the traditional word accuracy (ACC). </a:t>
+            </a:r>
+          </a:p>
+          <a:p>
+            <a:endParaRPr lang="en-GB" sz="2400" dirty="0"/>
+          </a:p>
+          <a:p>
+            <a:r>
+              <a:rPr lang="en-GB" sz="2400" dirty="0"/>
+              <a:t>Multi-task learning transliteration model with a phonetic auxiliary task:</a:t>
+            </a:r>
+          </a:p>
+          <a:p>
+            <a:pPr lvl="1"/>
+            <a:r>
+              <a:rPr lang="en-GB" sz="2000" dirty="0"/>
+              <a:t>It attains better scores than single-main-task or single-auxiliary task models. </a:t>
+            </a:r>
+          </a:p>
+          <a:p>
+            <a:pPr lvl="1"/>
+            <a:r>
+              <a:rPr lang="en-GB" sz="2000" dirty="0"/>
+              <a:t>It achieves similar performance as the previous state of the art with a model of a much smaller size (22M parameters vs. 133M parameters).</a:t>
+            </a:r>
           </a:p>
         </p:txBody>
       </p:sp>
@@ -12560,7 +13157,7 @@
     </p:spTree>
     <p:extLst>
       <p:ext uri="{BB962C8B-B14F-4D97-AF65-F5344CB8AC3E}">
-        <p14:creationId xmlns:p14="http://schemas.microsoft.com/office/powerpoint/2010/main" val="745682792"/>
+        <p14:creationId xmlns:p14="http://schemas.microsoft.com/office/powerpoint/2010/main" val="2960609488"/>
       </p:ext>
     </p:extLst>
   </p:cSld>
@@ -12597,69 +13194,6 @@
       </p:grpSpPr>
       <p:sp>
         <p:nvSpPr>
-          <p:cNvPr id="17" name="Rectangle 7">
-            <a:extLst>
-              <a:ext uri="{FF2B5EF4-FFF2-40B4-BE49-F238E27FC236}">
-                <a16:creationId xmlns:a16="http://schemas.microsoft.com/office/drawing/2014/main" id="{2B566528-1B12-4246-9431-5C2D7D081168}"/>
-              </a:ext>
-              <a:ext uri="{C183D7F6-B498-43B3-948B-1728B52AA6E4}">
-                <adec:decorative xmlns:adec="http://schemas.microsoft.com/office/drawing/2017/decorative" val="1"/>
-              </a:ext>
-            </a:extLst>
-          </p:cNvPr>
-          <p:cNvSpPr>
-            <a:spLocks noGrp="1" noRot="1" noChangeAspect="1" noMove="1" noResize="1" noEditPoints="1" noAdjustHandles="1" noChangeArrowheads="1" noChangeShapeType="1" noTextEdit="1"/>
-          </p:cNvSpPr>
-          <p:nvPr>
-            <p:extLst>
-              <p:ext uri="{386F3935-93C4-4BCD-93E2-E3B085C9AB24}">
-                <p16:designElem xmlns:p16="http://schemas.microsoft.com/office/powerpoint/2015/main" val="1"/>
-              </p:ext>
-            </p:extLst>
-          </p:nvPr>
-        </p:nvSpPr>
-        <p:spPr>
-          <a:xfrm>
-            <a:off x="0" y="0"/>
-            <a:ext cx="12192000" cy="6858000"/>
-          </a:xfrm>
-          <a:prstGeom prst="rect">
-            <a:avLst/>
-          </a:prstGeom>
-          <a:solidFill>
-            <a:schemeClr val="bg1"/>
-          </a:solidFill>
-          <a:ln>
-            <a:noFill/>
-          </a:ln>
-        </p:spPr>
-        <p:style>
-          <a:lnRef idx="2">
-            <a:schemeClr val="accent1">
-              <a:shade val="50000"/>
-            </a:schemeClr>
-          </a:lnRef>
-          <a:fillRef idx="1">
-            <a:schemeClr val="accent1"/>
-          </a:fillRef>
-          <a:effectRef idx="0">
-            <a:schemeClr val="accent1"/>
-          </a:effectRef>
-          <a:fontRef idx="minor">
-            <a:schemeClr val="lt1"/>
-          </a:fontRef>
-        </p:style>
-        <p:txBody>
-          <a:bodyPr rtlCol="0" anchor="ctr"/>
-          <a:lstStyle/>
-          <a:p>
-            <a:pPr algn="ctr"/>
-            <a:endParaRPr lang="en-US" dirty="0"/>
-          </a:p>
-        </p:txBody>
-      </p:sp>
-      <p:sp>
-        <p:nvSpPr>
           <p:cNvPr id="2" name="Title 1">
             <a:extLst>
               <a:ext uri="{FF2B5EF4-FFF2-40B4-BE49-F238E27FC236}">
@@ -12689,12 +13223,10 @@
             <a:r>
               <a:rPr lang="en-GB" sz="3600" dirty="0">
                 <a:solidFill>
-                  <a:schemeClr val="accent1">
-                    <a:lumMod val="75000"/>
-                  </a:schemeClr>
+                  <a:srgbClr val="325A94"/>
                 </a:solidFill>
               </a:rPr>
-              <a:t>Our Contributions</a:t>
+              <a:t>Related Work</a:t>
             </a:r>
           </a:p>
         </p:txBody>
@@ -12723,519 +13255,6 @@
         </p:spPr>
         <p:txBody>
           <a:bodyPr>
-            <a:normAutofit lnSpcReduction="10000"/>
-          </a:bodyPr>
-          <a:lstStyle/>
-          <a:p>
-            <a:r>
-              <a:rPr lang="en-GB" sz="2400" dirty="0"/>
-              <a:t>A new English-to-Chinese named entities dataset (“DICT”) particular to names of people, based on the dictionary:</a:t>
-            </a:r>
-          </a:p>
-          <a:p>
-            <a:pPr marL="457200" lvl="1" indent="0">
-              <a:buNone/>
-            </a:pPr>
-            <a:r>
-              <a:rPr lang="en-GB" sz="2000" dirty="0"/>
-              <a:t> </a:t>
-            </a:r>
-            <a:r>
-              <a:rPr lang="en-GB" sz="2000" i="1" dirty="0">
-                <a:solidFill>
-                  <a:schemeClr val="accent1"/>
-                </a:solidFill>
-              </a:rPr>
-              <a:t>A Comprehensive Dictionary of Names in Roman-Chinese </a:t>
-            </a:r>
-            <a:r>
-              <a:rPr lang="en-GB" sz="2000" i="1" dirty="0">
-                <a:solidFill>
-                  <a:schemeClr val="accent1">
-                    <a:lumMod val="75000"/>
-                  </a:schemeClr>
-                </a:solidFill>
-              </a:rPr>
-              <a:t>(Xinhua News Agency, 2007</a:t>
-            </a:r>
-            <a:r>
-              <a:rPr lang="en-GB" sz="2000" dirty="0"/>
-              <a:t>)</a:t>
-            </a:r>
-          </a:p>
-          <a:p>
-            <a:endParaRPr lang="en-GB" sz="2400" dirty="0"/>
-          </a:p>
-          <a:p>
-            <a:r>
-              <a:rPr lang="en-GB" sz="2400" dirty="0"/>
-              <a:t>Substitution-based metric called Accuracy with Alternating Character Table (ACC-ACT):</a:t>
-            </a:r>
-          </a:p>
-          <a:p>
-            <a:pPr lvl="1"/>
-            <a:r>
-              <a:rPr lang="en-GB" sz="2000" dirty="0"/>
-              <a:t>It gives a better estimation of the system’s quality than the traditional word accuracy (ACC). </a:t>
-            </a:r>
-          </a:p>
-          <a:p>
-            <a:endParaRPr lang="en-GB" sz="2400" dirty="0"/>
-          </a:p>
-          <a:p>
-            <a:r>
-              <a:rPr lang="en-GB" sz="2400" dirty="0"/>
-              <a:t>Multi-task learning transliteration model with a phonetic auxiliary task:</a:t>
-            </a:r>
-          </a:p>
-          <a:p>
-            <a:pPr lvl="1"/>
-            <a:r>
-              <a:rPr lang="en-GB" sz="2000" dirty="0"/>
-              <a:t>It attains better scores than single-main-task or single-auxiliary task models. </a:t>
-            </a:r>
-          </a:p>
-          <a:p>
-            <a:pPr lvl="1"/>
-            <a:r>
-              <a:rPr lang="en-GB" sz="2000" dirty="0"/>
-              <a:t>It achieves similar performance as the previous state of the art with a model of a much smaller size (22M parameters vs. 133M parameters).</a:t>
-            </a:r>
-          </a:p>
-        </p:txBody>
-      </p:sp>
-      <p:sp>
-        <p:nvSpPr>
-          <p:cNvPr id="19" name="Rectangle 9">
-            <a:extLst>
-              <a:ext uri="{FF2B5EF4-FFF2-40B4-BE49-F238E27FC236}">
-                <a16:creationId xmlns:a16="http://schemas.microsoft.com/office/drawing/2014/main" id="{2E80C965-DB6D-4F81-9E9E-B027384D0BD6}"/>
-              </a:ext>
-              <a:ext uri="{C183D7F6-B498-43B3-948B-1728B52AA6E4}">
-                <adec:decorative xmlns:adec="http://schemas.microsoft.com/office/drawing/2017/decorative" val="1"/>
-              </a:ext>
-            </a:extLst>
-          </p:cNvPr>
-          <p:cNvSpPr>
-            <a:spLocks noGrp="1" noRot="1" noChangeAspect="1" noMove="1" noResize="1" noEditPoints="1" noAdjustHandles="1" noChangeArrowheads="1" noChangeShapeType="1" noTextEdit="1"/>
-          </p:cNvSpPr>
-          <p:nvPr>
-            <p:extLst>
-              <p:ext uri="{386F3935-93C4-4BCD-93E2-E3B085C9AB24}">
-                <p16:designElem xmlns:p16="http://schemas.microsoft.com/office/powerpoint/2015/main" val="1"/>
-              </p:ext>
-            </p:extLst>
-          </p:nvPr>
-        </p:nvSpPr>
-        <p:spPr>
-          <a:xfrm rot="2700000">
-            <a:off x="11052629" y="2120024"/>
-            <a:ext cx="645368" cy="645368"/>
-          </a:xfrm>
-          <a:prstGeom prst="rect">
-            <a:avLst/>
-          </a:prstGeom>
-          <a:solidFill>
-            <a:schemeClr val="accent4">
-              <a:alpha val="30000"/>
-            </a:schemeClr>
-          </a:solidFill>
-          <a:ln>
-            <a:noFill/>
-          </a:ln>
-        </p:spPr>
-        <p:style>
-          <a:lnRef idx="2">
-            <a:schemeClr val="accent1">
-              <a:shade val="50000"/>
-            </a:schemeClr>
-          </a:lnRef>
-          <a:fillRef idx="1">
-            <a:schemeClr val="accent1"/>
-          </a:fillRef>
-          <a:effectRef idx="0">
-            <a:schemeClr val="accent1"/>
-          </a:effectRef>
-          <a:fontRef idx="minor">
-            <a:schemeClr val="lt1"/>
-          </a:fontRef>
-        </p:style>
-        <p:txBody>
-          <a:bodyPr rtlCol="0" anchor="ctr"/>
-          <a:lstStyle/>
-          <a:p>
-            <a:pPr algn="ctr"/>
-            <a:endParaRPr lang="en-US"/>
-          </a:p>
-        </p:txBody>
-      </p:sp>
-      <p:sp>
-        <p:nvSpPr>
-          <p:cNvPr id="20" name="Isosceles Triangle 11">
-            <a:extLst>
-              <a:ext uri="{FF2B5EF4-FFF2-40B4-BE49-F238E27FC236}">
-                <a16:creationId xmlns:a16="http://schemas.microsoft.com/office/drawing/2014/main" id="{A580F890-B085-4E95-96AA-55AEBEC5CE6E}"/>
-              </a:ext>
-              <a:ext uri="{C183D7F6-B498-43B3-948B-1728B52AA6E4}">
-                <adec:decorative xmlns:adec="http://schemas.microsoft.com/office/drawing/2017/decorative" val="1"/>
-              </a:ext>
-            </a:extLst>
-          </p:cNvPr>
-          <p:cNvSpPr>
-            <a:spLocks noGrp="1" noRot="1" noChangeAspect="1" noMove="1" noResize="1" noEditPoints="1" noAdjustHandles="1" noChangeArrowheads="1" noChangeShapeType="1" noTextEdit="1"/>
-          </p:cNvSpPr>
-          <p:nvPr>
-            <p:extLst>
-              <p:ext uri="{386F3935-93C4-4BCD-93E2-E3B085C9AB24}">
-                <p16:designElem xmlns:p16="http://schemas.microsoft.com/office/powerpoint/2015/main" val="1"/>
-              </p:ext>
-            </p:extLst>
-          </p:nvPr>
-        </p:nvSpPr>
-        <p:spPr>
-          <a:xfrm rot="16200000">
-            <a:off x="10289068" y="1343027"/>
-            <a:ext cx="2532832" cy="1273032"/>
-          </a:xfrm>
-          <a:prstGeom prst="triangle">
-            <a:avLst>
-              <a:gd name="adj" fmla="val 50000"/>
-            </a:avLst>
-          </a:prstGeom>
-          <a:solidFill>
-            <a:schemeClr val="accent4">
-              <a:alpha val="30000"/>
-            </a:schemeClr>
-          </a:solidFill>
-          <a:ln>
-            <a:noFill/>
-          </a:ln>
-        </p:spPr>
-        <p:style>
-          <a:lnRef idx="2">
-            <a:schemeClr val="accent1">
-              <a:shade val="50000"/>
-            </a:schemeClr>
-          </a:lnRef>
-          <a:fillRef idx="1">
-            <a:schemeClr val="accent1"/>
-          </a:fillRef>
-          <a:effectRef idx="0">
-            <a:schemeClr val="accent1"/>
-          </a:effectRef>
-          <a:fontRef idx="minor">
-            <a:schemeClr val="lt1"/>
-          </a:fontRef>
-        </p:style>
-        <p:txBody>
-          <a:bodyPr rtlCol="0" anchor="ctr"/>
-          <a:lstStyle/>
-          <a:p>
-            <a:pPr algn="ctr"/>
-            <a:endParaRPr lang="en-US"/>
-          </a:p>
-        </p:txBody>
-      </p:sp>
-      <p:sp>
-        <p:nvSpPr>
-          <p:cNvPr id="21" name="Isosceles Triangle 13">
-            <a:extLst>
-              <a:ext uri="{FF2B5EF4-FFF2-40B4-BE49-F238E27FC236}">
-                <a16:creationId xmlns:a16="http://schemas.microsoft.com/office/drawing/2014/main" id="{D3F51FEB-38FB-4F6C-9F7B-2F2AFAB65463}"/>
-              </a:ext>
-              <a:ext uri="{C183D7F6-B498-43B3-948B-1728B52AA6E4}">
-                <adec:decorative xmlns:adec="http://schemas.microsoft.com/office/drawing/2017/decorative" val="1"/>
-              </a:ext>
-            </a:extLst>
-          </p:cNvPr>
-          <p:cNvSpPr>
-            <a:spLocks noGrp="1" noRot="1" noChangeAspect="1" noMove="1" noResize="1" noEditPoints="1" noAdjustHandles="1" noChangeArrowheads="1" noChangeShapeType="1" noTextEdit="1"/>
-          </p:cNvSpPr>
-          <p:nvPr>
-            <p:extLst>
-              <p:ext uri="{386F3935-93C4-4BCD-93E2-E3B085C9AB24}">
-                <p16:designElem xmlns:p16="http://schemas.microsoft.com/office/powerpoint/2015/main" val="1"/>
-              </p:ext>
-            </p:extLst>
-          </p:nvPr>
-        </p:nvSpPr>
-        <p:spPr>
-          <a:xfrm rot="5400000">
-            <a:off x="-501760" y="5103257"/>
-            <a:ext cx="2017580" cy="1014060"/>
-          </a:xfrm>
-          <a:prstGeom prst="triangle">
-            <a:avLst>
-              <a:gd name="adj" fmla="val 50000"/>
-            </a:avLst>
-          </a:prstGeom>
-          <a:solidFill>
-            <a:schemeClr val="accent1">
-              <a:alpha val="30000"/>
-            </a:schemeClr>
-          </a:solidFill>
-          <a:ln>
-            <a:noFill/>
-          </a:ln>
-        </p:spPr>
-        <p:style>
-          <a:lnRef idx="2">
-            <a:schemeClr val="accent1">
-              <a:shade val="50000"/>
-            </a:schemeClr>
-          </a:lnRef>
-          <a:fillRef idx="1">
-            <a:schemeClr val="accent1"/>
-          </a:fillRef>
-          <a:effectRef idx="0">
-            <a:schemeClr val="accent1"/>
-          </a:effectRef>
-          <a:fontRef idx="minor">
-            <a:schemeClr val="lt1"/>
-          </a:fontRef>
-        </p:style>
-        <p:txBody>
-          <a:bodyPr wrap="square" rtlCol="0" anchor="ctr">
-            <a:noAutofit/>
-          </a:bodyPr>
-          <a:lstStyle/>
-          <a:p>
-            <a:pPr algn="ctr"/>
-            <a:endParaRPr lang="en-US"/>
-          </a:p>
-        </p:txBody>
-      </p:sp>
-      <p:sp>
-        <p:nvSpPr>
-          <p:cNvPr id="22" name="Rectangle 15">
-            <a:extLst>
-              <a:ext uri="{FF2B5EF4-FFF2-40B4-BE49-F238E27FC236}">
-                <a16:creationId xmlns:a16="http://schemas.microsoft.com/office/drawing/2014/main" id="{1E547BA6-BAE0-43BB-A7CA-60F69CE252F0}"/>
-              </a:ext>
-              <a:ext uri="{C183D7F6-B498-43B3-948B-1728B52AA6E4}">
-                <adec:decorative xmlns:adec="http://schemas.microsoft.com/office/drawing/2017/decorative" val="1"/>
-              </a:ext>
-            </a:extLst>
-          </p:cNvPr>
-          <p:cNvSpPr>
-            <a:spLocks noGrp="1" noRot="1" noChangeAspect="1" noMove="1" noResize="1" noEditPoints="1" noAdjustHandles="1" noChangeArrowheads="1" noChangeShapeType="1" noTextEdit="1"/>
-          </p:cNvSpPr>
-          <p:nvPr>
-            <p:extLst>
-              <p:ext uri="{386F3935-93C4-4BCD-93E2-E3B085C9AB24}">
-                <p16:designElem xmlns:p16="http://schemas.microsoft.com/office/powerpoint/2015/main" val="1"/>
-              </p:ext>
-            </p:extLst>
-          </p:nvPr>
-        </p:nvSpPr>
-        <p:spPr>
-          <a:xfrm rot="2700000">
-            <a:off x="427916" y="5728708"/>
-            <a:ext cx="485578" cy="485578"/>
-          </a:xfrm>
-          <a:prstGeom prst="rect">
-            <a:avLst/>
-          </a:prstGeom>
-          <a:solidFill>
-            <a:schemeClr val="accent1">
-              <a:alpha val="30000"/>
-            </a:schemeClr>
-          </a:solidFill>
-          <a:ln>
-            <a:noFill/>
-          </a:ln>
-        </p:spPr>
-        <p:style>
-          <a:lnRef idx="2">
-            <a:schemeClr val="accent1">
-              <a:shade val="50000"/>
-            </a:schemeClr>
-          </a:lnRef>
-          <a:fillRef idx="1">
-            <a:schemeClr val="accent1"/>
-          </a:fillRef>
-          <a:effectRef idx="0">
-            <a:schemeClr val="accent1"/>
-          </a:effectRef>
-          <a:fontRef idx="minor">
-            <a:schemeClr val="lt1"/>
-          </a:fontRef>
-        </p:style>
-        <p:txBody>
-          <a:bodyPr wrap="square" rtlCol="0" anchor="ctr">
-            <a:noAutofit/>
-          </a:bodyPr>
-          <a:lstStyle/>
-          <a:p>
-            <a:pPr algn="ctr"/>
-            <a:endParaRPr lang="en-US"/>
-          </a:p>
-        </p:txBody>
-      </p:sp>
-    </p:spTree>
-    <p:extLst>
-      <p:ext uri="{BB962C8B-B14F-4D97-AF65-F5344CB8AC3E}">
-        <p14:creationId xmlns:p14="http://schemas.microsoft.com/office/powerpoint/2010/main" val="2960609488"/>
-      </p:ext>
-    </p:extLst>
-  </p:cSld>
-  <p:clrMapOvr>
-    <a:masterClrMapping/>
-  </p:clrMapOvr>
-</p:sld>
-</file>
-
-<file path=ppt/slides/slide5.xml><?xml version="1.0" encoding="utf-8"?>
-<p:sld xmlns:a="http://schemas.openxmlformats.org/drawingml/2006/main" xmlns:r="http://schemas.openxmlformats.org/officeDocument/2006/relationships" xmlns:p="http://schemas.openxmlformats.org/presentationml/2006/main">
-  <p:cSld>
-    <p:bg>
-      <p:bgPr>
-        <a:solidFill>
-          <a:schemeClr val="bg1"/>
-        </a:solidFill>
-        <a:effectLst/>
-      </p:bgPr>
-    </p:bg>
-    <p:spTree>
-      <p:nvGrpSpPr>
-        <p:cNvPr id="1" name=""/>
-        <p:cNvGrpSpPr/>
-        <p:nvPr/>
-      </p:nvGrpSpPr>
-      <p:grpSpPr>
-        <a:xfrm>
-          <a:off x="0" y="0"/>
-          <a:ext cx="0" cy="0"/>
-          <a:chOff x="0" y="0"/>
-          <a:chExt cx="0" cy="0"/>
-        </a:xfrm>
-      </p:grpSpPr>
-      <p:sp>
-        <p:nvSpPr>
-          <p:cNvPr id="17" name="Rectangle 7">
-            <a:extLst>
-              <a:ext uri="{FF2B5EF4-FFF2-40B4-BE49-F238E27FC236}">
-                <a16:creationId xmlns:a16="http://schemas.microsoft.com/office/drawing/2014/main" id="{2B566528-1B12-4246-9431-5C2D7D081168}"/>
-              </a:ext>
-              <a:ext uri="{C183D7F6-B498-43B3-948B-1728B52AA6E4}">
-                <adec:decorative xmlns:adec="http://schemas.microsoft.com/office/drawing/2017/decorative" val="1"/>
-              </a:ext>
-            </a:extLst>
-          </p:cNvPr>
-          <p:cNvSpPr>
-            <a:spLocks noGrp="1" noRot="1" noChangeAspect="1" noMove="1" noResize="1" noEditPoints="1" noAdjustHandles="1" noChangeArrowheads="1" noChangeShapeType="1" noTextEdit="1"/>
-          </p:cNvSpPr>
-          <p:nvPr>
-            <p:extLst>
-              <p:ext uri="{386F3935-93C4-4BCD-93E2-E3B085C9AB24}">
-                <p16:designElem xmlns:p16="http://schemas.microsoft.com/office/powerpoint/2015/main" val="1"/>
-              </p:ext>
-            </p:extLst>
-          </p:nvPr>
-        </p:nvSpPr>
-        <p:spPr>
-          <a:xfrm>
-            <a:off x="0" y="0"/>
-            <a:ext cx="12192000" cy="6858000"/>
-          </a:xfrm>
-          <a:prstGeom prst="rect">
-            <a:avLst/>
-          </a:prstGeom>
-          <a:solidFill>
-            <a:schemeClr val="bg1"/>
-          </a:solidFill>
-          <a:ln>
-            <a:noFill/>
-          </a:ln>
-        </p:spPr>
-        <p:style>
-          <a:lnRef idx="2">
-            <a:schemeClr val="accent1">
-              <a:shade val="50000"/>
-            </a:schemeClr>
-          </a:lnRef>
-          <a:fillRef idx="1">
-            <a:schemeClr val="accent1"/>
-          </a:fillRef>
-          <a:effectRef idx="0">
-            <a:schemeClr val="accent1"/>
-          </a:effectRef>
-          <a:fontRef idx="minor">
-            <a:schemeClr val="lt1"/>
-          </a:fontRef>
-        </p:style>
-        <p:txBody>
-          <a:bodyPr rtlCol="0" anchor="ctr"/>
-          <a:lstStyle/>
-          <a:p>
-            <a:pPr algn="ctr"/>
-            <a:endParaRPr lang="en-US" dirty="0"/>
-          </a:p>
-        </p:txBody>
-      </p:sp>
-      <p:sp>
-        <p:nvSpPr>
-          <p:cNvPr id="2" name="Title 1">
-            <a:extLst>
-              <a:ext uri="{FF2B5EF4-FFF2-40B4-BE49-F238E27FC236}">
-                <a16:creationId xmlns:a16="http://schemas.microsoft.com/office/drawing/2014/main" id="{4DC8D264-9052-48D1-B0D9-F3547DAE2A9F}"/>
-              </a:ext>
-            </a:extLst>
-          </p:cNvPr>
-          <p:cNvSpPr>
-            <a:spLocks noGrp="1"/>
-          </p:cNvSpPr>
-          <p:nvPr>
-            <p:ph type="title"/>
-          </p:nvPr>
-        </p:nvSpPr>
-        <p:spPr>
-          <a:xfrm>
-            <a:off x="643467" y="321734"/>
-            <a:ext cx="10905066" cy="1135737"/>
-          </a:xfrm>
-        </p:spPr>
-        <p:txBody>
-          <a:bodyPr>
-            <a:normAutofit/>
-          </a:bodyPr>
-          <a:lstStyle/>
-          <a:p>
-            <a:r>
-              <a:rPr lang="en-GB" sz="3600" dirty="0">
-                <a:solidFill>
-                  <a:srgbClr val="325A94"/>
-                </a:solidFill>
-              </a:rPr>
-              <a:t>Related Work</a:t>
-            </a:r>
-          </a:p>
-        </p:txBody>
-      </p:sp>
-      <p:sp>
-        <p:nvSpPr>
-          <p:cNvPr id="3" name="Content Placeholder 2">
-            <a:extLst>
-              <a:ext uri="{FF2B5EF4-FFF2-40B4-BE49-F238E27FC236}">
-                <a16:creationId xmlns:a16="http://schemas.microsoft.com/office/drawing/2014/main" id="{59199C4C-5AA4-49CE-81AC-CBF428574A2B}"/>
-              </a:ext>
-            </a:extLst>
-          </p:cNvPr>
-          <p:cNvSpPr>
-            <a:spLocks noGrp="1"/>
-          </p:cNvSpPr>
-          <p:nvPr>
-            <p:ph idx="1"/>
-          </p:nvPr>
-        </p:nvSpPr>
-        <p:spPr>
-          <a:xfrm>
-            <a:off x="643467" y="1440361"/>
-            <a:ext cx="10905066" cy="4393982"/>
-          </a:xfrm>
-        </p:spPr>
-        <p:txBody>
-          <a:bodyPr>
             <a:normAutofit/>
           </a:bodyPr>
           <a:lstStyle/>
@@ -13421,274 +13440,6 @@
               </a:rPr>
               <a:t>Dong et al., 2015</a:t>
             </a:r>
-          </a:p>
-        </p:txBody>
-      </p:sp>
-      <p:sp>
-        <p:nvSpPr>
-          <p:cNvPr id="19" name="Rectangle 9">
-            <a:extLst>
-              <a:ext uri="{FF2B5EF4-FFF2-40B4-BE49-F238E27FC236}">
-                <a16:creationId xmlns:a16="http://schemas.microsoft.com/office/drawing/2014/main" id="{2E80C965-DB6D-4F81-9E9E-B027384D0BD6}"/>
-              </a:ext>
-              <a:ext uri="{C183D7F6-B498-43B3-948B-1728B52AA6E4}">
-                <adec:decorative xmlns:adec="http://schemas.microsoft.com/office/drawing/2017/decorative" val="1"/>
-              </a:ext>
-            </a:extLst>
-          </p:cNvPr>
-          <p:cNvSpPr>
-            <a:spLocks noGrp="1" noRot="1" noChangeAspect="1" noMove="1" noResize="1" noEditPoints="1" noAdjustHandles="1" noChangeArrowheads="1" noChangeShapeType="1" noTextEdit="1"/>
-          </p:cNvSpPr>
-          <p:nvPr>
-            <p:extLst>
-              <p:ext uri="{386F3935-93C4-4BCD-93E2-E3B085C9AB24}">
-                <p16:designElem xmlns:p16="http://schemas.microsoft.com/office/powerpoint/2015/main" val="1"/>
-              </p:ext>
-            </p:extLst>
-          </p:nvPr>
-        </p:nvSpPr>
-        <p:spPr>
-          <a:xfrm rot="2700000">
-            <a:off x="11052629" y="2120024"/>
-            <a:ext cx="645368" cy="645368"/>
-          </a:xfrm>
-          <a:prstGeom prst="rect">
-            <a:avLst/>
-          </a:prstGeom>
-          <a:solidFill>
-            <a:schemeClr val="accent4">
-              <a:alpha val="30000"/>
-            </a:schemeClr>
-          </a:solidFill>
-          <a:ln>
-            <a:noFill/>
-          </a:ln>
-        </p:spPr>
-        <p:style>
-          <a:lnRef idx="2">
-            <a:schemeClr val="accent1">
-              <a:shade val="50000"/>
-            </a:schemeClr>
-          </a:lnRef>
-          <a:fillRef idx="1">
-            <a:schemeClr val="accent1"/>
-          </a:fillRef>
-          <a:effectRef idx="0">
-            <a:schemeClr val="accent1"/>
-          </a:effectRef>
-          <a:fontRef idx="minor">
-            <a:schemeClr val="lt1"/>
-          </a:fontRef>
-        </p:style>
-        <p:txBody>
-          <a:bodyPr rtlCol="0" anchor="ctr"/>
-          <a:lstStyle/>
-          <a:p>
-            <a:pPr algn="ctr"/>
-            <a:endParaRPr lang="en-US"/>
-          </a:p>
-        </p:txBody>
-      </p:sp>
-      <p:sp>
-        <p:nvSpPr>
-          <p:cNvPr id="20" name="Isosceles Triangle 11">
-            <a:extLst>
-              <a:ext uri="{FF2B5EF4-FFF2-40B4-BE49-F238E27FC236}">
-                <a16:creationId xmlns:a16="http://schemas.microsoft.com/office/drawing/2014/main" id="{A580F890-B085-4E95-96AA-55AEBEC5CE6E}"/>
-              </a:ext>
-              <a:ext uri="{C183D7F6-B498-43B3-948B-1728B52AA6E4}">
-                <adec:decorative xmlns:adec="http://schemas.microsoft.com/office/drawing/2017/decorative" val="1"/>
-              </a:ext>
-            </a:extLst>
-          </p:cNvPr>
-          <p:cNvSpPr>
-            <a:spLocks noGrp="1" noRot="1" noChangeAspect="1" noMove="1" noResize="1" noEditPoints="1" noAdjustHandles="1" noChangeArrowheads="1" noChangeShapeType="1" noTextEdit="1"/>
-          </p:cNvSpPr>
-          <p:nvPr>
-            <p:extLst>
-              <p:ext uri="{386F3935-93C4-4BCD-93E2-E3B085C9AB24}">
-                <p16:designElem xmlns:p16="http://schemas.microsoft.com/office/powerpoint/2015/main" val="1"/>
-              </p:ext>
-            </p:extLst>
-          </p:nvPr>
-        </p:nvSpPr>
-        <p:spPr>
-          <a:xfrm rot="16200000">
-            <a:off x="10289068" y="1343027"/>
-            <a:ext cx="2532832" cy="1273032"/>
-          </a:xfrm>
-          <a:prstGeom prst="triangle">
-            <a:avLst>
-              <a:gd name="adj" fmla="val 50000"/>
-            </a:avLst>
-          </a:prstGeom>
-          <a:solidFill>
-            <a:schemeClr val="accent4">
-              <a:alpha val="30000"/>
-            </a:schemeClr>
-          </a:solidFill>
-          <a:ln>
-            <a:noFill/>
-          </a:ln>
-        </p:spPr>
-        <p:style>
-          <a:lnRef idx="2">
-            <a:schemeClr val="accent1">
-              <a:shade val="50000"/>
-            </a:schemeClr>
-          </a:lnRef>
-          <a:fillRef idx="1">
-            <a:schemeClr val="accent1"/>
-          </a:fillRef>
-          <a:effectRef idx="0">
-            <a:schemeClr val="accent1"/>
-          </a:effectRef>
-          <a:fontRef idx="minor">
-            <a:schemeClr val="lt1"/>
-          </a:fontRef>
-        </p:style>
-        <p:txBody>
-          <a:bodyPr rtlCol="0" anchor="ctr"/>
-          <a:lstStyle/>
-          <a:p>
-            <a:pPr algn="ctr"/>
-            <a:endParaRPr lang="en-US"/>
-          </a:p>
-        </p:txBody>
-      </p:sp>
-      <p:sp>
-        <p:nvSpPr>
-          <p:cNvPr id="21" name="Isosceles Triangle 13">
-            <a:extLst>
-              <a:ext uri="{FF2B5EF4-FFF2-40B4-BE49-F238E27FC236}">
-                <a16:creationId xmlns:a16="http://schemas.microsoft.com/office/drawing/2014/main" id="{D3F51FEB-38FB-4F6C-9F7B-2F2AFAB65463}"/>
-              </a:ext>
-              <a:ext uri="{C183D7F6-B498-43B3-948B-1728B52AA6E4}">
-                <adec:decorative xmlns:adec="http://schemas.microsoft.com/office/drawing/2017/decorative" val="1"/>
-              </a:ext>
-            </a:extLst>
-          </p:cNvPr>
-          <p:cNvSpPr>
-            <a:spLocks noGrp="1" noRot="1" noChangeAspect="1" noMove="1" noResize="1" noEditPoints="1" noAdjustHandles="1" noChangeArrowheads="1" noChangeShapeType="1" noTextEdit="1"/>
-          </p:cNvSpPr>
-          <p:nvPr>
-            <p:extLst>
-              <p:ext uri="{386F3935-93C4-4BCD-93E2-E3B085C9AB24}">
-                <p16:designElem xmlns:p16="http://schemas.microsoft.com/office/powerpoint/2015/main" val="1"/>
-              </p:ext>
-            </p:extLst>
-          </p:nvPr>
-        </p:nvSpPr>
-        <p:spPr>
-          <a:xfrm rot="5400000">
-            <a:off x="-501760" y="5103257"/>
-            <a:ext cx="2017580" cy="1014060"/>
-          </a:xfrm>
-          <a:prstGeom prst="triangle">
-            <a:avLst>
-              <a:gd name="adj" fmla="val 50000"/>
-            </a:avLst>
-          </a:prstGeom>
-          <a:solidFill>
-            <a:schemeClr val="accent1">
-              <a:alpha val="30000"/>
-            </a:schemeClr>
-          </a:solidFill>
-          <a:ln>
-            <a:noFill/>
-          </a:ln>
-        </p:spPr>
-        <p:style>
-          <a:lnRef idx="2">
-            <a:schemeClr val="accent1">
-              <a:shade val="50000"/>
-            </a:schemeClr>
-          </a:lnRef>
-          <a:fillRef idx="1">
-            <a:schemeClr val="accent1"/>
-          </a:fillRef>
-          <a:effectRef idx="0">
-            <a:schemeClr val="accent1"/>
-          </a:effectRef>
-          <a:fontRef idx="minor">
-            <a:schemeClr val="lt1"/>
-          </a:fontRef>
-        </p:style>
-        <p:txBody>
-          <a:bodyPr wrap="square" rtlCol="0" anchor="ctr">
-            <a:noAutofit/>
-          </a:bodyPr>
-          <a:lstStyle/>
-          <a:p>
-            <a:pPr algn="ctr"/>
-            <a:endParaRPr lang="en-US"/>
-          </a:p>
-        </p:txBody>
-      </p:sp>
-      <p:sp>
-        <p:nvSpPr>
-          <p:cNvPr id="22" name="Rectangle 15">
-            <a:extLst>
-              <a:ext uri="{FF2B5EF4-FFF2-40B4-BE49-F238E27FC236}">
-                <a16:creationId xmlns:a16="http://schemas.microsoft.com/office/drawing/2014/main" id="{1E547BA6-BAE0-43BB-A7CA-60F69CE252F0}"/>
-              </a:ext>
-              <a:ext uri="{C183D7F6-B498-43B3-948B-1728B52AA6E4}">
-                <adec:decorative xmlns:adec="http://schemas.microsoft.com/office/drawing/2017/decorative" val="1"/>
-              </a:ext>
-            </a:extLst>
-          </p:cNvPr>
-          <p:cNvSpPr>
-            <a:spLocks noGrp="1" noRot="1" noChangeAspect="1" noMove="1" noResize="1" noEditPoints="1" noAdjustHandles="1" noChangeArrowheads="1" noChangeShapeType="1" noTextEdit="1"/>
-          </p:cNvSpPr>
-          <p:nvPr>
-            <p:extLst>
-              <p:ext uri="{386F3935-93C4-4BCD-93E2-E3B085C9AB24}">
-                <p16:designElem xmlns:p16="http://schemas.microsoft.com/office/powerpoint/2015/main" val="1"/>
-              </p:ext>
-            </p:extLst>
-          </p:nvPr>
-        </p:nvSpPr>
-        <p:spPr>
-          <a:xfrm rot="2700000">
-            <a:off x="427916" y="5728708"/>
-            <a:ext cx="485578" cy="485578"/>
-          </a:xfrm>
-          <a:prstGeom prst="rect">
-            <a:avLst/>
-          </a:prstGeom>
-          <a:solidFill>
-            <a:schemeClr val="accent1">
-              <a:alpha val="30000"/>
-            </a:schemeClr>
-          </a:solidFill>
-          <a:ln>
-            <a:noFill/>
-          </a:ln>
-        </p:spPr>
-        <p:style>
-          <a:lnRef idx="2">
-            <a:schemeClr val="accent1">
-              <a:shade val="50000"/>
-            </a:schemeClr>
-          </a:lnRef>
-          <a:fillRef idx="1">
-            <a:schemeClr val="accent1"/>
-          </a:fillRef>
-          <a:effectRef idx="0">
-            <a:schemeClr val="accent1"/>
-          </a:effectRef>
-          <a:fontRef idx="minor">
-            <a:schemeClr val="lt1"/>
-          </a:fontRef>
-        </p:style>
-        <p:txBody>
-          <a:bodyPr wrap="square" rtlCol="0" anchor="ctr">
-            <a:noAutofit/>
-          </a:bodyPr>
-          <a:lstStyle/>
-          <a:p>
-            <a:pPr algn="ctr"/>
-            <a:endParaRPr lang="en-US"/>
           </a:p>
         </p:txBody>
       </p:sp>
@@ -13700,12 +13451,12 @@
     </p:extLst>
   </p:cSld>
   <p:clrMapOvr>
-    <a:masterClrMapping/>
+    <a:overrideClrMapping bg1="lt1" tx1="dk1" bg2="lt2" tx2="dk2" accent1="accent1" accent2="accent2" accent3="accent3" accent4="accent4" accent5="accent5" accent6="accent6" hlink="hlink" folHlink="folHlink"/>
   </p:clrMapOvr>
 </p:sld>
 </file>
 
-<file path=ppt/slides/slide6.xml><?xml version="1.0" encoding="utf-8"?>
+<file path=ppt/slides/slide5.xml><?xml version="1.0" encoding="utf-8"?>
 <p:sld xmlns:a="http://schemas.openxmlformats.org/drawingml/2006/main" xmlns:r="http://schemas.openxmlformats.org/officeDocument/2006/relationships" xmlns:p="http://schemas.openxmlformats.org/presentationml/2006/main">
   <p:cSld>
     <p:bg>
@@ -14818,7 +14569,7 @@
 </p:sld>
 </file>
 
-<file path=ppt/slides/slide7.xml><?xml version="1.0" encoding="utf-8"?>
+<file path=ppt/slides/slide6.xml><?xml version="1.0" encoding="utf-8"?>
 <p:sld xmlns:a="http://schemas.openxmlformats.org/drawingml/2006/main" xmlns:r="http://schemas.openxmlformats.org/officeDocument/2006/relationships" xmlns:p="http://schemas.openxmlformats.org/presentationml/2006/main">
   <p:cSld>
     <p:bg>
@@ -14947,41 +14698,6 @@
           </a:p>
         </p:txBody>
       </p:sp>
-      <p:pic>
-        <p:nvPicPr>
-          <p:cNvPr id="5" name="Content Placeholder 4" descr="Diagram&#10;&#10;Description automatically generated">
-            <a:extLst>
-              <a:ext uri="{FF2B5EF4-FFF2-40B4-BE49-F238E27FC236}">
-                <a16:creationId xmlns:a16="http://schemas.microsoft.com/office/drawing/2014/main" id="{3D656B5E-D102-4259-8D90-2D6E9CCA1186}"/>
-              </a:ext>
-            </a:extLst>
-          </p:cNvPr>
-          <p:cNvPicPr>
-            <a:picLocks noGrp="1" noChangeAspect="1"/>
-          </p:cNvPicPr>
-          <p:nvPr>
-            <p:ph idx="1"/>
-          </p:nvPr>
-        </p:nvPicPr>
-        <p:blipFill>
-          <a:blip r:embed="rId2">
-            <a:extLst>
-              <a:ext uri="{28A0092B-C50C-407E-A947-70E740481C1C}">
-                <a14:useLocalDpi xmlns:a14="http://schemas.microsoft.com/office/drawing/2010/main" val="0"/>
-              </a:ext>
-            </a:extLst>
-          </a:blip>
-          <a:stretch>
-            <a:fillRect/>
-          </a:stretch>
-        </p:blipFill>
-        <p:spPr>
-          <a:xfrm>
-            <a:off x="6489509" y="795455"/>
-            <a:ext cx="3785992" cy="5408866"/>
-          </a:xfrm>
-        </p:spPr>
-      </p:pic>
       <p:sp>
         <p:nvSpPr>
           <p:cNvPr id="19" name="Rectangle 9">
@@ -15332,8 +15048,10 @@
                         <m:rPr>
                           <m:nor/>
                         </m:rPr>
-                        <a:rPr lang="en-GB" sz="2000" dirty="0" smtClean="0"/>
-                        <m:t>l</m:t>
+                        <a:rPr lang="en-GB" sz="2000" dirty="0">
+                          <a:latin typeface="Cambria Math" panose="02040503050406030204" pitchFamily="18" charset="0"/>
+                        </a:rPr>
+                        <m:t>L</m:t>
                       </m:r>
                       <m:r>
                         <m:rPr>
@@ -15367,8 +15085,8 @@
                         <m:rPr>
                           <m:nor/>
                         </m:rPr>
-                        <a:rPr lang="en-GB" sz="2000" dirty="0" smtClean="0"/>
-                        <m:t>l</m:t>
+                        <a:rPr lang="en-US" sz="2000" b="0" i="0" dirty="0" smtClean="0"/>
+                        <m:t>L</m:t>
                       </m:r>
                       <m:r>
                         <m:rPr>
@@ -15402,8 +15120,8 @@
                         <m:rPr>
                           <m:nor/>
                         </m:rPr>
-                        <a:rPr lang="en-GB" sz="2000" dirty="0" smtClean="0"/>
-                        <m:t>l</m:t>
+                        <a:rPr lang="en-US" sz="2000" b="0" i="0" dirty="0" smtClean="0"/>
+                        <m:t>L</m:t>
                       </m:r>
                       <m:r>
                         <m:rPr>
@@ -15447,7 +15165,7 @@
                 <a:avLst/>
               </a:prstGeom>
               <a:blipFill>
-                <a:blip r:embed="rId3"/>
+                <a:blip r:embed="rId2"/>
                 <a:stretch>
                   <a:fillRect l="-1415" t="-1064"/>
                 </a:stretch>
@@ -15516,6 +15234,516 @@
           </a:p>
         </p:txBody>
       </p:sp>
+      <p:pic>
+        <p:nvPicPr>
+          <p:cNvPr id="9" name="Content Placeholder 8">
+            <a:extLst>
+              <a:ext uri="{FF2B5EF4-FFF2-40B4-BE49-F238E27FC236}">
+                <a16:creationId xmlns:a16="http://schemas.microsoft.com/office/drawing/2014/main" id="{FCD26A91-1E8A-446E-A77E-3413E8BBF51B}"/>
+              </a:ext>
+            </a:extLst>
+          </p:cNvPr>
+          <p:cNvPicPr>
+            <a:picLocks noGrp="1" noChangeAspect="1"/>
+          </p:cNvPicPr>
+          <p:nvPr>
+            <p:ph idx="1"/>
+          </p:nvPr>
+        </p:nvPicPr>
+        <p:blipFill>
+          <a:blip r:embed="rId3"/>
+          <a:stretch>
+            <a:fillRect/>
+          </a:stretch>
+        </p:blipFill>
+        <p:spPr>
+          <a:xfrm>
+            <a:off x="7599203" y="1364455"/>
+            <a:ext cx="1457070" cy="493819"/>
+          </a:xfrm>
+        </p:spPr>
+      </p:pic>
+      <p:pic>
+        <p:nvPicPr>
+          <p:cNvPr id="11" name="Picture 10">
+            <a:extLst>
+              <a:ext uri="{FF2B5EF4-FFF2-40B4-BE49-F238E27FC236}">
+                <a16:creationId xmlns:a16="http://schemas.microsoft.com/office/drawing/2014/main" id="{6C035A8C-C6EA-484B-A3D3-991A8322F4E4}"/>
+              </a:ext>
+            </a:extLst>
+          </p:cNvPr>
+          <p:cNvPicPr>
+            <a:picLocks noChangeAspect="1"/>
+          </p:cNvPicPr>
+          <p:nvPr/>
+        </p:nvPicPr>
+        <p:blipFill>
+          <a:blip r:embed="rId4"/>
+          <a:stretch>
+            <a:fillRect/>
+          </a:stretch>
+        </p:blipFill>
+        <p:spPr>
+          <a:xfrm>
+            <a:off x="6674904" y="4549915"/>
+            <a:ext cx="1225402" cy="499915"/>
+          </a:xfrm>
+          <a:prstGeom prst="rect">
+            <a:avLst/>
+          </a:prstGeom>
+        </p:spPr>
+      </p:pic>
+      <p:pic>
+        <p:nvPicPr>
+          <p:cNvPr id="13" name="Picture 12">
+            <a:extLst>
+              <a:ext uri="{FF2B5EF4-FFF2-40B4-BE49-F238E27FC236}">
+                <a16:creationId xmlns:a16="http://schemas.microsoft.com/office/drawing/2014/main" id="{BA22DA1A-1B44-4431-9CAA-C476E2EF284C}"/>
+              </a:ext>
+            </a:extLst>
+          </p:cNvPr>
+          <p:cNvPicPr>
+            <a:picLocks noChangeAspect="1"/>
+          </p:cNvPicPr>
+          <p:nvPr/>
+        </p:nvPicPr>
+        <p:blipFill>
+          <a:blip r:embed="rId5"/>
+          <a:stretch>
+            <a:fillRect/>
+          </a:stretch>
+        </p:blipFill>
+        <p:spPr>
+          <a:xfrm>
+            <a:off x="8554259" y="4549915"/>
+            <a:ext cx="1487553" cy="499915"/>
+          </a:xfrm>
+          <a:prstGeom prst="rect">
+            <a:avLst/>
+          </a:prstGeom>
+        </p:spPr>
+      </p:pic>
+      <p:sp>
+        <p:nvSpPr>
+          <p:cNvPr id="14" name="Rectangle: Rounded Corners 13">
+            <a:extLst>
+              <a:ext uri="{FF2B5EF4-FFF2-40B4-BE49-F238E27FC236}">
+                <a16:creationId xmlns:a16="http://schemas.microsoft.com/office/drawing/2014/main" id="{4112B937-9A31-4D96-A9B5-B47F6255EA2A}"/>
+              </a:ext>
+            </a:extLst>
+          </p:cNvPr>
+          <p:cNvSpPr/>
+          <p:nvPr/>
+        </p:nvSpPr>
+        <p:spPr>
+          <a:xfrm>
+            <a:off x="7473987" y="2217225"/>
+            <a:ext cx="1707502" cy="715690"/>
+          </a:xfrm>
+          <a:prstGeom prst="roundRect">
+            <a:avLst/>
+          </a:prstGeom>
+        </p:spPr>
+        <p:style>
+          <a:lnRef idx="3">
+            <a:schemeClr val="lt1"/>
+          </a:lnRef>
+          <a:fillRef idx="1">
+            <a:schemeClr val="accent5"/>
+          </a:fillRef>
+          <a:effectRef idx="1">
+            <a:schemeClr val="accent5"/>
+          </a:effectRef>
+          <a:fontRef idx="minor">
+            <a:schemeClr val="lt1"/>
+          </a:fontRef>
+        </p:style>
+        <p:txBody>
+          <a:bodyPr rtlCol="0" anchor="ctr"/>
+          <a:lstStyle/>
+          <a:p>
+            <a:pPr algn="ctr"/>
+            <a:r>
+              <a:rPr lang="en-GB" dirty="0"/>
+              <a:t>Encoder</a:t>
+            </a:r>
+          </a:p>
+        </p:txBody>
+      </p:sp>
+      <p:cxnSp>
+        <p:nvCxnSpPr>
+          <p:cNvPr id="16" name="Straight Arrow Connector 15">
+            <a:extLst>
+              <a:ext uri="{FF2B5EF4-FFF2-40B4-BE49-F238E27FC236}">
+                <a16:creationId xmlns:a16="http://schemas.microsoft.com/office/drawing/2014/main" id="{F4B1CEF7-F680-4A6C-A040-227D353EE5A2}"/>
+              </a:ext>
+            </a:extLst>
+          </p:cNvPr>
+          <p:cNvCxnSpPr>
+            <a:stCxn id="9" idx="2"/>
+            <a:endCxn id="14" idx="0"/>
+          </p:cNvCxnSpPr>
+          <p:nvPr/>
+        </p:nvCxnSpPr>
+        <p:spPr>
+          <a:xfrm>
+            <a:off x="8327738" y="1858274"/>
+            <a:ext cx="0" cy="358951"/>
+          </a:xfrm>
+          <a:prstGeom prst="straightConnector1">
+            <a:avLst/>
+          </a:prstGeom>
+          <a:ln>
+            <a:tailEnd type="triangle"/>
+          </a:ln>
+        </p:spPr>
+        <p:style>
+          <a:lnRef idx="1">
+            <a:schemeClr val="accent1"/>
+          </a:lnRef>
+          <a:fillRef idx="0">
+            <a:schemeClr val="accent1"/>
+          </a:fillRef>
+          <a:effectRef idx="0">
+            <a:schemeClr val="accent1"/>
+          </a:effectRef>
+          <a:fontRef idx="minor">
+            <a:schemeClr val="tx1"/>
+          </a:fontRef>
+        </p:style>
+      </p:cxnSp>
+      <p:sp>
+        <p:nvSpPr>
+          <p:cNvPr id="23" name="Rectangle: Rounded Corners 22">
+            <a:extLst>
+              <a:ext uri="{FF2B5EF4-FFF2-40B4-BE49-F238E27FC236}">
+                <a16:creationId xmlns:a16="http://schemas.microsoft.com/office/drawing/2014/main" id="{296CBED8-097A-4557-8B5A-D29585E63106}"/>
+              </a:ext>
+            </a:extLst>
+          </p:cNvPr>
+          <p:cNvSpPr/>
+          <p:nvPr/>
+        </p:nvSpPr>
+        <p:spPr>
+          <a:xfrm>
+            <a:off x="6489510" y="3460787"/>
+            <a:ext cx="1596190" cy="715690"/>
+          </a:xfrm>
+          <a:prstGeom prst="roundRect">
+            <a:avLst/>
+          </a:prstGeom>
+        </p:spPr>
+        <p:style>
+          <a:lnRef idx="3">
+            <a:schemeClr val="lt1"/>
+          </a:lnRef>
+          <a:fillRef idx="1">
+            <a:schemeClr val="accent5"/>
+          </a:fillRef>
+          <a:effectRef idx="1">
+            <a:schemeClr val="accent5"/>
+          </a:effectRef>
+          <a:fontRef idx="minor">
+            <a:schemeClr val="lt1"/>
+          </a:fontRef>
+        </p:style>
+        <p:txBody>
+          <a:bodyPr rtlCol="0" anchor="ctr"/>
+          <a:lstStyle/>
+          <a:p>
+            <a:pPr algn="ctr"/>
+            <a:r>
+              <a:rPr lang="en-GB" dirty="0"/>
+              <a:t>Main-task Decoder</a:t>
+            </a:r>
+          </a:p>
+        </p:txBody>
+      </p:sp>
+      <p:sp>
+        <p:nvSpPr>
+          <p:cNvPr id="26" name="Rectangle: Rounded Corners 25">
+            <a:extLst>
+              <a:ext uri="{FF2B5EF4-FFF2-40B4-BE49-F238E27FC236}">
+                <a16:creationId xmlns:a16="http://schemas.microsoft.com/office/drawing/2014/main" id="{E808F97D-D539-4597-9F5C-27BDD79C0E5A}"/>
+              </a:ext>
+            </a:extLst>
+          </p:cNvPr>
+          <p:cNvSpPr/>
+          <p:nvPr/>
+        </p:nvSpPr>
+        <p:spPr>
+          <a:xfrm>
+            <a:off x="8499941" y="3460787"/>
+            <a:ext cx="1596190" cy="715690"/>
+          </a:xfrm>
+          <a:prstGeom prst="roundRect">
+            <a:avLst/>
+          </a:prstGeom>
+        </p:spPr>
+        <p:style>
+          <a:lnRef idx="3">
+            <a:schemeClr val="lt1"/>
+          </a:lnRef>
+          <a:fillRef idx="1">
+            <a:schemeClr val="accent5"/>
+          </a:fillRef>
+          <a:effectRef idx="1">
+            <a:schemeClr val="accent5"/>
+          </a:effectRef>
+          <a:fontRef idx="minor">
+            <a:schemeClr val="lt1"/>
+          </a:fontRef>
+        </p:style>
+        <p:txBody>
+          <a:bodyPr rtlCol="0" anchor="ctr"/>
+          <a:lstStyle/>
+          <a:p>
+            <a:pPr algn="ctr"/>
+            <a:r>
+              <a:rPr lang="en-GB" dirty="0"/>
+              <a:t>Auxiliary-task Decoder</a:t>
+            </a:r>
+          </a:p>
+        </p:txBody>
+      </p:sp>
+      <p:cxnSp>
+        <p:nvCxnSpPr>
+          <p:cNvPr id="30" name="Connector: Elbow 29">
+            <a:extLst>
+              <a:ext uri="{FF2B5EF4-FFF2-40B4-BE49-F238E27FC236}">
+                <a16:creationId xmlns:a16="http://schemas.microsoft.com/office/drawing/2014/main" id="{D8A8AA11-1484-4849-A6A3-B710314EE0EA}"/>
+              </a:ext>
+            </a:extLst>
+          </p:cNvPr>
+          <p:cNvCxnSpPr>
+            <a:stCxn id="14" idx="2"/>
+            <a:endCxn id="23" idx="0"/>
+          </p:cNvCxnSpPr>
+          <p:nvPr/>
+        </p:nvCxnSpPr>
+        <p:spPr>
+          <a:xfrm rot="5400000">
+            <a:off x="7543736" y="2676785"/>
+            <a:ext cx="527872" cy="1040133"/>
+          </a:xfrm>
+          <a:prstGeom prst="bentConnector3">
+            <a:avLst/>
+          </a:prstGeom>
+          <a:ln>
+            <a:tailEnd type="triangle"/>
+          </a:ln>
+        </p:spPr>
+        <p:style>
+          <a:lnRef idx="1">
+            <a:schemeClr val="accent1"/>
+          </a:lnRef>
+          <a:fillRef idx="0">
+            <a:schemeClr val="accent1"/>
+          </a:fillRef>
+          <a:effectRef idx="0">
+            <a:schemeClr val="accent1"/>
+          </a:effectRef>
+          <a:fontRef idx="minor">
+            <a:schemeClr val="tx1"/>
+          </a:fontRef>
+        </p:style>
+      </p:cxnSp>
+      <p:cxnSp>
+        <p:nvCxnSpPr>
+          <p:cNvPr id="32" name="Connector: Elbow 31">
+            <a:extLst>
+              <a:ext uri="{FF2B5EF4-FFF2-40B4-BE49-F238E27FC236}">
+                <a16:creationId xmlns:a16="http://schemas.microsoft.com/office/drawing/2014/main" id="{FF9F4255-DC60-42E2-AF8F-028D796B21FE}"/>
+              </a:ext>
+            </a:extLst>
+          </p:cNvPr>
+          <p:cNvCxnSpPr>
+            <a:stCxn id="14" idx="2"/>
+            <a:endCxn id="26" idx="0"/>
+          </p:cNvCxnSpPr>
+          <p:nvPr/>
+        </p:nvCxnSpPr>
+        <p:spPr>
+          <a:xfrm rot="16200000" flipH="1">
+            <a:off x="8548951" y="2711702"/>
+            <a:ext cx="527872" cy="970298"/>
+          </a:xfrm>
+          <a:prstGeom prst="bentConnector3">
+            <a:avLst/>
+          </a:prstGeom>
+          <a:ln>
+            <a:tailEnd type="triangle"/>
+          </a:ln>
+        </p:spPr>
+        <p:style>
+          <a:lnRef idx="1">
+            <a:schemeClr val="accent1"/>
+          </a:lnRef>
+          <a:fillRef idx="0">
+            <a:schemeClr val="accent1"/>
+          </a:fillRef>
+          <a:effectRef idx="0">
+            <a:schemeClr val="accent1"/>
+          </a:effectRef>
+          <a:fontRef idx="minor">
+            <a:schemeClr val="tx1"/>
+          </a:fontRef>
+        </p:style>
+      </p:cxnSp>
+      <p:cxnSp>
+        <p:nvCxnSpPr>
+          <p:cNvPr id="35" name="Straight Arrow Connector 34">
+            <a:extLst>
+              <a:ext uri="{FF2B5EF4-FFF2-40B4-BE49-F238E27FC236}">
+                <a16:creationId xmlns:a16="http://schemas.microsoft.com/office/drawing/2014/main" id="{BD2151A4-9278-44F5-8887-58896897322D}"/>
+              </a:ext>
+            </a:extLst>
+          </p:cNvPr>
+          <p:cNvCxnSpPr>
+            <a:stCxn id="23" idx="2"/>
+            <a:endCxn id="11" idx="0"/>
+          </p:cNvCxnSpPr>
+          <p:nvPr/>
+        </p:nvCxnSpPr>
+        <p:spPr>
+          <a:xfrm>
+            <a:off x="7287605" y="4176477"/>
+            <a:ext cx="0" cy="373438"/>
+          </a:xfrm>
+          <a:prstGeom prst="straightConnector1">
+            <a:avLst/>
+          </a:prstGeom>
+          <a:ln>
+            <a:tailEnd type="triangle"/>
+          </a:ln>
+        </p:spPr>
+        <p:style>
+          <a:lnRef idx="1">
+            <a:schemeClr val="accent1"/>
+          </a:lnRef>
+          <a:fillRef idx="0">
+            <a:schemeClr val="accent1"/>
+          </a:fillRef>
+          <a:effectRef idx="0">
+            <a:schemeClr val="accent1"/>
+          </a:effectRef>
+          <a:fontRef idx="minor">
+            <a:schemeClr val="tx1"/>
+          </a:fontRef>
+        </p:style>
+      </p:cxnSp>
+      <p:cxnSp>
+        <p:nvCxnSpPr>
+          <p:cNvPr id="37" name="Straight Arrow Connector 36">
+            <a:extLst>
+              <a:ext uri="{FF2B5EF4-FFF2-40B4-BE49-F238E27FC236}">
+                <a16:creationId xmlns:a16="http://schemas.microsoft.com/office/drawing/2014/main" id="{87A2B083-1255-46B1-8B15-D611FAE34ABF}"/>
+              </a:ext>
+            </a:extLst>
+          </p:cNvPr>
+          <p:cNvCxnSpPr>
+            <a:stCxn id="26" idx="2"/>
+            <a:endCxn id="13" idx="0"/>
+          </p:cNvCxnSpPr>
+          <p:nvPr/>
+        </p:nvCxnSpPr>
+        <p:spPr>
+          <a:xfrm>
+            <a:off x="9298036" y="4176477"/>
+            <a:ext cx="0" cy="373438"/>
+          </a:xfrm>
+          <a:prstGeom prst="straightConnector1">
+            <a:avLst/>
+          </a:prstGeom>
+          <a:ln>
+            <a:tailEnd type="triangle"/>
+          </a:ln>
+        </p:spPr>
+        <p:style>
+          <a:lnRef idx="1">
+            <a:schemeClr val="accent1"/>
+          </a:lnRef>
+          <a:fillRef idx="0">
+            <a:schemeClr val="accent1"/>
+          </a:fillRef>
+          <a:effectRef idx="0">
+            <a:schemeClr val="accent1"/>
+          </a:effectRef>
+          <a:fontRef idx="minor">
+            <a:schemeClr val="tx1"/>
+          </a:fontRef>
+        </p:style>
+      </p:cxnSp>
+      <p:sp>
+        <p:nvSpPr>
+          <p:cNvPr id="41" name="TextBox 40">
+            <a:extLst>
+              <a:ext uri="{FF2B5EF4-FFF2-40B4-BE49-F238E27FC236}">
+                <a16:creationId xmlns:a16="http://schemas.microsoft.com/office/drawing/2014/main" id="{533F3CA4-0267-4D21-B7BC-E8036EFF4680}"/>
+              </a:ext>
+            </a:extLst>
+          </p:cNvPr>
+          <p:cNvSpPr txBox="1"/>
+          <p:nvPr/>
+        </p:nvSpPr>
+        <p:spPr>
+          <a:xfrm>
+            <a:off x="6632552" y="2945923"/>
+            <a:ext cx="1088183" cy="307777"/>
+          </a:xfrm>
+          <a:prstGeom prst="rect">
+            <a:avLst/>
+          </a:prstGeom>
+          <a:noFill/>
+        </p:spPr>
+        <p:txBody>
+          <a:bodyPr wrap="none" rtlCol="0">
+            <a:spAutoFit/>
+          </a:bodyPr>
+          <a:lstStyle/>
+          <a:p>
+            <a:r>
+              <a:rPr lang="en-GB" sz="1400" dirty="0"/>
+              <a:t>bridge layer</a:t>
+            </a:r>
+          </a:p>
+        </p:txBody>
+      </p:sp>
+      <p:sp>
+        <p:nvSpPr>
+          <p:cNvPr id="43" name="TextBox 42">
+            <a:extLst>
+              <a:ext uri="{FF2B5EF4-FFF2-40B4-BE49-F238E27FC236}">
+                <a16:creationId xmlns:a16="http://schemas.microsoft.com/office/drawing/2014/main" id="{E8A8CA55-EB27-41E0-B1DF-AE613B8335D9}"/>
+              </a:ext>
+            </a:extLst>
+          </p:cNvPr>
+          <p:cNvSpPr txBox="1"/>
+          <p:nvPr/>
+        </p:nvSpPr>
+        <p:spPr>
+          <a:xfrm>
+            <a:off x="9057225" y="2945924"/>
+            <a:ext cx="1088183" cy="307777"/>
+          </a:xfrm>
+          <a:prstGeom prst="rect">
+            <a:avLst/>
+          </a:prstGeom>
+          <a:noFill/>
+        </p:spPr>
+        <p:txBody>
+          <a:bodyPr wrap="none" rtlCol="0">
+            <a:spAutoFit/>
+          </a:bodyPr>
+          <a:lstStyle/>
+          <a:p>
+            <a:r>
+              <a:rPr lang="en-GB" sz="1400" dirty="0"/>
+              <a:t>bridge layer</a:t>
+            </a:r>
+          </a:p>
+        </p:txBody>
+      </p:sp>
     </p:spTree>
     <p:extLst>
       <p:ext uri="{BB962C8B-B14F-4D97-AF65-F5344CB8AC3E}">
@@ -15529,7 +15757,7 @@
 </p:sld>
 </file>
 
-<file path=ppt/slides/slide8.xml><?xml version="1.0" encoding="utf-8"?>
+<file path=ppt/slides/slide7.xml><?xml version="1.0" encoding="utf-8"?>
 <p:sld xmlns:a="http://schemas.openxmlformats.org/drawingml/2006/main" xmlns:r="http://schemas.openxmlformats.org/officeDocument/2006/relationships" xmlns:p="http://schemas.openxmlformats.org/presentationml/2006/main">
   <p:cSld>
     <p:bg>
@@ -16368,7 +16596,7 @@
 </p:sld>
 </file>
 
-<file path=ppt/slides/slide9.xml><?xml version="1.0" encoding="utf-8"?>
+<file path=ppt/slides/slide8.xml><?xml version="1.0" encoding="utf-8"?>
 <p:sld xmlns:a="http://schemas.openxmlformats.org/drawingml/2006/main" xmlns:r="http://schemas.openxmlformats.org/officeDocument/2006/relationships" xmlns:p="http://schemas.openxmlformats.org/presentationml/2006/main">
   <p:cSld>
     <p:bg>
@@ -16600,8 +16828,11 @@
                   </a:schemeClr>
                 </a:solidFill>
               </a:rPr>
-              <a:t>can be improved further by the linguists</a:t>
-            </a:r>
+              <a:t>can be improved further by linguists</a:t>
+            </a:r>
+            <a:endParaRPr lang="en-GB" sz="2400" dirty="0"/>
+          </a:p>
+          <a:p>
             <a:endParaRPr lang="en-GB" sz="2400" dirty="0"/>
           </a:p>
           <a:p>
@@ -16898,14 +17129,14 @@
           <p:nvPr>
             <p:extLst>
               <p:ext uri="{D42A27DB-BD31-4B8C-83A1-F6EECF244321}">
-                <p14:modId xmlns:p14="http://schemas.microsoft.com/office/powerpoint/2010/main" val="2744904682"/>
+                <p14:modId xmlns:p14="http://schemas.microsoft.com/office/powerpoint/2010/main" val="998603465"/>
               </p:ext>
             </p:extLst>
           </p:nvPr>
         </p:nvGraphicFramePr>
         <p:xfrm>
-          <a:off x="2032000" y="4045237"/>
-          <a:ext cx="8128000" cy="1112520"/>
+          <a:off x="2032000" y="4704079"/>
+          <a:ext cx="8128000" cy="741680"/>
         </p:xfrm>
         <a:graphic>
           <a:graphicData uri="http://schemas.openxmlformats.org/drawingml/2006/table">
@@ -17063,68 +17294,6 @@
                   </a:ext>
                 </a:extLst>
               </a:tr>
-              <a:tr h="370840">
-                <a:tc>
-                  <a:txBody>
-                    <a:bodyPr/>
-                    <a:lstStyle/>
-                    <a:p>
-                      <a:r>
-                        <a:rPr lang="en-GB" dirty="0" err="1"/>
-                        <a:t>Colina</a:t>
-                      </a:r>
-                      <a:endParaRPr lang="en-GB" dirty="0"/>
-                    </a:p>
-                  </a:txBody>
-                  <a:tcPr/>
-                </a:tc>
-                <a:tc>
-                  <a:txBody>
-                    <a:bodyPr/>
-                    <a:lstStyle/>
-                    <a:p>
-                      <a:r>
-                        <a:rPr lang="zh-CN" altLang="en-US" dirty="0"/>
-                        <a:t>科莉娜</a:t>
-                      </a:r>
-                      <a:endParaRPr lang="en-GB" dirty="0"/>
-                    </a:p>
-                  </a:txBody>
-                  <a:tcPr/>
-                </a:tc>
-                <a:tc>
-                  <a:txBody>
-                    <a:bodyPr/>
-                    <a:lstStyle/>
-                    <a:p>
-                      <a:r>
-                        <a:rPr lang="zh-CN" altLang="en-US" dirty="0"/>
-                        <a:t>科利纳</a:t>
-                      </a:r>
-                      <a:endParaRPr lang="en-GB" dirty="0"/>
-                    </a:p>
-                  </a:txBody>
-                  <a:tcPr/>
-                </a:tc>
-                <a:tc>
-                  <a:txBody>
-                    <a:bodyPr/>
-                    <a:lstStyle/>
-                    <a:p>
-                      <a:r>
-                        <a:rPr lang="en-GB" dirty="0"/>
-                        <a:t>2</a:t>
-                      </a:r>
-                    </a:p>
-                  </a:txBody>
-                  <a:tcPr/>
-                </a:tc>
-                <a:extLst>
-                  <a:ext uri="{0D108BD9-81ED-4DB2-BD59-A6C34878D82A}">
-                    <a16:rowId xmlns:a16="http://schemas.microsoft.com/office/drawing/2014/main" val="771492449"/>
-                  </a:ext>
-                </a:extLst>
-              </a:tr>
             </a:tbl>
           </a:graphicData>
         </a:graphic>
@@ -17143,7 +17312,7 @@
         </p:nvSpPr>
         <p:spPr>
           <a:xfrm>
-            <a:off x="4355432" y="4443663"/>
+            <a:off x="4363453" y="5107807"/>
             <a:ext cx="296779" cy="312821"/>
           </a:xfrm>
           <a:prstGeom prst="ellipse">
@@ -17195,218 +17364,10 @@
         </p:nvSpPr>
         <p:spPr>
           <a:xfrm>
-            <a:off x="6384758" y="4443663"/>
+            <a:off x="6384758" y="5107807"/>
             <a:ext cx="296779" cy="312821"/>
           </a:xfrm>
           <a:prstGeom prst="ellipse">
-            <a:avLst/>
-          </a:prstGeom>
-          <a:noFill/>
-          <a:ln>
-            <a:solidFill>
-              <a:srgbClr val="FF0000"/>
-            </a:solidFill>
-          </a:ln>
-        </p:spPr>
-        <p:style>
-          <a:lnRef idx="2">
-            <a:schemeClr val="accent1">
-              <a:shade val="50000"/>
-            </a:schemeClr>
-          </a:lnRef>
-          <a:fillRef idx="1">
-            <a:schemeClr val="accent1"/>
-          </a:fillRef>
-          <a:effectRef idx="0">
-            <a:schemeClr val="accent1"/>
-          </a:effectRef>
-          <a:fontRef idx="minor">
-            <a:schemeClr val="lt1"/>
-          </a:fontRef>
-        </p:style>
-        <p:txBody>
-          <a:bodyPr rtlCol="0" anchor="ctr"/>
-          <a:lstStyle/>
-          <a:p>
-            <a:pPr algn="ctr"/>
-            <a:endParaRPr lang="en-GB"/>
-          </a:p>
-        </p:txBody>
-      </p:sp>
-      <p:sp>
-        <p:nvSpPr>
-          <p:cNvPr id="14" name="Rectangle 13">
-            <a:extLst>
-              <a:ext uri="{FF2B5EF4-FFF2-40B4-BE49-F238E27FC236}">
-                <a16:creationId xmlns:a16="http://schemas.microsoft.com/office/drawing/2014/main" id="{9324BDA6-2044-4211-AD1F-4183F94B1FF5}"/>
-              </a:ext>
-            </a:extLst>
-          </p:cNvPr>
-          <p:cNvSpPr/>
-          <p:nvPr/>
-        </p:nvSpPr>
-        <p:spPr>
-          <a:xfrm>
-            <a:off x="4384045" y="4842588"/>
-            <a:ext cx="225899" cy="312322"/>
-          </a:xfrm>
-          <a:prstGeom prst="rect">
-            <a:avLst/>
-          </a:prstGeom>
-          <a:noFill/>
-          <a:ln>
-            <a:solidFill>
-              <a:srgbClr val="FF0000"/>
-            </a:solidFill>
-          </a:ln>
-        </p:spPr>
-        <p:style>
-          <a:lnRef idx="2">
-            <a:schemeClr val="accent1">
-              <a:shade val="50000"/>
-            </a:schemeClr>
-          </a:lnRef>
-          <a:fillRef idx="1">
-            <a:schemeClr val="accent1"/>
-          </a:fillRef>
-          <a:effectRef idx="0">
-            <a:schemeClr val="accent1"/>
-          </a:effectRef>
-          <a:fontRef idx="minor">
-            <a:schemeClr val="lt1"/>
-          </a:fontRef>
-        </p:style>
-        <p:txBody>
-          <a:bodyPr rtlCol="0" anchor="ctr"/>
-          <a:lstStyle/>
-          <a:p>
-            <a:pPr algn="ctr"/>
-            <a:endParaRPr lang="en-GB"/>
-          </a:p>
-        </p:txBody>
-      </p:sp>
-      <p:sp>
-        <p:nvSpPr>
-          <p:cNvPr id="16" name="Rectangle 15">
-            <a:extLst>
-              <a:ext uri="{FF2B5EF4-FFF2-40B4-BE49-F238E27FC236}">
-                <a16:creationId xmlns:a16="http://schemas.microsoft.com/office/drawing/2014/main" id="{A4D9C924-AEBB-42C4-A9FB-29CFE93F123C}"/>
-              </a:ext>
-            </a:extLst>
-          </p:cNvPr>
-          <p:cNvSpPr/>
-          <p:nvPr/>
-        </p:nvSpPr>
-        <p:spPr>
-          <a:xfrm>
-            <a:off x="6420197" y="4836529"/>
-            <a:ext cx="225899" cy="312322"/>
-          </a:xfrm>
-          <a:prstGeom prst="rect">
-            <a:avLst/>
-          </a:prstGeom>
-          <a:noFill/>
-          <a:ln>
-            <a:solidFill>
-              <a:srgbClr val="FF0000"/>
-            </a:solidFill>
-          </a:ln>
-        </p:spPr>
-        <p:style>
-          <a:lnRef idx="2">
-            <a:schemeClr val="accent1">
-              <a:shade val="50000"/>
-            </a:schemeClr>
-          </a:lnRef>
-          <a:fillRef idx="1">
-            <a:schemeClr val="accent1"/>
-          </a:fillRef>
-          <a:effectRef idx="0">
-            <a:schemeClr val="accent1"/>
-          </a:effectRef>
-          <a:fontRef idx="minor">
-            <a:schemeClr val="lt1"/>
-          </a:fontRef>
-        </p:style>
-        <p:txBody>
-          <a:bodyPr rtlCol="0" anchor="ctr"/>
-          <a:lstStyle/>
-          <a:p>
-            <a:pPr algn="ctr"/>
-            <a:endParaRPr lang="en-GB"/>
-          </a:p>
-        </p:txBody>
-      </p:sp>
-      <p:sp>
-        <p:nvSpPr>
-          <p:cNvPr id="18" name="Rectangle 17">
-            <a:extLst>
-              <a:ext uri="{FF2B5EF4-FFF2-40B4-BE49-F238E27FC236}">
-                <a16:creationId xmlns:a16="http://schemas.microsoft.com/office/drawing/2014/main" id="{8140A25C-B793-4EC2-BB01-F36E69B7205F}"/>
-              </a:ext>
-            </a:extLst>
-          </p:cNvPr>
-          <p:cNvSpPr/>
-          <p:nvPr/>
-        </p:nvSpPr>
-        <p:spPr>
-          <a:xfrm>
-            <a:off x="4623407" y="4845435"/>
-            <a:ext cx="225899" cy="312322"/>
-          </a:xfrm>
-          <a:prstGeom prst="rect">
-            <a:avLst/>
-          </a:prstGeom>
-          <a:noFill/>
-          <a:ln>
-            <a:solidFill>
-              <a:srgbClr val="FF0000"/>
-            </a:solidFill>
-          </a:ln>
-        </p:spPr>
-        <p:style>
-          <a:lnRef idx="2">
-            <a:schemeClr val="accent1">
-              <a:shade val="50000"/>
-            </a:schemeClr>
-          </a:lnRef>
-          <a:fillRef idx="1">
-            <a:schemeClr val="accent1"/>
-          </a:fillRef>
-          <a:effectRef idx="0">
-            <a:schemeClr val="accent1"/>
-          </a:effectRef>
-          <a:fontRef idx="minor">
-            <a:schemeClr val="lt1"/>
-          </a:fontRef>
-        </p:style>
-        <p:txBody>
-          <a:bodyPr rtlCol="0" anchor="ctr"/>
-          <a:lstStyle/>
-          <a:p>
-            <a:pPr algn="ctr"/>
-            <a:endParaRPr lang="en-GB"/>
-          </a:p>
-        </p:txBody>
-      </p:sp>
-      <p:sp>
-        <p:nvSpPr>
-          <p:cNvPr id="28" name="Rectangle 27">
-            <a:extLst>
-              <a:ext uri="{FF2B5EF4-FFF2-40B4-BE49-F238E27FC236}">
-                <a16:creationId xmlns:a16="http://schemas.microsoft.com/office/drawing/2014/main" id="{6835CFAF-991A-48A7-B31E-0D8D0B0BA907}"/>
-              </a:ext>
-            </a:extLst>
-          </p:cNvPr>
-          <p:cNvSpPr/>
-          <p:nvPr/>
-        </p:nvSpPr>
-        <p:spPr>
-          <a:xfrm>
-            <a:off x="6659559" y="4836529"/>
-            <a:ext cx="225899" cy="312322"/>
-          </a:xfrm>
-          <a:prstGeom prst="rect">
             <a:avLst/>
           </a:prstGeom>
           <a:noFill/>
@@ -17692,186 +17653,6 @@
                       </p:childTnLst>
                     </p:cTn>
                   </p:par>
-                  <p:par>
-                    <p:cTn id="23" fill="hold">
-                      <p:stCondLst>
-                        <p:cond delay="indefinite"/>
-                      </p:stCondLst>
-                      <p:childTnLst>
-                        <p:par>
-                          <p:cTn id="24" fill="hold">
-                            <p:stCondLst>
-                              <p:cond delay="0"/>
-                            </p:stCondLst>
-                            <p:childTnLst>
-                              <p:par>
-                                <p:cTn id="25" presetID="1" presetClass="entr" presetSubtype="0" fill="hold" grpId="0" nodeType="clickEffect">
-                                  <p:stCondLst>
-                                    <p:cond delay="0"/>
-                                  </p:stCondLst>
-                                  <p:childTnLst>
-                                    <p:set>
-                                      <p:cBhvr>
-                                        <p:cTn id="26" dur="1" fill="hold">
-                                          <p:stCondLst>
-                                            <p:cond delay="0"/>
-                                          </p:stCondLst>
-                                        </p:cTn>
-                                        <p:tgtEl>
-                                          <p:spTgt spid="14"/>
-                                        </p:tgtEl>
-                                        <p:attrNameLst>
-                                          <p:attrName>style.visibility</p:attrName>
-                                        </p:attrNameLst>
-                                      </p:cBhvr>
-                                      <p:to>
-                                        <p:strVal val="visible"/>
-                                      </p:to>
-                                    </p:set>
-                                  </p:childTnLst>
-                                </p:cTn>
-                              </p:par>
-                            </p:childTnLst>
-                          </p:cTn>
-                        </p:par>
-                      </p:childTnLst>
-                    </p:cTn>
-                  </p:par>
-                  <p:par>
-                    <p:cTn id="27" fill="hold">
-                      <p:stCondLst>
-                        <p:cond delay="indefinite"/>
-                      </p:stCondLst>
-                      <p:childTnLst>
-                        <p:par>
-                          <p:cTn id="28" fill="hold">
-                            <p:stCondLst>
-                              <p:cond delay="0"/>
-                            </p:stCondLst>
-                            <p:childTnLst>
-                              <p:par>
-                                <p:cTn id="29" presetID="1" presetClass="entr" presetSubtype="0" fill="hold" grpId="0" nodeType="clickEffect">
-                                  <p:stCondLst>
-                                    <p:cond delay="0"/>
-                                  </p:stCondLst>
-                                  <p:childTnLst>
-                                    <p:set>
-                                      <p:cBhvr>
-                                        <p:cTn id="30" dur="1" fill="hold">
-                                          <p:stCondLst>
-                                            <p:cond delay="0"/>
-                                          </p:stCondLst>
-                                        </p:cTn>
-                                        <p:tgtEl>
-                                          <p:spTgt spid="16"/>
-                                        </p:tgtEl>
-                                        <p:attrNameLst>
-                                          <p:attrName>style.visibility</p:attrName>
-                                        </p:attrNameLst>
-                                      </p:cBhvr>
-                                      <p:to>
-                                        <p:strVal val="visible"/>
-                                      </p:to>
-                                    </p:set>
-                                  </p:childTnLst>
-                                </p:cTn>
-                              </p:par>
-                            </p:childTnLst>
-                          </p:cTn>
-                        </p:par>
-                      </p:childTnLst>
-                    </p:cTn>
-                  </p:par>
-                  <p:par>
-                    <p:cTn id="31" fill="hold">
-                      <p:stCondLst>
-                        <p:cond delay="indefinite"/>
-                      </p:stCondLst>
-                      <p:childTnLst>
-                        <p:par>
-                          <p:cTn id="32" fill="hold">
-                            <p:stCondLst>
-                              <p:cond delay="0"/>
-                            </p:stCondLst>
-                            <p:childTnLst>
-                              <p:par>
-                                <p:cTn id="33" presetID="1" presetClass="entr" presetSubtype="0" fill="hold" grpId="0" nodeType="clickEffect">
-                                  <p:stCondLst>
-                                    <p:cond delay="0"/>
-                                  </p:stCondLst>
-                                  <p:childTnLst>
-                                    <p:set>
-                                      <p:cBhvr>
-                                        <p:cTn id="34" dur="1" fill="hold">
-                                          <p:stCondLst>
-                                            <p:cond delay="0"/>
-                                          </p:stCondLst>
-                                        </p:cTn>
-                                        <p:tgtEl>
-                                          <p:spTgt spid="18"/>
-                                        </p:tgtEl>
-                                        <p:attrNameLst>
-                                          <p:attrName>style.visibility</p:attrName>
-                                        </p:attrNameLst>
-                                      </p:cBhvr>
-                                      <p:to>
-                                        <p:strVal val="visible"/>
-                                      </p:to>
-                                    </p:set>
-                                  </p:childTnLst>
-                                </p:cTn>
-                              </p:par>
-                            </p:childTnLst>
-                          </p:cTn>
-                        </p:par>
-                      </p:childTnLst>
-                    </p:cTn>
-                  </p:par>
-                  <p:par>
-                    <p:cTn id="35" fill="hold">
-                      <p:stCondLst>
-                        <p:cond delay="indefinite"/>
-                      </p:stCondLst>
-                      <p:childTnLst>
-                        <p:par>
-                          <p:cTn id="36" fill="hold">
-                            <p:stCondLst>
-                              <p:cond delay="0"/>
-                            </p:stCondLst>
-                            <p:childTnLst>
-                              <p:par>
-                                <p:cTn id="37" presetID="1" presetClass="entr" presetSubtype="0" fill="hold" grpId="0" nodeType="clickEffect">
-                                  <p:stCondLst>
-                                    <p:cond delay="0"/>
-                                  </p:stCondLst>
-                                  <p:childTnLst>
-                                    <p:set>
-                                      <p:cBhvr>
-                                        <p:cTn id="38" dur="1" fill="hold">
-                                          <p:stCondLst>
-                                            <p:cond delay="0"/>
-                                          </p:stCondLst>
-                                        </p:cTn>
-                                        <p:tgtEl>
-                                          <p:spTgt spid="28"/>
-                                        </p:tgtEl>
-                                        <p:attrNameLst>
-                                          <p:attrName>style.visibility</p:attrName>
-                                        </p:attrNameLst>
-                                      </p:cBhvr>
-                                      <p:to>
-                                        <p:strVal val="visible"/>
-                                      </p:to>
-                                    </p:set>
-                                  </p:childTnLst>
-                                </p:cTn>
-                              </p:par>
-                            </p:childTnLst>
-                          </p:cTn>
-                        </p:par>
-                      </p:childTnLst>
-                    </p:cTn>
-                  </p:par>
                 </p:childTnLst>
               </p:cTn>
               <p:prevCondLst>
@@ -17896,12 +17677,583 @@
     <p:bldLst>
       <p:bldP spid="5" grpId="0" animBg="1"/>
       <p:bldP spid="6" grpId="0" animBg="1"/>
-      <p:bldP spid="14" grpId="0" animBg="1"/>
-      <p:bldP spid="16" grpId="0" animBg="1"/>
-      <p:bldP spid="18" grpId="0" animBg="1"/>
-      <p:bldP spid="28" grpId="0" animBg="1"/>
     </p:bldLst>
   </p:timing>
+</p:sld>
+</file>
+
+<file path=ppt/slides/slide9.xml><?xml version="1.0" encoding="utf-8"?>
+<p:sld xmlns:a="http://schemas.openxmlformats.org/drawingml/2006/main" xmlns:r="http://schemas.openxmlformats.org/officeDocument/2006/relationships" xmlns:p="http://schemas.openxmlformats.org/presentationml/2006/main">
+  <p:cSld>
+    <p:bg>
+      <p:bgPr>
+        <a:solidFill>
+          <a:schemeClr val="bg1"/>
+        </a:solidFill>
+        <a:effectLst/>
+      </p:bgPr>
+    </p:bg>
+    <p:spTree>
+      <p:nvGrpSpPr>
+        <p:cNvPr id="1" name=""/>
+        <p:cNvGrpSpPr/>
+        <p:nvPr/>
+      </p:nvGrpSpPr>
+      <p:grpSpPr>
+        <a:xfrm>
+          <a:off x="0" y="0"/>
+          <a:ext cx="0" cy="0"/>
+          <a:chOff x="0" y="0"/>
+          <a:chExt cx="0" cy="0"/>
+        </a:xfrm>
+      </p:grpSpPr>
+      <p:sp>
+        <p:nvSpPr>
+          <p:cNvPr id="17" name="Rectangle 7">
+            <a:extLst>
+              <a:ext uri="{FF2B5EF4-FFF2-40B4-BE49-F238E27FC236}">
+                <a16:creationId xmlns:a16="http://schemas.microsoft.com/office/drawing/2014/main" id="{2B566528-1B12-4246-9431-5C2D7D081168}"/>
+              </a:ext>
+              <a:ext uri="{C183D7F6-B498-43B3-948B-1728B52AA6E4}">
+                <adec:decorative xmlns:adec="http://schemas.microsoft.com/office/drawing/2017/decorative" val="1"/>
+              </a:ext>
+            </a:extLst>
+          </p:cNvPr>
+          <p:cNvSpPr>
+            <a:spLocks noGrp="1" noRot="1" noChangeAspect="1" noMove="1" noResize="1" noEditPoints="1" noAdjustHandles="1" noChangeArrowheads="1" noChangeShapeType="1" noTextEdit="1"/>
+          </p:cNvSpPr>
+          <p:nvPr>
+            <p:extLst>
+              <p:ext uri="{386F3935-93C4-4BCD-93E2-E3B085C9AB24}">
+                <p16:designElem xmlns:p16="http://schemas.microsoft.com/office/powerpoint/2015/main" val="1"/>
+              </p:ext>
+            </p:extLst>
+          </p:nvPr>
+        </p:nvSpPr>
+        <p:spPr>
+          <a:xfrm>
+            <a:off x="0" y="0"/>
+            <a:ext cx="12192000" cy="6858000"/>
+          </a:xfrm>
+          <a:prstGeom prst="rect">
+            <a:avLst/>
+          </a:prstGeom>
+          <a:solidFill>
+            <a:schemeClr val="bg1"/>
+          </a:solidFill>
+          <a:ln>
+            <a:noFill/>
+          </a:ln>
+        </p:spPr>
+        <p:style>
+          <a:lnRef idx="2">
+            <a:schemeClr val="accent1">
+              <a:shade val="50000"/>
+            </a:schemeClr>
+          </a:lnRef>
+          <a:fillRef idx="1">
+            <a:schemeClr val="accent1"/>
+          </a:fillRef>
+          <a:effectRef idx="0">
+            <a:schemeClr val="accent1"/>
+          </a:effectRef>
+          <a:fontRef idx="minor">
+            <a:schemeClr val="lt1"/>
+          </a:fontRef>
+        </p:style>
+        <p:txBody>
+          <a:bodyPr rtlCol="0" anchor="ctr"/>
+          <a:lstStyle/>
+          <a:p>
+            <a:pPr algn="ctr"/>
+            <a:endParaRPr lang="en-US" dirty="0"/>
+          </a:p>
+        </p:txBody>
+      </p:sp>
+      <p:sp>
+        <p:nvSpPr>
+          <p:cNvPr id="2" name="Title 1">
+            <a:extLst>
+              <a:ext uri="{FF2B5EF4-FFF2-40B4-BE49-F238E27FC236}">
+                <a16:creationId xmlns:a16="http://schemas.microsoft.com/office/drawing/2014/main" id="{4DC8D264-9052-48D1-B0D9-F3547DAE2A9F}"/>
+              </a:ext>
+            </a:extLst>
+          </p:cNvPr>
+          <p:cNvSpPr>
+            <a:spLocks noGrp="1"/>
+          </p:cNvSpPr>
+          <p:nvPr>
+            <p:ph type="title"/>
+          </p:nvPr>
+        </p:nvSpPr>
+        <p:spPr>
+          <a:xfrm>
+            <a:off x="643467" y="321734"/>
+            <a:ext cx="10905066" cy="1135737"/>
+          </a:xfrm>
+        </p:spPr>
+        <p:txBody>
+          <a:bodyPr>
+            <a:normAutofit/>
+          </a:bodyPr>
+          <a:lstStyle/>
+          <a:p>
+            <a:r>
+              <a:rPr lang="en-GB" sz="3600" dirty="0">
+                <a:solidFill>
+                  <a:srgbClr val="325A94"/>
+                </a:solidFill>
+              </a:rPr>
+              <a:t>D</a:t>
+            </a:r>
+            <a:r>
+              <a:rPr lang="en-US" altLang="zh-CN" sz="3600" dirty="0" err="1">
+                <a:solidFill>
+                  <a:srgbClr val="325A94"/>
+                </a:solidFill>
+              </a:rPr>
+              <a:t>atasets</a:t>
+            </a:r>
+            <a:r>
+              <a:rPr lang="en-US" altLang="zh-CN" sz="3600" dirty="0">
+                <a:solidFill>
+                  <a:srgbClr val="325A94"/>
+                </a:solidFill>
+              </a:rPr>
+              <a:t> </a:t>
+            </a:r>
+            <a:endParaRPr lang="en-GB" sz="3600" dirty="0">
+              <a:solidFill>
+                <a:srgbClr val="325A94"/>
+              </a:solidFill>
+            </a:endParaRPr>
+          </a:p>
+        </p:txBody>
+      </p:sp>
+      <p:sp>
+        <p:nvSpPr>
+          <p:cNvPr id="3" name="Content Placeholder 2">
+            <a:extLst>
+              <a:ext uri="{FF2B5EF4-FFF2-40B4-BE49-F238E27FC236}">
+                <a16:creationId xmlns:a16="http://schemas.microsoft.com/office/drawing/2014/main" id="{59199C4C-5AA4-49CE-81AC-CBF428574A2B}"/>
+              </a:ext>
+            </a:extLst>
+          </p:cNvPr>
+          <p:cNvSpPr>
+            <a:spLocks noGrp="1"/>
+          </p:cNvSpPr>
+          <p:nvPr>
+            <p:ph idx="1"/>
+          </p:nvPr>
+        </p:nvSpPr>
+        <p:spPr>
+          <a:xfrm>
+            <a:off x="643467" y="1440361"/>
+            <a:ext cx="10905066" cy="4393982"/>
+          </a:xfrm>
+        </p:spPr>
+        <p:txBody>
+          <a:bodyPr>
+            <a:normAutofit/>
+          </a:bodyPr>
+          <a:lstStyle/>
+          <a:p>
+            <a:r>
+              <a:rPr lang="en-GB" sz="2400" dirty="0"/>
+              <a:t>DICT dataset</a:t>
+            </a:r>
+          </a:p>
+          <a:p>
+            <a:pPr lvl="1"/>
+            <a:r>
+              <a:rPr lang="en-GB" sz="2000" dirty="0"/>
+              <a:t>Extracted from the giant dictionary (see previous slide).</a:t>
+            </a:r>
+          </a:p>
+          <a:p>
+            <a:pPr marL="0" indent="0">
+              <a:buNone/>
+            </a:pPr>
+            <a:endParaRPr lang="en-GB" sz="2400" dirty="0"/>
+          </a:p>
+          <a:p>
+            <a:r>
+              <a:rPr lang="en-GB" sz="2400" dirty="0"/>
+              <a:t>NEWS dataset </a:t>
+            </a:r>
+          </a:p>
+          <a:p>
+            <a:pPr lvl="1"/>
+            <a:r>
+              <a:rPr lang="en-GB" sz="2000" dirty="0"/>
+              <a:t>Raw data came from the NEWS 2018 Shared Task </a:t>
+            </a:r>
+            <a:r>
+              <a:rPr lang="en-GB" sz="2000" dirty="0">
+                <a:solidFill>
+                  <a:schemeClr val="accent5"/>
+                </a:solidFill>
+              </a:rPr>
+              <a:t>(</a:t>
+            </a:r>
+            <a:r>
+              <a:rPr lang="en-GB" sz="2000" dirty="0">
+                <a:solidFill>
+                  <a:schemeClr val="accent5"/>
+                </a:solidFill>
+                <a:hlinkClick r:id="rId2">
+                  <a:extLst>
+                    <a:ext uri="{A12FA001-AC4F-418D-AE19-62706E023703}">
+                      <ahyp:hlinkClr xmlns:ahyp="http://schemas.microsoft.com/office/drawing/2018/hyperlinkcolor" val="tx"/>
+                    </a:ext>
+                  </a:extLst>
+                </a:hlinkClick>
+              </a:rPr>
+              <a:t>http://workshop.colips.org/news2018/</a:t>
+            </a:r>
+            <a:r>
+              <a:rPr lang="en-GB" sz="2000" dirty="0">
+                <a:solidFill>
+                  <a:schemeClr val="accent5"/>
+                </a:solidFill>
+              </a:rPr>
+              <a:t>).</a:t>
+            </a:r>
+          </a:p>
+          <a:p>
+            <a:pPr lvl="1"/>
+            <a:r>
+              <a:rPr lang="en-GB" sz="2000" dirty="0" err="1"/>
+              <a:t>Preprocessed</a:t>
+            </a:r>
+            <a:r>
+              <a:rPr lang="en-GB" sz="2000" dirty="0"/>
+              <a:t> data came from the work of </a:t>
+            </a:r>
+            <a:r>
+              <a:rPr lang="en-GB" sz="2000" dirty="0" err="1"/>
+              <a:t>Grundkiewicz</a:t>
+            </a:r>
+            <a:r>
+              <a:rPr lang="en-GB" sz="2000" dirty="0"/>
+              <a:t> and </a:t>
+            </a:r>
+            <a:r>
+              <a:rPr lang="en-GB" sz="2000" dirty="0" err="1"/>
+              <a:t>Heafield</a:t>
+            </a:r>
+            <a:r>
+              <a:rPr lang="en-GB" sz="2000" dirty="0"/>
+              <a:t>, 2018.</a:t>
+            </a:r>
+          </a:p>
+          <a:p>
+            <a:pPr lvl="1"/>
+            <a:endParaRPr lang="en-GB" sz="2000" dirty="0"/>
+          </a:p>
+          <a:p>
+            <a:r>
+              <a:rPr lang="en-GB" sz="2400" dirty="0"/>
+              <a:t>The </a:t>
+            </a:r>
+            <a:r>
+              <a:rPr lang="en-GB" sz="2400" dirty="0">
+                <a:solidFill>
+                  <a:schemeClr val="accent5"/>
+                </a:solidFill>
+              </a:rPr>
+              <a:t>NEWS official test set </a:t>
+            </a:r>
+            <a:r>
+              <a:rPr lang="en-GB" sz="2400" dirty="0"/>
+              <a:t>is anonymized</a:t>
+            </a:r>
+            <a:r>
+              <a:rPr lang="en-GB" sz="2000" dirty="0"/>
+              <a:t>.</a:t>
+            </a:r>
+            <a:endParaRPr lang="en-GB" sz="2400" dirty="0"/>
+          </a:p>
+        </p:txBody>
+      </p:sp>
+      <p:sp>
+        <p:nvSpPr>
+          <p:cNvPr id="19" name="Rectangle 9">
+            <a:extLst>
+              <a:ext uri="{FF2B5EF4-FFF2-40B4-BE49-F238E27FC236}">
+                <a16:creationId xmlns:a16="http://schemas.microsoft.com/office/drawing/2014/main" id="{2E80C965-DB6D-4F81-9E9E-B027384D0BD6}"/>
+              </a:ext>
+              <a:ext uri="{C183D7F6-B498-43B3-948B-1728B52AA6E4}">
+                <adec:decorative xmlns:adec="http://schemas.microsoft.com/office/drawing/2017/decorative" val="1"/>
+              </a:ext>
+            </a:extLst>
+          </p:cNvPr>
+          <p:cNvSpPr>
+            <a:spLocks noGrp="1" noRot="1" noChangeAspect="1" noMove="1" noResize="1" noEditPoints="1" noAdjustHandles="1" noChangeArrowheads="1" noChangeShapeType="1" noTextEdit="1"/>
+          </p:cNvSpPr>
+          <p:nvPr>
+            <p:extLst>
+              <p:ext uri="{386F3935-93C4-4BCD-93E2-E3B085C9AB24}">
+                <p16:designElem xmlns:p16="http://schemas.microsoft.com/office/powerpoint/2015/main" val="1"/>
+              </p:ext>
+            </p:extLst>
+          </p:nvPr>
+        </p:nvSpPr>
+        <p:spPr>
+          <a:xfrm rot="2700000">
+            <a:off x="11052629" y="2120024"/>
+            <a:ext cx="645368" cy="645368"/>
+          </a:xfrm>
+          <a:prstGeom prst="rect">
+            <a:avLst/>
+          </a:prstGeom>
+          <a:solidFill>
+            <a:schemeClr val="accent4">
+              <a:alpha val="30000"/>
+            </a:schemeClr>
+          </a:solidFill>
+          <a:ln>
+            <a:noFill/>
+          </a:ln>
+        </p:spPr>
+        <p:style>
+          <a:lnRef idx="2">
+            <a:schemeClr val="accent1">
+              <a:shade val="50000"/>
+            </a:schemeClr>
+          </a:lnRef>
+          <a:fillRef idx="1">
+            <a:schemeClr val="accent1"/>
+          </a:fillRef>
+          <a:effectRef idx="0">
+            <a:schemeClr val="accent1"/>
+          </a:effectRef>
+          <a:fontRef idx="minor">
+            <a:schemeClr val="lt1"/>
+          </a:fontRef>
+        </p:style>
+        <p:txBody>
+          <a:bodyPr rtlCol="0" anchor="ctr"/>
+          <a:lstStyle/>
+          <a:p>
+            <a:pPr algn="ctr"/>
+            <a:endParaRPr lang="en-US"/>
+          </a:p>
+        </p:txBody>
+      </p:sp>
+      <p:sp>
+        <p:nvSpPr>
+          <p:cNvPr id="20" name="Isosceles Triangle 11">
+            <a:extLst>
+              <a:ext uri="{FF2B5EF4-FFF2-40B4-BE49-F238E27FC236}">
+                <a16:creationId xmlns:a16="http://schemas.microsoft.com/office/drawing/2014/main" id="{A580F890-B085-4E95-96AA-55AEBEC5CE6E}"/>
+              </a:ext>
+              <a:ext uri="{C183D7F6-B498-43B3-948B-1728B52AA6E4}">
+                <adec:decorative xmlns:adec="http://schemas.microsoft.com/office/drawing/2017/decorative" val="1"/>
+              </a:ext>
+            </a:extLst>
+          </p:cNvPr>
+          <p:cNvSpPr>
+            <a:spLocks noGrp="1" noRot="1" noChangeAspect="1" noMove="1" noResize="1" noEditPoints="1" noAdjustHandles="1" noChangeArrowheads="1" noChangeShapeType="1" noTextEdit="1"/>
+          </p:cNvSpPr>
+          <p:nvPr>
+            <p:extLst>
+              <p:ext uri="{386F3935-93C4-4BCD-93E2-E3B085C9AB24}">
+                <p16:designElem xmlns:p16="http://schemas.microsoft.com/office/powerpoint/2015/main" val="1"/>
+              </p:ext>
+            </p:extLst>
+          </p:nvPr>
+        </p:nvSpPr>
+        <p:spPr>
+          <a:xfrm rot="16200000">
+            <a:off x="10289068" y="1343027"/>
+            <a:ext cx="2532832" cy="1273032"/>
+          </a:xfrm>
+          <a:prstGeom prst="triangle">
+            <a:avLst>
+              <a:gd name="adj" fmla="val 50000"/>
+            </a:avLst>
+          </a:prstGeom>
+          <a:solidFill>
+            <a:schemeClr val="accent4">
+              <a:alpha val="30000"/>
+            </a:schemeClr>
+          </a:solidFill>
+          <a:ln>
+            <a:noFill/>
+          </a:ln>
+        </p:spPr>
+        <p:style>
+          <a:lnRef idx="2">
+            <a:schemeClr val="accent1">
+              <a:shade val="50000"/>
+            </a:schemeClr>
+          </a:lnRef>
+          <a:fillRef idx="1">
+            <a:schemeClr val="accent1"/>
+          </a:fillRef>
+          <a:effectRef idx="0">
+            <a:schemeClr val="accent1"/>
+          </a:effectRef>
+          <a:fontRef idx="minor">
+            <a:schemeClr val="lt1"/>
+          </a:fontRef>
+        </p:style>
+        <p:txBody>
+          <a:bodyPr rtlCol="0" anchor="ctr"/>
+          <a:lstStyle/>
+          <a:p>
+            <a:pPr algn="ctr"/>
+            <a:endParaRPr lang="en-US"/>
+          </a:p>
+        </p:txBody>
+      </p:sp>
+      <p:sp>
+        <p:nvSpPr>
+          <p:cNvPr id="21" name="Isosceles Triangle 13">
+            <a:extLst>
+              <a:ext uri="{FF2B5EF4-FFF2-40B4-BE49-F238E27FC236}">
+                <a16:creationId xmlns:a16="http://schemas.microsoft.com/office/drawing/2014/main" id="{D3F51FEB-38FB-4F6C-9F7B-2F2AFAB65463}"/>
+              </a:ext>
+              <a:ext uri="{C183D7F6-B498-43B3-948B-1728B52AA6E4}">
+                <adec:decorative xmlns:adec="http://schemas.microsoft.com/office/drawing/2017/decorative" val="1"/>
+              </a:ext>
+            </a:extLst>
+          </p:cNvPr>
+          <p:cNvSpPr>
+            <a:spLocks noGrp="1" noRot="1" noChangeAspect="1" noMove="1" noResize="1" noEditPoints="1" noAdjustHandles="1" noChangeArrowheads="1" noChangeShapeType="1" noTextEdit="1"/>
+          </p:cNvSpPr>
+          <p:nvPr>
+            <p:extLst>
+              <p:ext uri="{386F3935-93C4-4BCD-93E2-E3B085C9AB24}">
+                <p16:designElem xmlns:p16="http://schemas.microsoft.com/office/powerpoint/2015/main" val="1"/>
+              </p:ext>
+            </p:extLst>
+          </p:nvPr>
+        </p:nvSpPr>
+        <p:spPr>
+          <a:xfrm rot="5400000">
+            <a:off x="-501760" y="5103257"/>
+            <a:ext cx="2017580" cy="1014060"/>
+          </a:xfrm>
+          <a:prstGeom prst="triangle">
+            <a:avLst>
+              <a:gd name="adj" fmla="val 50000"/>
+            </a:avLst>
+          </a:prstGeom>
+          <a:solidFill>
+            <a:schemeClr val="accent1">
+              <a:alpha val="30000"/>
+            </a:schemeClr>
+          </a:solidFill>
+          <a:ln>
+            <a:noFill/>
+          </a:ln>
+        </p:spPr>
+        <p:style>
+          <a:lnRef idx="2">
+            <a:schemeClr val="accent1">
+              <a:shade val="50000"/>
+            </a:schemeClr>
+          </a:lnRef>
+          <a:fillRef idx="1">
+            <a:schemeClr val="accent1"/>
+          </a:fillRef>
+          <a:effectRef idx="0">
+            <a:schemeClr val="accent1"/>
+          </a:effectRef>
+          <a:fontRef idx="minor">
+            <a:schemeClr val="lt1"/>
+          </a:fontRef>
+        </p:style>
+        <p:txBody>
+          <a:bodyPr wrap="square" rtlCol="0" anchor="ctr">
+            <a:noAutofit/>
+          </a:bodyPr>
+          <a:lstStyle/>
+          <a:p>
+            <a:pPr algn="ctr"/>
+            <a:endParaRPr lang="en-US"/>
+          </a:p>
+        </p:txBody>
+      </p:sp>
+      <p:sp>
+        <p:nvSpPr>
+          <p:cNvPr id="22" name="Rectangle 15">
+            <a:extLst>
+              <a:ext uri="{FF2B5EF4-FFF2-40B4-BE49-F238E27FC236}">
+                <a16:creationId xmlns:a16="http://schemas.microsoft.com/office/drawing/2014/main" id="{1E547BA6-BAE0-43BB-A7CA-60F69CE252F0}"/>
+              </a:ext>
+              <a:ext uri="{C183D7F6-B498-43B3-948B-1728B52AA6E4}">
+                <adec:decorative xmlns:adec="http://schemas.microsoft.com/office/drawing/2017/decorative" val="1"/>
+              </a:ext>
+            </a:extLst>
+          </p:cNvPr>
+          <p:cNvSpPr>
+            <a:spLocks noGrp="1" noRot="1" noChangeAspect="1" noMove="1" noResize="1" noEditPoints="1" noAdjustHandles="1" noChangeArrowheads="1" noChangeShapeType="1" noTextEdit="1"/>
+          </p:cNvSpPr>
+          <p:nvPr>
+            <p:extLst>
+              <p:ext uri="{386F3935-93C4-4BCD-93E2-E3B085C9AB24}">
+                <p16:designElem xmlns:p16="http://schemas.microsoft.com/office/powerpoint/2015/main" val="1"/>
+              </p:ext>
+            </p:extLst>
+          </p:nvPr>
+        </p:nvSpPr>
+        <p:spPr>
+          <a:xfrm rot="2700000">
+            <a:off x="427916" y="5728708"/>
+            <a:ext cx="485578" cy="485578"/>
+          </a:xfrm>
+          <a:prstGeom prst="rect">
+            <a:avLst/>
+          </a:prstGeom>
+          <a:solidFill>
+            <a:schemeClr val="accent1">
+              <a:alpha val="30000"/>
+            </a:schemeClr>
+          </a:solidFill>
+          <a:ln>
+            <a:noFill/>
+          </a:ln>
+        </p:spPr>
+        <p:style>
+          <a:lnRef idx="2">
+            <a:schemeClr val="accent1">
+              <a:shade val="50000"/>
+            </a:schemeClr>
+          </a:lnRef>
+          <a:fillRef idx="1">
+            <a:schemeClr val="accent1"/>
+          </a:fillRef>
+          <a:effectRef idx="0">
+            <a:schemeClr val="accent1"/>
+          </a:effectRef>
+          <a:fontRef idx="minor">
+            <a:schemeClr val="lt1"/>
+          </a:fontRef>
+        </p:style>
+        <p:txBody>
+          <a:bodyPr wrap="square" rtlCol="0" anchor="ctr">
+            <a:noAutofit/>
+          </a:bodyPr>
+          <a:lstStyle/>
+          <a:p>
+            <a:pPr algn="ctr"/>
+            <a:endParaRPr lang="en-US"/>
+          </a:p>
+        </p:txBody>
+      </p:sp>
+    </p:spTree>
+    <p:extLst>
+      <p:ext uri="{BB962C8B-B14F-4D97-AF65-F5344CB8AC3E}">
+        <p14:creationId xmlns:p14="http://schemas.microsoft.com/office/powerpoint/2010/main" val="3544129574"/>
+      </p:ext>
+    </p:extLst>
+  </p:cSld>
+  <p:clrMapOvr>
+    <a:masterClrMapping/>
+  </p:clrMapOvr>
 </p:sld>
 </file>
 
@@ -18198,4 +18550,47 @@
     </a:ext>
   </a:extLst>
 </a:theme>
+</file>
+
+<file path=ppt/theme/themeOverride1.xml><?xml version="1.0" encoding="utf-8"?>
+<a:themeOverride xmlns:a="http://schemas.openxmlformats.org/drawingml/2006/main">
+  <a:clrScheme name="Office">
+    <a:dk1>
+      <a:sysClr val="windowText" lastClr="000000"/>
+    </a:dk1>
+    <a:lt1>
+      <a:sysClr val="window" lastClr="FFFFFF"/>
+    </a:lt1>
+    <a:dk2>
+      <a:srgbClr val="44546A"/>
+    </a:dk2>
+    <a:lt2>
+      <a:srgbClr val="E7E6E6"/>
+    </a:lt2>
+    <a:accent1>
+      <a:srgbClr val="4472C4"/>
+    </a:accent1>
+    <a:accent2>
+      <a:srgbClr val="ED7D31"/>
+    </a:accent2>
+    <a:accent3>
+      <a:srgbClr val="A5A5A5"/>
+    </a:accent3>
+    <a:accent4>
+      <a:srgbClr val="FFC000"/>
+    </a:accent4>
+    <a:accent5>
+      <a:srgbClr val="5B9BD5"/>
+    </a:accent5>
+    <a:accent6>
+      <a:srgbClr val="70AD47"/>
+    </a:accent6>
+    <a:hlink>
+      <a:srgbClr val="0563C1"/>
+    </a:hlink>
+    <a:folHlink>
+      <a:srgbClr val="954F72"/>
+    </a:folHlink>
+  </a:clrScheme>
+</a:themeOverride>
 </file>
--- a/materials/aacl_presentation.pptx
+++ b/materials/aacl_presentation.pptx
@@ -132,7 +132,7 @@
 <file path=ppt/revisionInfo.xml><?xml version="1.0" encoding="utf-8"?>
 <p1510:revInfo xmlns:a="http://schemas.openxmlformats.org/drawingml/2006/main" xmlns:r="http://schemas.openxmlformats.org/officeDocument/2006/relationships" xmlns:p1510="http://schemas.microsoft.com/office/powerpoint/2015/10/main">
   <p1510:revLst>
-    <p1510:client id="{88A60433-6414-4BD0-8EB6-31796CC6DF80}" v="783" dt="2020-10-20T18:54:48.100"/>
+    <p1510:client id="{88A60433-6414-4BD0-8EB6-31796CC6DF80}" v="961" dt="2020-10-24T18:07:09.240"/>
   </p1510:revLst>
 </p1510:revInfo>
 </file>
@@ -142,12 +142,12 @@
   <pc:docChgLst>
     <pc:chgData name="YUAN HE" userId="83267edd7d760aca" providerId="LiveId" clId="{88A60433-6414-4BD0-8EB6-31796CC6DF80}"/>
     <pc:docChg chg="undo custSel addSld delSld modSld sldOrd">
-      <pc:chgData name="YUAN HE" userId="83267edd7d760aca" providerId="LiveId" clId="{88A60433-6414-4BD0-8EB6-31796CC6DF80}" dt="2020-10-20T18:54:48.100" v="4003" actId="20577"/>
+      <pc:chgData name="YUAN HE" userId="83267edd7d760aca" providerId="LiveId" clId="{88A60433-6414-4BD0-8EB6-31796CC6DF80}" dt="2020-10-24T18:07:09.240" v="4181"/>
       <pc:docMkLst>
         <pc:docMk/>
       </pc:docMkLst>
-      <pc:sldChg chg="modSp mod">
-        <pc:chgData name="YUAN HE" userId="83267edd7d760aca" providerId="LiveId" clId="{88A60433-6414-4BD0-8EB6-31796CC6DF80}" dt="2020-10-19T22:33:16.754" v="3029" actId="20577"/>
+      <pc:sldChg chg="addSp delSp modSp mod modTransition modAnim">
+        <pc:chgData name="YUAN HE" userId="83267edd7d760aca" providerId="LiveId" clId="{88A60433-6414-4BD0-8EB6-31796CC6DF80}" dt="2020-10-24T18:07:09.240" v="4181"/>
         <pc:sldMkLst>
           <pc:docMk/>
           <pc:sldMk cId="2619330505" sldId="257"/>
@@ -168,9 +168,193 @@
             <ac:graphicFrameMk id="48" creationId="{1354A80C-5E28-4A40-932B-6A8E52C46433}"/>
           </ac:graphicFrameMkLst>
         </pc:graphicFrameChg>
+        <pc:picChg chg="add del mod">
+          <ac:chgData name="YUAN HE" userId="83267edd7d760aca" providerId="LiveId" clId="{88A60433-6414-4BD0-8EB6-31796CC6DF80}" dt="2020-10-24T15:16:50.459" v="4073"/>
+          <ac:picMkLst>
+            <pc:docMk/>
+            <pc:sldMk cId="2619330505" sldId="257"/>
+            <ac:picMk id="4" creationId="{46BFA85D-64B4-4359-BCD5-EE9221C258B2}"/>
+          </ac:picMkLst>
+        </pc:picChg>
+        <pc:picChg chg="add del mod">
+          <ac:chgData name="YUAN HE" userId="83267edd7d760aca" providerId="LiveId" clId="{88A60433-6414-4BD0-8EB6-31796CC6DF80}" dt="2020-10-24T14:34:26.078" v="4011"/>
+          <ac:picMkLst>
+            <pc:docMk/>
+            <pc:sldMk cId="2619330505" sldId="257"/>
+            <ac:picMk id="4" creationId="{B18B1B9B-2756-4D98-98A6-E809B0D15EB0}"/>
+          </ac:picMkLst>
+        </pc:picChg>
+        <pc:picChg chg="add del mod">
+          <ac:chgData name="YUAN HE" userId="83267edd7d760aca" providerId="LiveId" clId="{88A60433-6414-4BD0-8EB6-31796CC6DF80}" dt="2020-10-24T15:17:01.225" v="4075"/>
+          <ac:picMkLst>
+            <pc:docMk/>
+            <pc:sldMk cId="2619330505" sldId="257"/>
+            <ac:picMk id="5" creationId="{5B73B836-9F55-4177-8AA8-0672CE4E4088}"/>
+          </ac:picMkLst>
+        </pc:picChg>
+        <pc:picChg chg="add del mod">
+          <ac:chgData name="YUAN HE" userId="83267edd7d760aca" providerId="LiveId" clId="{88A60433-6414-4BD0-8EB6-31796CC6DF80}" dt="2020-10-24T14:36:54.918" v="4015"/>
+          <ac:picMkLst>
+            <pc:docMk/>
+            <pc:sldMk cId="2619330505" sldId="257"/>
+            <ac:picMk id="5" creationId="{BE539034-1130-4510-BE7D-40305C57E131}"/>
+          </ac:picMkLst>
+        </pc:picChg>
+        <pc:picChg chg="add del mod">
+          <ac:chgData name="YUAN HE" userId="83267edd7d760aca" providerId="LiveId" clId="{88A60433-6414-4BD0-8EB6-31796CC6DF80}" dt="2020-10-24T15:26:46.420" v="4094"/>
+          <ac:picMkLst>
+            <pc:docMk/>
+            <pc:sldMk cId="2619330505" sldId="257"/>
+            <ac:picMk id="6" creationId="{1A5ABC7F-79D3-4E89-9720-3B84879B9788}"/>
+          </ac:picMkLst>
+        </pc:picChg>
+        <pc:picChg chg="add del mod">
+          <ac:chgData name="YUAN HE" userId="83267edd7d760aca" providerId="LiveId" clId="{88A60433-6414-4BD0-8EB6-31796CC6DF80}" dt="2020-10-24T14:40:10.957" v="4025"/>
+          <ac:picMkLst>
+            <pc:docMk/>
+            <pc:sldMk cId="2619330505" sldId="257"/>
+            <ac:picMk id="6" creationId="{BEF6FB33-FEB9-4973-A8BC-B1DEF195359C}"/>
+          </ac:picMkLst>
+        </pc:picChg>
+        <pc:picChg chg="add del mod">
+          <ac:chgData name="YUAN HE" userId="83267edd7d760aca" providerId="LiveId" clId="{88A60433-6414-4BD0-8EB6-31796CC6DF80}" dt="2020-10-24T15:27:24.925" v="4096"/>
+          <ac:picMkLst>
+            <pc:docMk/>
+            <pc:sldMk cId="2619330505" sldId="257"/>
+            <ac:picMk id="7" creationId="{57EB9FA0-2E64-485B-97C8-E37566FA59DE}"/>
+          </ac:picMkLst>
+        </pc:picChg>
+        <pc:picChg chg="add del mod">
+          <ac:chgData name="YUAN HE" userId="83267edd7d760aca" providerId="LiveId" clId="{88A60433-6414-4BD0-8EB6-31796CC6DF80}" dt="2020-10-24T14:43:05.015" v="4034"/>
+          <ac:picMkLst>
+            <pc:docMk/>
+            <pc:sldMk cId="2619330505" sldId="257"/>
+            <ac:picMk id="7" creationId="{9DDB36C3-531B-47D5-ACE3-67129F0D09C7}"/>
+          </ac:picMkLst>
+        </pc:picChg>
+        <pc:picChg chg="add del mod">
+          <ac:chgData name="YUAN HE" userId="83267edd7d760aca" providerId="LiveId" clId="{88A60433-6414-4BD0-8EB6-31796CC6DF80}" dt="2020-10-24T15:29:49.391" v="4098"/>
+          <ac:picMkLst>
+            <pc:docMk/>
+            <pc:sldMk cId="2619330505" sldId="257"/>
+            <ac:picMk id="8" creationId="{CD625558-D291-4AD6-8A8D-3301723B4FFC}"/>
+          </ac:picMkLst>
+        </pc:picChg>
+        <pc:picChg chg="add del mod">
+          <ac:chgData name="YUAN HE" userId="83267edd7d760aca" providerId="LiveId" clId="{88A60433-6414-4BD0-8EB6-31796CC6DF80}" dt="2020-10-24T14:44:07.672" v="4036"/>
+          <ac:picMkLst>
+            <pc:docMk/>
+            <pc:sldMk cId="2619330505" sldId="257"/>
+            <ac:picMk id="8" creationId="{D1EEE7FE-9429-477F-A7E6-148BCE601E38}"/>
+          </ac:picMkLst>
+        </pc:picChg>
+        <pc:picChg chg="add del mod">
+          <ac:chgData name="YUAN HE" userId="83267edd7d760aca" providerId="LiveId" clId="{88A60433-6414-4BD0-8EB6-31796CC6DF80}" dt="2020-10-24T14:45:53.824" v="4038"/>
+          <ac:picMkLst>
+            <pc:docMk/>
+            <pc:sldMk cId="2619330505" sldId="257"/>
+            <ac:picMk id="9" creationId="{216F2790-60D4-42EB-A436-C5197B17A5AF}"/>
+          </ac:picMkLst>
+        </pc:picChg>
+        <pc:picChg chg="add del mod">
+          <ac:chgData name="YUAN HE" userId="83267edd7d760aca" providerId="LiveId" clId="{88A60433-6414-4BD0-8EB6-31796CC6DF80}" dt="2020-10-24T18:07:09.240" v="4181"/>
+          <ac:picMkLst>
+            <pc:docMk/>
+            <pc:sldMk cId="2619330505" sldId="257"/>
+            <ac:picMk id="9" creationId="{6F4E0C1B-F3CB-455D-9F62-98A4887F9717}"/>
+          </ac:picMkLst>
+        </pc:picChg>
+        <pc:picChg chg="add del mod">
+          <ac:chgData name="YUAN HE" userId="83267edd7d760aca" providerId="LiveId" clId="{88A60433-6414-4BD0-8EB6-31796CC6DF80}" dt="2020-10-24T14:46:23.918" v="4040"/>
+          <ac:picMkLst>
+            <pc:docMk/>
+            <pc:sldMk cId="2619330505" sldId="257"/>
+            <ac:picMk id="10" creationId="{6760C168-F9E5-4C39-923C-DBDFB0657986}"/>
+          </ac:picMkLst>
+        </pc:picChg>
+        <pc:picChg chg="add del mod">
+          <ac:chgData name="YUAN HE" userId="83267edd7d760aca" providerId="LiveId" clId="{88A60433-6414-4BD0-8EB6-31796CC6DF80}" dt="2020-10-24T14:47:15.003" v="4042"/>
+          <ac:picMkLst>
+            <pc:docMk/>
+            <pc:sldMk cId="2619330505" sldId="257"/>
+            <ac:picMk id="11" creationId="{C21175C0-5F66-49BD-A145-5C9F505D696F}"/>
+          </ac:picMkLst>
+        </pc:picChg>
+        <pc:picChg chg="add del mod">
+          <ac:chgData name="YUAN HE" userId="83267edd7d760aca" providerId="LiveId" clId="{88A60433-6414-4BD0-8EB6-31796CC6DF80}" dt="2020-10-24T14:48:52.222" v="4044"/>
+          <ac:picMkLst>
+            <pc:docMk/>
+            <pc:sldMk cId="2619330505" sldId="257"/>
+            <ac:picMk id="12" creationId="{4CC54AE5-DCF3-47D9-818A-A55A9C28CE7C}"/>
+          </ac:picMkLst>
+        </pc:picChg>
+        <pc:picChg chg="add del mod">
+          <ac:chgData name="YUAN HE" userId="83267edd7d760aca" providerId="LiveId" clId="{88A60433-6414-4BD0-8EB6-31796CC6DF80}" dt="2020-10-24T14:50:02.707" v="4046"/>
+          <ac:picMkLst>
+            <pc:docMk/>
+            <pc:sldMk cId="2619330505" sldId="257"/>
+            <ac:picMk id="13" creationId="{F60F99AB-9C34-476A-8B66-321CF8A0EB0F}"/>
+          </ac:picMkLst>
+        </pc:picChg>
+        <pc:picChg chg="add del mod">
+          <ac:chgData name="YUAN HE" userId="83267edd7d760aca" providerId="LiveId" clId="{88A60433-6414-4BD0-8EB6-31796CC6DF80}" dt="2020-10-24T14:50:27.325" v="4048"/>
+          <ac:picMkLst>
+            <pc:docMk/>
+            <pc:sldMk cId="2619330505" sldId="257"/>
+            <ac:picMk id="14" creationId="{E39A18A8-7474-4BBB-AABB-D9697D324031}"/>
+          </ac:picMkLst>
+        </pc:picChg>
+        <pc:picChg chg="add del mod">
+          <ac:chgData name="YUAN HE" userId="83267edd7d760aca" providerId="LiveId" clId="{88A60433-6414-4BD0-8EB6-31796CC6DF80}" dt="2020-10-24T14:50:44.293" v="4050"/>
+          <ac:picMkLst>
+            <pc:docMk/>
+            <pc:sldMk cId="2619330505" sldId="257"/>
+            <ac:picMk id="15" creationId="{4228B4C1-ED43-40D3-BA16-4582949631E9}"/>
+          </ac:picMkLst>
+        </pc:picChg>
+        <pc:picChg chg="add del mod">
+          <ac:chgData name="YUAN HE" userId="83267edd7d760aca" providerId="LiveId" clId="{88A60433-6414-4BD0-8EB6-31796CC6DF80}" dt="2020-10-24T14:51:09.467" v="4052"/>
+          <ac:picMkLst>
+            <pc:docMk/>
+            <pc:sldMk cId="2619330505" sldId="257"/>
+            <ac:picMk id="16" creationId="{E5FDB443-BDA2-4510-B0C5-5C516A9F777F}"/>
+          </ac:picMkLst>
+        </pc:picChg>
+        <pc:picChg chg="add del mod">
+          <ac:chgData name="YUAN HE" userId="83267edd7d760aca" providerId="LiveId" clId="{88A60433-6414-4BD0-8EB6-31796CC6DF80}" dt="2020-10-24T14:51:49.912" v="4054"/>
+          <ac:picMkLst>
+            <pc:docMk/>
+            <pc:sldMk cId="2619330505" sldId="257"/>
+            <ac:picMk id="18" creationId="{A0ACDE9A-15C5-43B2-A8B1-8CF590182BCF}"/>
+          </ac:picMkLst>
+        </pc:picChg>
+        <pc:picChg chg="add del mod">
+          <ac:chgData name="YUAN HE" userId="83267edd7d760aca" providerId="LiveId" clId="{88A60433-6414-4BD0-8EB6-31796CC6DF80}" dt="2020-10-24T14:57:36.678" v="4056"/>
+          <ac:picMkLst>
+            <pc:docMk/>
+            <pc:sldMk cId="2619330505" sldId="257"/>
+            <ac:picMk id="23" creationId="{90EE0B31-AF41-406B-86FC-D5D9E5B06BD8}"/>
+          </ac:picMkLst>
+        </pc:picChg>
+        <pc:picChg chg="add del mod">
+          <ac:chgData name="YUAN HE" userId="83267edd7d760aca" providerId="LiveId" clId="{88A60433-6414-4BD0-8EB6-31796CC6DF80}" dt="2020-10-24T15:00:26.954" v="4058"/>
+          <ac:picMkLst>
+            <pc:docMk/>
+            <pc:sldMk cId="2619330505" sldId="257"/>
+            <ac:picMk id="24" creationId="{54F9E0A6-2E90-4CFA-8119-6D41E6507466}"/>
+          </ac:picMkLst>
+        </pc:picChg>
+        <pc:picChg chg="add del mod">
+          <ac:chgData name="YUAN HE" userId="83267edd7d760aca" providerId="LiveId" clId="{88A60433-6414-4BD0-8EB6-31796CC6DF80}" dt="2020-10-24T15:00:45.221" v="4060"/>
+          <ac:picMkLst>
+            <pc:docMk/>
+            <pc:sldMk cId="2619330505" sldId="257"/>
+            <ac:picMk id="25" creationId="{3D02A543-B0AC-4016-930B-B1770C3DEB40}"/>
+          </ac:picMkLst>
+        </pc:picChg>
       </pc:sldChg>
-      <pc:sldChg chg="delSp setBg delDesignElem">
-        <pc:chgData name="YUAN HE" userId="83267edd7d760aca" providerId="LiveId" clId="{88A60433-6414-4BD0-8EB6-31796CC6DF80}" dt="2020-10-19T23:42:53.543" v="3216"/>
+      <pc:sldChg chg="addSp delSp modSp modTransition setBg modAnim delDesignElem">
+        <pc:chgData name="YUAN HE" userId="83267edd7d760aca" providerId="LiveId" clId="{88A60433-6414-4BD0-8EB6-31796CC6DF80}" dt="2020-10-24T18:07:09.240" v="4181"/>
         <pc:sldMkLst>
           <pc:docMk/>
           <pc:sldMk cId="4188249468" sldId="258"/>
@@ -215,9 +399,49 @@
             <ac:spMk id="22" creationId="{1E547BA6-BAE0-43BB-A7CA-60F69CE252F0}"/>
           </ac:spMkLst>
         </pc:spChg>
+        <pc:picChg chg="add del mod">
+          <ac:chgData name="YUAN HE" userId="83267edd7d760aca" providerId="LiveId" clId="{88A60433-6414-4BD0-8EB6-31796CC6DF80}" dt="2020-10-24T15:41:31.920" v="4112"/>
+          <ac:picMkLst>
+            <pc:docMk/>
+            <pc:sldMk cId="4188249468" sldId="258"/>
+            <ac:picMk id="4" creationId="{A28D205C-FD65-4565-8CFA-32A64AF49D19}"/>
+          </ac:picMkLst>
+        </pc:picChg>
+        <pc:picChg chg="add del mod">
+          <ac:chgData name="YUAN HE" userId="83267edd7d760aca" providerId="LiveId" clId="{88A60433-6414-4BD0-8EB6-31796CC6DF80}" dt="2020-10-24T14:34:26.078" v="4011"/>
+          <ac:picMkLst>
+            <pc:docMk/>
+            <pc:sldMk cId="4188249468" sldId="258"/>
+            <ac:picMk id="4" creationId="{C4EC248E-77D8-4CD4-B430-8A5C981C7C86}"/>
+          </ac:picMkLst>
+        </pc:picChg>
+        <pc:picChg chg="add del mod">
+          <ac:chgData name="YUAN HE" userId="83267edd7d760aca" providerId="LiveId" clId="{88A60433-6414-4BD0-8EB6-31796CC6DF80}" dt="2020-10-24T15:42:07.224" v="4114"/>
+          <ac:picMkLst>
+            <pc:docMk/>
+            <pc:sldMk cId="4188249468" sldId="258"/>
+            <ac:picMk id="5" creationId="{91C19C72-A72A-41A3-B901-E1DD08B468A0}"/>
+          </ac:picMkLst>
+        </pc:picChg>
+        <pc:picChg chg="add del mod">
+          <ac:chgData name="YUAN HE" userId="83267edd7d760aca" providerId="LiveId" clId="{88A60433-6414-4BD0-8EB6-31796CC6DF80}" dt="2020-10-24T15:42:33.504" v="4116"/>
+          <ac:picMkLst>
+            <pc:docMk/>
+            <pc:sldMk cId="4188249468" sldId="258"/>
+            <ac:picMk id="6" creationId="{EF01E8C4-65F1-4866-A203-58F68A36DFED}"/>
+          </ac:picMkLst>
+        </pc:picChg>
+        <pc:picChg chg="add del mod">
+          <ac:chgData name="YUAN HE" userId="83267edd7d760aca" providerId="LiveId" clId="{88A60433-6414-4BD0-8EB6-31796CC6DF80}" dt="2020-10-24T18:07:09.240" v="4181"/>
+          <ac:picMkLst>
+            <pc:docMk/>
+            <pc:sldMk cId="4188249468" sldId="258"/>
+            <ac:picMk id="7" creationId="{77CFB622-7E34-465E-9EC2-442E138682FC}"/>
+          </ac:picMkLst>
+        </pc:picChg>
       </pc:sldChg>
-      <pc:sldChg chg="addSp delSp modSp mod modAnim">
-        <pc:chgData name="YUAN HE" userId="83267edd7d760aca" providerId="LiveId" clId="{88A60433-6414-4BD0-8EB6-31796CC6DF80}" dt="2020-10-19T23:17:33.853" v="3155" actId="1076"/>
+      <pc:sldChg chg="addSp delSp modSp mod modTransition modAnim">
+        <pc:chgData name="YUAN HE" userId="83267edd7d760aca" providerId="LiveId" clId="{88A60433-6414-4BD0-8EB6-31796CC6DF80}" dt="2020-10-24T18:07:09.240" v="4181"/>
         <pc:sldMkLst>
           <pc:docMk/>
           <pc:sldMk cId="171567685" sldId="259"/>
@@ -294,12 +518,36 @@
             <ac:spMk id="43" creationId="{E8A8CA55-EB27-41E0-B1DF-AE613B8335D9}"/>
           </ac:spMkLst>
         </pc:spChg>
+        <pc:picChg chg="add del mod">
+          <ac:chgData name="YUAN HE" userId="83267edd7d760aca" providerId="LiveId" clId="{88A60433-6414-4BD0-8EB6-31796CC6DF80}" dt="2020-10-24T14:34:26.078" v="4011"/>
+          <ac:picMkLst>
+            <pc:docMk/>
+            <pc:sldMk cId="171567685" sldId="259"/>
+            <ac:picMk id="4" creationId="{5D383587-31AE-494A-B5F9-EBD44205DFCB}"/>
+          </ac:picMkLst>
+        </pc:picChg>
+        <pc:picChg chg="add del mod">
+          <ac:chgData name="YUAN HE" userId="83267edd7d760aca" providerId="LiveId" clId="{88A60433-6414-4BD0-8EB6-31796CC6DF80}" dt="2020-10-24T15:49:37.889" v="4126"/>
+          <ac:picMkLst>
+            <pc:docMk/>
+            <pc:sldMk cId="171567685" sldId="259"/>
+            <ac:picMk id="4" creationId="{E8978C2D-2359-436C-AEB0-638D808930F9}"/>
+          </ac:picMkLst>
+        </pc:picChg>
         <pc:picChg chg="del mod">
           <ac:chgData name="YUAN HE" userId="83267edd7d760aca" providerId="LiveId" clId="{88A60433-6414-4BD0-8EB6-31796CC6DF80}" dt="2020-10-19T23:12:38.601" v="3030" actId="478"/>
           <ac:picMkLst>
             <pc:docMk/>
             <pc:sldMk cId="171567685" sldId="259"/>
             <ac:picMk id="5" creationId="{3D656B5E-D102-4259-8D90-2D6E9CCA1186}"/>
+          </ac:picMkLst>
+        </pc:picChg>
+        <pc:picChg chg="add del mod">
+          <ac:chgData name="YUAN HE" userId="83267edd7d760aca" providerId="LiveId" clId="{88A60433-6414-4BD0-8EB6-31796CC6DF80}" dt="2020-10-24T18:07:09.240" v="4181"/>
+          <ac:picMkLst>
+            <pc:docMk/>
+            <pc:sldMk cId="171567685" sldId="259"/>
+            <ac:picMk id="5" creationId="{B9F1B09E-965C-4FFA-B62D-6EA70EE1E030}"/>
           </ac:picMkLst>
         </pc:picChg>
         <pc:picChg chg="add mod ord">
@@ -375,12 +623,131 @@
           </ac:cxnSpMkLst>
         </pc:cxnChg>
       </pc:sldChg>
-      <pc:sldChg chg="ord">
-        <pc:chgData name="YUAN HE" userId="83267edd7d760aca" providerId="LiveId" clId="{88A60433-6414-4BD0-8EB6-31796CC6DF80}" dt="2020-10-15T17:19:32.946" v="1550"/>
+      <pc:sldChg chg="addSp delSp modSp modTransition modAnim">
+        <pc:chgData name="YUAN HE" userId="83267edd7d760aca" providerId="LiveId" clId="{88A60433-6414-4BD0-8EB6-31796CC6DF80}" dt="2020-10-24T18:07:09.240" v="4181"/>
+        <pc:sldMkLst>
+          <pc:docMk/>
+          <pc:sldMk cId="3699047063" sldId="260"/>
+        </pc:sldMkLst>
+        <pc:picChg chg="add del mod">
+          <ac:chgData name="YUAN HE" userId="83267edd7d760aca" providerId="LiveId" clId="{88A60433-6414-4BD0-8EB6-31796CC6DF80}" dt="2020-10-24T14:34:26.078" v="4011"/>
+          <ac:picMkLst>
+            <pc:docMk/>
+            <pc:sldMk cId="3699047063" sldId="260"/>
+            <ac:picMk id="4" creationId="{68048879-CC30-4BC3-938E-10D41EC46ED9}"/>
+          </ac:picMkLst>
+        </pc:picChg>
+        <pc:picChg chg="add del mod">
+          <ac:chgData name="YUAN HE" userId="83267edd7d760aca" providerId="LiveId" clId="{88A60433-6414-4BD0-8EB6-31796CC6DF80}" dt="2020-10-24T15:52:50.618" v="4129"/>
+          <ac:picMkLst>
+            <pc:docMk/>
+            <pc:sldMk cId="3699047063" sldId="260"/>
+            <ac:picMk id="4" creationId="{F612E314-F7D2-4A58-AB28-9D1EFB6C34B6}"/>
+          </ac:picMkLst>
+        </pc:picChg>
+        <pc:picChg chg="add del mod">
+          <ac:chgData name="YUAN HE" userId="83267edd7d760aca" providerId="LiveId" clId="{88A60433-6414-4BD0-8EB6-31796CC6DF80}" dt="2020-10-24T15:54:50.368" v="4131"/>
+          <ac:picMkLst>
+            <pc:docMk/>
+            <pc:sldMk cId="3699047063" sldId="260"/>
+            <ac:picMk id="5" creationId="{B0BC1D11-2928-47EC-BF94-DA4CCEA9C69A}"/>
+          </ac:picMkLst>
+        </pc:picChg>
+        <pc:picChg chg="add del mod">
+          <ac:chgData name="YUAN HE" userId="83267edd7d760aca" providerId="LiveId" clId="{88A60433-6414-4BD0-8EB6-31796CC6DF80}" dt="2020-10-24T15:55:59.744" v="4134"/>
+          <ac:picMkLst>
+            <pc:docMk/>
+            <pc:sldMk cId="3699047063" sldId="260"/>
+            <ac:picMk id="6" creationId="{E72CC45E-0E29-4BD9-A4B7-3246A164034C}"/>
+          </ac:picMkLst>
+        </pc:picChg>
+        <pc:picChg chg="add del mod">
+          <ac:chgData name="YUAN HE" userId="83267edd7d760aca" providerId="LiveId" clId="{88A60433-6414-4BD0-8EB6-31796CC6DF80}" dt="2020-10-24T15:57:16.579" v="4136"/>
+          <ac:picMkLst>
+            <pc:docMk/>
+            <pc:sldMk cId="3699047063" sldId="260"/>
+            <ac:picMk id="7" creationId="{9CA07C75-2F98-4A08-8D54-28D148C9BD50}"/>
+          </ac:picMkLst>
+        </pc:picChg>
+        <pc:picChg chg="add del mod">
+          <ac:chgData name="YUAN HE" userId="83267edd7d760aca" providerId="LiveId" clId="{88A60433-6414-4BD0-8EB6-31796CC6DF80}" dt="2020-10-24T18:07:09.240" v="4181"/>
+          <ac:picMkLst>
+            <pc:docMk/>
+            <pc:sldMk cId="3699047063" sldId="260"/>
+            <ac:picMk id="8" creationId="{9D50F4E9-AAA2-4351-988D-95B2EC5776FD}"/>
+          </ac:picMkLst>
+        </pc:picChg>
+      </pc:sldChg>
+      <pc:sldChg chg="addSp delSp modSp ord modTransition modAnim">
+        <pc:chgData name="YUAN HE" userId="83267edd7d760aca" providerId="LiveId" clId="{88A60433-6414-4BD0-8EB6-31796CC6DF80}" dt="2020-10-24T18:07:09.240" v="4181"/>
         <pc:sldMkLst>
           <pc:docMk/>
           <pc:sldMk cId="733360352" sldId="261"/>
         </pc:sldMkLst>
+        <pc:picChg chg="add del mod">
+          <ac:chgData name="YUAN HE" userId="83267edd7d760aca" providerId="LiveId" clId="{88A60433-6414-4BD0-8EB6-31796CC6DF80}" dt="2020-10-24T16:18:36.811" v="4158"/>
+          <ac:picMkLst>
+            <pc:docMk/>
+            <pc:sldMk cId="733360352" sldId="261"/>
+            <ac:picMk id="3" creationId="{A99F7138-414E-45E4-B56B-3A30894A2416}"/>
+          </ac:picMkLst>
+        </pc:picChg>
+        <pc:picChg chg="add del mod">
+          <ac:chgData name="YUAN HE" userId="83267edd7d760aca" providerId="LiveId" clId="{88A60433-6414-4BD0-8EB6-31796CC6DF80}" dt="2020-10-24T14:34:26.078" v="4011"/>
+          <ac:picMkLst>
+            <pc:docMk/>
+            <pc:sldMk cId="733360352" sldId="261"/>
+            <ac:picMk id="3" creationId="{CC4FDE3D-B377-480E-85C1-A9D2D46EA847}"/>
+          </ac:picMkLst>
+        </pc:picChg>
+        <pc:picChg chg="add del mod">
+          <ac:chgData name="YUAN HE" userId="83267edd7d760aca" providerId="LiveId" clId="{88A60433-6414-4BD0-8EB6-31796CC6DF80}" dt="2020-10-24T16:19:54.678" v="4160"/>
+          <ac:picMkLst>
+            <pc:docMk/>
+            <pc:sldMk cId="733360352" sldId="261"/>
+            <ac:picMk id="4" creationId="{D1579B23-625F-4847-AAFD-039E17689E6A}"/>
+          </ac:picMkLst>
+        </pc:picChg>
+        <pc:picChg chg="add del mod">
+          <ac:chgData name="YUAN HE" userId="83267edd7d760aca" providerId="LiveId" clId="{88A60433-6414-4BD0-8EB6-31796CC6DF80}" dt="2020-10-24T16:20:31.857" v="4162"/>
+          <ac:picMkLst>
+            <pc:docMk/>
+            <pc:sldMk cId="733360352" sldId="261"/>
+            <ac:picMk id="6" creationId="{1072FA08-8111-4819-8270-368C493BBC0B}"/>
+          </ac:picMkLst>
+        </pc:picChg>
+        <pc:picChg chg="add del mod">
+          <ac:chgData name="YUAN HE" userId="83267edd7d760aca" providerId="LiveId" clId="{88A60433-6414-4BD0-8EB6-31796CC6DF80}" dt="2020-10-24T16:31:29.269" v="4164"/>
+          <ac:picMkLst>
+            <pc:docMk/>
+            <pc:sldMk cId="733360352" sldId="261"/>
+            <ac:picMk id="8" creationId="{2712F2EB-E5DD-4916-B65E-CD0AB94C0ACF}"/>
+          </ac:picMkLst>
+        </pc:picChg>
+        <pc:picChg chg="add del mod">
+          <ac:chgData name="YUAN HE" userId="83267edd7d760aca" providerId="LiveId" clId="{88A60433-6414-4BD0-8EB6-31796CC6DF80}" dt="2020-10-24T16:33:40.858" v="4166"/>
+          <ac:picMkLst>
+            <pc:docMk/>
+            <pc:sldMk cId="733360352" sldId="261"/>
+            <ac:picMk id="9" creationId="{BB5D557A-6799-4ABA-9A9B-E3F1A162C958}"/>
+          </ac:picMkLst>
+        </pc:picChg>
+        <pc:picChg chg="add del mod">
+          <ac:chgData name="YUAN HE" userId="83267edd7d760aca" providerId="LiveId" clId="{88A60433-6414-4BD0-8EB6-31796CC6DF80}" dt="2020-10-24T16:34:56.241" v="4168"/>
+          <ac:picMkLst>
+            <pc:docMk/>
+            <pc:sldMk cId="733360352" sldId="261"/>
+            <ac:picMk id="10" creationId="{FE8443FC-0E6F-4F71-8E75-5F2707DA1D4F}"/>
+          </ac:picMkLst>
+        </pc:picChg>
+        <pc:picChg chg="add del mod">
+          <ac:chgData name="YUAN HE" userId="83267edd7d760aca" providerId="LiveId" clId="{88A60433-6414-4BD0-8EB6-31796CC6DF80}" dt="2020-10-24T18:07:09.240" v="4181"/>
+          <ac:picMkLst>
+            <pc:docMk/>
+            <pc:sldMk cId="733360352" sldId="261"/>
+            <ac:picMk id="11" creationId="{948209D4-B6CA-4B6F-AF45-130F223695B3}"/>
+          </ac:picMkLst>
+        </pc:picChg>
       </pc:sldChg>
       <pc:sldChg chg="modSp del mod">
         <pc:chgData name="YUAN HE" userId="83267edd7d760aca" providerId="LiveId" clId="{88A60433-6414-4BD0-8EB6-31796CC6DF80}" dt="2020-10-19T14:34:00.360" v="3027" actId="2696"/>
@@ -397,8 +764,8 @@
           </ac:spMkLst>
         </pc:spChg>
       </pc:sldChg>
-      <pc:sldChg chg="modSp mod">
-        <pc:chgData name="YUAN HE" userId="83267edd7d760aca" providerId="LiveId" clId="{88A60433-6414-4BD0-8EB6-31796CC6DF80}" dt="2020-10-19T14:30:50.032" v="2881" actId="20577"/>
+      <pc:sldChg chg="addSp delSp modSp mod modTransition modAnim">
+        <pc:chgData name="YUAN HE" userId="83267edd7d760aca" providerId="LiveId" clId="{88A60433-6414-4BD0-8EB6-31796CC6DF80}" dt="2020-10-24T18:07:09.240" v="4181"/>
         <pc:sldMkLst>
           <pc:docMk/>
           <pc:sldMk cId="2960609488" sldId="263"/>
@@ -411,9 +778,65 @@
             <ac:spMk id="3" creationId="{59199C4C-5AA4-49CE-81AC-CBF428574A2B}"/>
           </ac:spMkLst>
         </pc:spChg>
+        <pc:picChg chg="add del mod">
+          <ac:chgData name="YUAN HE" userId="83267edd7d760aca" providerId="LiveId" clId="{88A60433-6414-4BD0-8EB6-31796CC6DF80}" dt="2020-10-24T14:34:26.078" v="4011"/>
+          <ac:picMkLst>
+            <pc:docMk/>
+            <pc:sldMk cId="2960609488" sldId="263"/>
+            <ac:picMk id="4" creationId="{01D0D27D-C15F-406C-BECD-FDF0E0B5C99F}"/>
+          </ac:picMkLst>
+        </pc:picChg>
+        <pc:picChg chg="add del mod">
+          <ac:chgData name="YUAN HE" userId="83267edd7d760aca" providerId="LiveId" clId="{88A60433-6414-4BD0-8EB6-31796CC6DF80}" dt="2020-10-24T15:35:06.848" v="4101"/>
+          <ac:picMkLst>
+            <pc:docMk/>
+            <pc:sldMk cId="2960609488" sldId="263"/>
+            <ac:picMk id="4" creationId="{0A8C9BAB-14AC-4A78-AA43-3B98291E1539}"/>
+          </ac:picMkLst>
+        </pc:picChg>
+        <pc:picChg chg="add del mod">
+          <ac:chgData name="YUAN HE" userId="83267edd7d760aca" providerId="LiveId" clId="{88A60433-6414-4BD0-8EB6-31796CC6DF80}" dt="2020-10-24T15:35:22.988" v="4103"/>
+          <ac:picMkLst>
+            <pc:docMk/>
+            <pc:sldMk cId="2960609488" sldId="263"/>
+            <ac:picMk id="5" creationId="{ABB00FCB-2B3E-44E7-8070-158CD2C52F40}"/>
+          </ac:picMkLst>
+        </pc:picChg>
+        <pc:picChg chg="add del mod">
+          <ac:chgData name="YUAN HE" userId="83267edd7d760aca" providerId="LiveId" clId="{88A60433-6414-4BD0-8EB6-31796CC6DF80}" dt="2020-10-24T15:36:04.825" v="4105"/>
+          <ac:picMkLst>
+            <pc:docMk/>
+            <pc:sldMk cId="2960609488" sldId="263"/>
+            <ac:picMk id="6" creationId="{3305C3F4-E682-4B68-A938-3C60DC610AF1}"/>
+          </ac:picMkLst>
+        </pc:picChg>
+        <pc:picChg chg="add del mod">
+          <ac:chgData name="YUAN HE" userId="83267edd7d760aca" providerId="LiveId" clId="{88A60433-6414-4BD0-8EB6-31796CC6DF80}" dt="2020-10-24T15:37:20.316" v="4107"/>
+          <ac:picMkLst>
+            <pc:docMk/>
+            <pc:sldMk cId="2960609488" sldId="263"/>
+            <ac:picMk id="7" creationId="{A7EF120B-AFFE-4B74-A6CC-E7DE6B6B3BAE}"/>
+          </ac:picMkLst>
+        </pc:picChg>
+        <pc:picChg chg="add del mod">
+          <ac:chgData name="YUAN HE" userId="83267edd7d760aca" providerId="LiveId" clId="{88A60433-6414-4BD0-8EB6-31796CC6DF80}" dt="2020-10-24T15:38:15.671" v="4109"/>
+          <ac:picMkLst>
+            <pc:docMk/>
+            <pc:sldMk cId="2960609488" sldId="263"/>
+            <ac:picMk id="8" creationId="{43EA5A3A-1541-4DE1-A067-D34D4934C707}"/>
+          </ac:picMkLst>
+        </pc:picChg>
+        <pc:picChg chg="add del mod">
+          <ac:chgData name="YUAN HE" userId="83267edd7d760aca" providerId="LiveId" clId="{88A60433-6414-4BD0-8EB6-31796CC6DF80}" dt="2020-10-24T18:07:09.240" v="4181"/>
+          <ac:picMkLst>
+            <pc:docMk/>
+            <pc:sldMk cId="2960609488" sldId="263"/>
+            <ac:picMk id="9" creationId="{BF973CDD-A704-4F3E-8616-A64B2DF7317B}"/>
+          </ac:picMkLst>
+        </pc:picChg>
       </pc:sldChg>
-      <pc:sldChg chg="addSp delSp modSp mod">
-        <pc:chgData name="YUAN HE" userId="83267edd7d760aca" providerId="LiveId" clId="{88A60433-6414-4BD0-8EB6-31796CC6DF80}" dt="2020-10-19T13:17:13.751" v="2871" actId="1076"/>
+      <pc:sldChg chg="addSp delSp modSp mod modTransition modAnim">
+        <pc:chgData name="YUAN HE" userId="83267edd7d760aca" providerId="LiveId" clId="{88A60433-6414-4BD0-8EB6-31796CC6DF80}" dt="2020-10-24T18:07:09.240" v="4181"/>
         <pc:sldMkLst>
           <pc:docMk/>
           <pc:sldMk cId="1596913002" sldId="264"/>
@@ -443,6 +866,22 @@
           </ac:picMkLst>
         </pc:picChg>
         <pc:picChg chg="add del mod">
+          <ac:chgData name="YUAN HE" userId="83267edd7d760aca" providerId="LiveId" clId="{88A60433-6414-4BD0-8EB6-31796CC6DF80}" dt="2020-10-24T14:26:07.127" v="4005"/>
+          <ac:picMkLst>
+            <pc:docMk/>
+            <pc:sldMk cId="1596913002" sldId="264"/>
+            <ac:picMk id="5" creationId="{26B3DF6E-0822-4D0E-AD40-F6F1090472EE}"/>
+          </ac:picMkLst>
+        </pc:picChg>
+        <pc:picChg chg="add del mod">
+          <ac:chgData name="YUAN HE" userId="83267edd7d760aca" providerId="LiveId" clId="{88A60433-6414-4BD0-8EB6-31796CC6DF80}" dt="2020-10-24T15:15:49.528" v="4070"/>
+          <ac:picMkLst>
+            <pc:docMk/>
+            <pc:sldMk cId="1596913002" sldId="264"/>
+            <ac:picMk id="5" creationId="{77553A4E-C2DD-41AD-94AF-343708CC6CFC}"/>
+          </ac:picMkLst>
+        </pc:picChg>
+        <pc:picChg chg="add del mod">
           <ac:chgData name="YUAN HE" userId="83267edd7d760aca" providerId="LiveId" clId="{88A60433-6414-4BD0-8EB6-31796CC6DF80}" dt="2020-10-15T18:09:06.575" v="2709" actId="478"/>
           <ac:picMkLst>
             <pc:docMk/>
@@ -474,6 +913,22 @@
             <ac:picMk id="8" creationId="{B05A7997-620E-4486-BF4E-389B07168E07}"/>
           </ac:picMkLst>
         </pc:picChg>
+        <pc:picChg chg="add del mod">
+          <ac:chgData name="YUAN HE" userId="83267edd7d760aca" providerId="LiveId" clId="{88A60433-6414-4BD0-8EB6-31796CC6DF80}" dt="2020-10-24T14:28:00.981" v="4007"/>
+          <ac:picMkLst>
+            <pc:docMk/>
+            <pc:sldMk cId="1596913002" sldId="264"/>
+            <ac:picMk id="9" creationId="{0161353F-5261-4D7F-8733-C3999A16DC84}"/>
+          </ac:picMkLst>
+        </pc:picChg>
+        <pc:picChg chg="add del mod">
+          <ac:chgData name="YUAN HE" userId="83267edd7d760aca" providerId="LiveId" clId="{88A60433-6414-4BD0-8EB6-31796CC6DF80}" dt="2020-10-24T15:16:50.459" v="4073"/>
+          <ac:picMkLst>
+            <pc:docMk/>
+            <pc:sldMk cId="1596913002" sldId="264"/>
+            <ac:picMk id="9" creationId="{DD3E0119-2DB6-4A58-92BC-B5D9DF76E5C9}"/>
+          </ac:picMkLst>
+        </pc:picChg>
         <pc:picChg chg="mod">
           <ac:chgData name="YUAN HE" userId="83267edd7d760aca" providerId="LiveId" clId="{88A60433-6414-4BD0-8EB6-31796CC6DF80}" dt="2020-10-15T18:17:09.684" v="2766" actId="1076"/>
           <ac:picMkLst>
@@ -498,6 +953,14 @@
             <ac:picMk id="12" creationId="{AEC354F3-987B-4FD6-9EF6-17479F6E45A7}"/>
           </ac:picMkLst>
         </pc:picChg>
+        <pc:picChg chg="add del mod">
+          <ac:chgData name="YUAN HE" userId="83267edd7d760aca" providerId="LiveId" clId="{88A60433-6414-4BD0-8EB6-31796CC6DF80}" dt="2020-10-24T14:28:23.065" v="4009"/>
+          <ac:picMkLst>
+            <pc:docMk/>
+            <pc:sldMk cId="1596913002" sldId="264"/>
+            <ac:picMk id="13" creationId="{7312DD6D-56E7-47D5-96B8-B6862B7A58F4}"/>
+          </ac:picMkLst>
+        </pc:picChg>
         <pc:picChg chg="del mod">
           <ac:chgData name="YUAN HE" userId="83267edd7d760aca" providerId="LiveId" clId="{88A60433-6414-4BD0-8EB6-31796CC6DF80}" dt="2020-10-19T12:34:36.862" v="2803" actId="21"/>
           <ac:picMkLst>
@@ -506,9 +969,193 @@
             <ac:picMk id="13" creationId="{77E8B936-BA56-459E-B1D9-A44D2980316E}"/>
           </ac:picMkLst>
         </pc:picChg>
+        <pc:picChg chg="add del mod">
+          <ac:chgData name="YUAN HE" userId="83267edd7d760aca" providerId="LiveId" clId="{88A60433-6414-4BD0-8EB6-31796CC6DF80}" dt="2020-10-24T15:20:32.875" v="4077"/>
+          <ac:picMkLst>
+            <pc:docMk/>
+            <pc:sldMk cId="1596913002" sldId="264"/>
+            <ac:picMk id="13" creationId="{92C717E1-7269-4DA2-96F3-2C5A660703B5}"/>
+          </ac:picMkLst>
+        </pc:picChg>
+        <pc:picChg chg="add del mod">
+          <ac:chgData name="YUAN HE" userId="83267edd7d760aca" providerId="LiveId" clId="{88A60433-6414-4BD0-8EB6-31796CC6DF80}" dt="2020-10-24T15:22:10.712" v="4079"/>
+          <ac:picMkLst>
+            <pc:docMk/>
+            <pc:sldMk cId="1596913002" sldId="264"/>
+            <ac:picMk id="14" creationId="{5ED057E9-0FA2-48FB-85CA-0D71E33EA312}"/>
+          </ac:picMkLst>
+        </pc:picChg>
+        <pc:picChg chg="add del mod">
+          <ac:chgData name="YUAN HE" userId="83267edd7d760aca" providerId="LiveId" clId="{88A60433-6414-4BD0-8EB6-31796CC6DF80}" dt="2020-10-24T14:34:26.078" v="4011"/>
+          <ac:picMkLst>
+            <pc:docMk/>
+            <pc:sldMk cId="1596913002" sldId="264"/>
+            <ac:picMk id="14" creationId="{A0764FBA-BC8F-4A6B-8EB9-05CB34256D5A}"/>
+          </ac:picMkLst>
+        </pc:picChg>
+        <pc:picChg chg="add del mod">
+          <ac:chgData name="YUAN HE" userId="83267edd7d760aca" providerId="LiveId" clId="{88A60433-6414-4BD0-8EB6-31796CC6DF80}" dt="2020-10-24T15:22:21.512" v="4081"/>
+          <ac:picMkLst>
+            <pc:docMk/>
+            <pc:sldMk cId="1596913002" sldId="264"/>
+            <ac:picMk id="15" creationId="{12687D19-40A3-4A74-9299-B51B24731DFC}"/>
+          </ac:picMkLst>
+        </pc:picChg>
+        <pc:picChg chg="add del mod">
+          <ac:chgData name="YUAN HE" userId="83267edd7d760aca" providerId="LiveId" clId="{88A60433-6414-4BD0-8EB6-31796CC6DF80}" dt="2020-10-24T14:35:25.614" v="4013"/>
+          <ac:picMkLst>
+            <pc:docMk/>
+            <pc:sldMk cId="1596913002" sldId="264"/>
+            <ac:picMk id="15" creationId="{ED3770EB-4FD6-472A-874A-F25A15A9663E}"/>
+          </ac:picMkLst>
+        </pc:picChg>
+        <pc:picChg chg="add del mod">
+          <ac:chgData name="YUAN HE" userId="83267edd7d760aca" providerId="LiveId" clId="{88A60433-6414-4BD0-8EB6-31796CC6DF80}" dt="2020-10-24T15:23:04.529" v="4083"/>
+          <ac:picMkLst>
+            <pc:docMk/>
+            <pc:sldMk cId="1596913002" sldId="264"/>
+            <ac:picMk id="16" creationId="{0A2E99A6-FD25-4A25-AB28-DAEB994ED132}"/>
+          </ac:picMkLst>
+        </pc:picChg>
+        <pc:picChg chg="add del mod">
+          <ac:chgData name="YUAN HE" userId="83267edd7d760aca" providerId="LiveId" clId="{88A60433-6414-4BD0-8EB6-31796CC6DF80}" dt="2020-10-24T14:37:49.806" v="4017"/>
+          <ac:picMkLst>
+            <pc:docMk/>
+            <pc:sldMk cId="1596913002" sldId="264"/>
+            <ac:picMk id="16" creationId="{A5B74457-0E37-403B-B72A-1F1037898821}"/>
+          </ac:picMkLst>
+        </pc:picChg>
+        <pc:picChg chg="add del mod">
+          <ac:chgData name="YUAN HE" userId="83267edd7d760aca" providerId="LiveId" clId="{88A60433-6414-4BD0-8EB6-31796CC6DF80}" dt="2020-10-24T14:38:14.307" v="4019"/>
+          <ac:picMkLst>
+            <pc:docMk/>
+            <pc:sldMk cId="1596913002" sldId="264"/>
+            <ac:picMk id="18" creationId="{07B1CE78-65C5-43FF-B28D-738C13F5A636}"/>
+          </ac:picMkLst>
+        </pc:picChg>
+        <pc:picChg chg="add del mod">
+          <ac:chgData name="YUAN HE" userId="83267edd7d760aca" providerId="LiveId" clId="{88A60433-6414-4BD0-8EB6-31796CC6DF80}" dt="2020-10-24T15:23:38.657" v="4085"/>
+          <ac:picMkLst>
+            <pc:docMk/>
+            <pc:sldMk cId="1596913002" sldId="264"/>
+            <ac:picMk id="18" creationId="{15403D6C-5F1B-4A3B-9E0B-AF03B384ABAE}"/>
+          </ac:picMkLst>
+        </pc:picChg>
+        <pc:picChg chg="add del mod">
+          <ac:chgData name="YUAN HE" userId="83267edd7d760aca" providerId="LiveId" clId="{88A60433-6414-4BD0-8EB6-31796CC6DF80}" dt="2020-10-24T14:39:10.488" v="4021"/>
+          <ac:picMkLst>
+            <pc:docMk/>
+            <pc:sldMk cId="1596913002" sldId="264"/>
+            <ac:picMk id="23" creationId="{3E08A195-808A-4B8B-9318-9A258F585944}"/>
+          </ac:picMkLst>
+        </pc:picChg>
+        <pc:picChg chg="add del mod">
+          <ac:chgData name="YUAN HE" userId="83267edd7d760aca" providerId="LiveId" clId="{88A60433-6414-4BD0-8EB6-31796CC6DF80}" dt="2020-10-24T15:24:27.189" v="4087"/>
+          <ac:picMkLst>
+            <pc:docMk/>
+            <pc:sldMk cId="1596913002" sldId="264"/>
+            <ac:picMk id="23" creationId="{477B6C7E-EA2B-4CC4-B0CA-FB846166AECA}"/>
+          </ac:picMkLst>
+        </pc:picChg>
+        <pc:picChg chg="add del mod">
+          <ac:chgData name="YUAN HE" userId="83267edd7d760aca" providerId="LiveId" clId="{88A60433-6414-4BD0-8EB6-31796CC6DF80}" dt="2020-10-24T15:25:25.665" v="4089"/>
+          <ac:picMkLst>
+            <pc:docMk/>
+            <pc:sldMk cId="1596913002" sldId="264"/>
+            <ac:picMk id="24" creationId="{0BC63BD3-F217-4B1D-88C8-1C2AB04C633C}"/>
+          </ac:picMkLst>
+        </pc:picChg>
+        <pc:picChg chg="add del mod">
+          <ac:chgData name="YUAN HE" userId="83267edd7d760aca" providerId="LiveId" clId="{88A60433-6414-4BD0-8EB6-31796CC6DF80}" dt="2020-10-24T14:40:03.267" v="4023"/>
+          <ac:picMkLst>
+            <pc:docMk/>
+            <pc:sldMk cId="1596913002" sldId="264"/>
+            <ac:picMk id="24" creationId="{C2E403FB-ACB3-4A15-B431-427E9F6DCA0E}"/>
+          </ac:picMkLst>
+        </pc:picChg>
+        <pc:picChg chg="add del mod">
+          <ac:chgData name="YUAN HE" userId="83267edd7d760aca" providerId="LiveId" clId="{88A60433-6414-4BD0-8EB6-31796CC6DF80}" dt="2020-10-24T14:40:59.756" v="4027"/>
+          <ac:picMkLst>
+            <pc:docMk/>
+            <pc:sldMk cId="1596913002" sldId="264"/>
+            <ac:picMk id="25" creationId="{151D7590-10CB-4E1E-A743-4DD67966A580}"/>
+          </ac:picMkLst>
+        </pc:picChg>
+        <pc:picChg chg="add del mod">
+          <ac:chgData name="YUAN HE" userId="83267edd7d760aca" providerId="LiveId" clId="{88A60433-6414-4BD0-8EB6-31796CC6DF80}" dt="2020-10-24T15:25:35.682" v="4091"/>
+          <ac:picMkLst>
+            <pc:docMk/>
+            <pc:sldMk cId="1596913002" sldId="264"/>
+            <ac:picMk id="25" creationId="{6E45DE59-E9EA-4AD9-BE0F-45BF3BC6C4E9}"/>
+          </ac:picMkLst>
+        </pc:picChg>
+        <pc:picChg chg="add del mod">
+          <ac:chgData name="YUAN HE" userId="83267edd7d760aca" providerId="LiveId" clId="{88A60433-6414-4BD0-8EB6-31796CC6DF80}" dt="2020-10-24T14:41:46.122" v="4029"/>
+          <ac:picMkLst>
+            <pc:docMk/>
+            <pc:sldMk cId="1596913002" sldId="264"/>
+            <ac:picMk id="26" creationId="{9AB57DB2-C9DA-4C16-979F-CB0B8199B7FB}"/>
+          </ac:picMkLst>
+        </pc:picChg>
+        <pc:picChg chg="add del mod">
+          <ac:chgData name="YUAN HE" userId="83267edd7d760aca" providerId="LiveId" clId="{88A60433-6414-4BD0-8EB6-31796CC6DF80}" dt="2020-10-24T18:07:09.240" v="4181"/>
+          <ac:picMkLst>
+            <pc:docMk/>
+            <pc:sldMk cId="1596913002" sldId="264"/>
+            <ac:picMk id="26" creationId="{AFFF4ED2-1E97-45FF-BB51-52F9FD48116A}"/>
+          </ac:picMkLst>
+        </pc:picChg>
+        <pc:picChg chg="add del mod">
+          <ac:chgData name="YUAN HE" userId="83267edd7d760aca" providerId="LiveId" clId="{88A60433-6414-4BD0-8EB6-31796CC6DF80}" dt="2020-10-24T14:41:58.401" v="4031"/>
+          <ac:picMkLst>
+            <pc:docMk/>
+            <pc:sldMk cId="1596913002" sldId="264"/>
+            <ac:picMk id="27" creationId="{2EFF04AE-30D6-4BDD-BEC8-0770D0CA32BE}"/>
+          </ac:picMkLst>
+        </pc:picChg>
+        <pc:picChg chg="add del mod">
+          <ac:chgData name="YUAN HE" userId="83267edd7d760aca" providerId="LiveId" clId="{88A60433-6414-4BD0-8EB6-31796CC6DF80}" dt="2020-10-24T15:01:01.941" v="4061"/>
+          <ac:picMkLst>
+            <pc:docMk/>
+            <pc:sldMk cId="1596913002" sldId="264"/>
+            <ac:picMk id="28" creationId="{6C52A461-FD96-4A4F-B29B-C71DA76F6633}"/>
+          </ac:picMkLst>
+        </pc:picChg>
+        <pc:picChg chg="add del mod">
+          <ac:chgData name="YUAN HE" userId="83267edd7d760aca" providerId="LiveId" clId="{88A60433-6414-4BD0-8EB6-31796CC6DF80}" dt="2020-10-24T15:01:05.734" v="4062"/>
+          <ac:picMkLst>
+            <pc:docMk/>
+            <pc:sldMk cId="1596913002" sldId="264"/>
+            <ac:picMk id="29" creationId="{B4AED27C-27B0-4F6A-8F74-16B8AA4BD83B}"/>
+          </ac:picMkLst>
+        </pc:picChg>
+        <pc:picChg chg="add del mod">
+          <ac:chgData name="YUAN HE" userId="83267edd7d760aca" providerId="LiveId" clId="{88A60433-6414-4BD0-8EB6-31796CC6DF80}" dt="2020-10-24T15:01:47.951" v="4064"/>
+          <ac:picMkLst>
+            <pc:docMk/>
+            <pc:sldMk cId="1596913002" sldId="264"/>
+            <ac:picMk id="30" creationId="{13CA9C0D-2462-4055-95A9-0747D7A60A2D}"/>
+          </ac:picMkLst>
+        </pc:picChg>
+        <pc:picChg chg="add del mod">
+          <ac:chgData name="YUAN HE" userId="83267edd7d760aca" providerId="LiveId" clId="{88A60433-6414-4BD0-8EB6-31796CC6DF80}" dt="2020-10-24T15:04:37.588" v="4066"/>
+          <ac:picMkLst>
+            <pc:docMk/>
+            <pc:sldMk cId="1596913002" sldId="264"/>
+            <ac:picMk id="31" creationId="{28BBDDD4-3A1F-4C43-A19C-A18C036AC73D}"/>
+          </ac:picMkLst>
+        </pc:picChg>
+        <pc:picChg chg="add del mod">
+          <ac:chgData name="YUAN HE" userId="83267edd7d760aca" providerId="LiveId" clId="{88A60433-6414-4BD0-8EB6-31796CC6DF80}" dt="2020-10-24T15:05:59.306" v="4068"/>
+          <ac:picMkLst>
+            <pc:docMk/>
+            <pc:sldMk cId="1596913002" sldId="264"/>
+            <ac:picMk id="32" creationId="{D9F4BE8F-5579-4A6E-B748-7CD43CA5E4D5}"/>
+          </ac:picMkLst>
+        </pc:picChg>
       </pc:sldChg>
-      <pc:sldChg chg="addSp delSp modSp mod delAnim modAnim">
-        <pc:chgData name="YUAN HE" userId="83267edd7d760aca" providerId="LiveId" clId="{88A60433-6414-4BD0-8EB6-31796CC6DF80}" dt="2020-10-19T23:30:45.490" v="3169" actId="1076"/>
+      <pc:sldChg chg="addSp delSp modSp mod modTransition delAnim modAnim">
+        <pc:chgData name="YUAN HE" userId="83267edd7d760aca" providerId="LiveId" clId="{88A60433-6414-4BD0-8EB6-31796CC6DF80}" dt="2020-10-24T18:07:09.240" v="4181"/>
         <pc:sldMkLst>
           <pc:docMk/>
           <pc:sldMk cId="1982144043" sldId="265"/>
@@ -593,6 +1240,86 @@
             <ac:graphicFrameMk id="4" creationId="{73B258A7-2279-4AE3-8317-4103BE58B152}"/>
           </ac:graphicFrameMkLst>
         </pc:graphicFrameChg>
+        <pc:picChg chg="add del mod">
+          <ac:chgData name="YUAN HE" userId="83267edd7d760aca" providerId="LiveId" clId="{88A60433-6414-4BD0-8EB6-31796CC6DF80}" dt="2020-10-24T15:54:53.194" v="4132"/>
+          <ac:picMkLst>
+            <pc:docMk/>
+            <pc:sldMk cId="1982144043" sldId="265"/>
+            <ac:picMk id="7" creationId="{1214EDB0-B9A2-480D-AE7E-3A0483ABBB20}"/>
+          </ac:picMkLst>
+        </pc:picChg>
+        <pc:picChg chg="add del mod">
+          <ac:chgData name="YUAN HE" userId="83267edd7d760aca" providerId="LiveId" clId="{88A60433-6414-4BD0-8EB6-31796CC6DF80}" dt="2020-10-24T14:34:26.078" v="4011"/>
+          <ac:picMkLst>
+            <pc:docMk/>
+            <pc:sldMk cId="1982144043" sldId="265"/>
+            <ac:picMk id="7" creationId="{663312E3-0084-4A9B-A761-B1689CDF045B}"/>
+          </ac:picMkLst>
+        </pc:picChg>
+        <pc:picChg chg="add del mod">
+          <ac:chgData name="YUAN HE" userId="83267edd7d760aca" providerId="LiveId" clId="{88A60433-6414-4BD0-8EB6-31796CC6DF80}" dt="2020-10-24T16:01:34.109" v="4139"/>
+          <ac:picMkLst>
+            <pc:docMk/>
+            <pc:sldMk cId="1982144043" sldId="265"/>
+            <ac:picMk id="8" creationId="{D2DDC3E8-AC64-425E-9001-A1A1474B8C8C}"/>
+          </ac:picMkLst>
+        </pc:picChg>
+        <pc:picChg chg="add del mod">
+          <ac:chgData name="YUAN HE" userId="83267edd7d760aca" providerId="LiveId" clId="{88A60433-6414-4BD0-8EB6-31796CC6DF80}" dt="2020-10-24T16:02:50.869" v="4141"/>
+          <ac:picMkLst>
+            <pc:docMk/>
+            <pc:sldMk cId="1982144043" sldId="265"/>
+            <ac:picMk id="9" creationId="{8BC20F8A-C861-4BAE-8485-DC1FF0B7052A}"/>
+          </ac:picMkLst>
+        </pc:picChg>
+        <pc:picChg chg="add del mod">
+          <ac:chgData name="YUAN HE" userId="83267edd7d760aca" providerId="LiveId" clId="{88A60433-6414-4BD0-8EB6-31796CC6DF80}" dt="2020-10-24T16:03:25.577" v="4143"/>
+          <ac:picMkLst>
+            <pc:docMk/>
+            <pc:sldMk cId="1982144043" sldId="265"/>
+            <ac:picMk id="10" creationId="{0A6FF830-F6BF-469B-8EC4-5BED76410C55}"/>
+          </ac:picMkLst>
+        </pc:picChg>
+        <pc:picChg chg="add del mod">
+          <ac:chgData name="YUAN HE" userId="83267edd7d760aca" providerId="LiveId" clId="{88A60433-6414-4BD0-8EB6-31796CC6DF80}" dt="2020-10-24T16:05:13.434" v="4145"/>
+          <ac:picMkLst>
+            <pc:docMk/>
+            <pc:sldMk cId="1982144043" sldId="265"/>
+            <ac:picMk id="11" creationId="{2CACAB68-2005-4210-85FD-688184C9A240}"/>
+          </ac:picMkLst>
+        </pc:picChg>
+        <pc:picChg chg="add del mod">
+          <ac:chgData name="YUAN HE" userId="83267edd7d760aca" providerId="LiveId" clId="{88A60433-6414-4BD0-8EB6-31796CC6DF80}" dt="2020-10-24T16:08:12.848" v="4147"/>
+          <ac:picMkLst>
+            <pc:docMk/>
+            <pc:sldMk cId="1982144043" sldId="265"/>
+            <ac:picMk id="12" creationId="{D356D246-03DD-4283-9C8B-34AB52CD5380}"/>
+          </ac:picMkLst>
+        </pc:picChg>
+        <pc:picChg chg="add del mod">
+          <ac:chgData name="YUAN HE" userId="83267edd7d760aca" providerId="LiveId" clId="{88A60433-6414-4BD0-8EB6-31796CC6DF80}" dt="2020-10-24T16:08:47.852" v="4149"/>
+          <ac:picMkLst>
+            <pc:docMk/>
+            <pc:sldMk cId="1982144043" sldId="265"/>
+            <ac:picMk id="13" creationId="{D6D90815-288C-404F-ACA4-D2061DBE09B7}"/>
+          </ac:picMkLst>
+        </pc:picChg>
+        <pc:picChg chg="add del mod">
+          <ac:chgData name="YUAN HE" userId="83267edd7d760aca" providerId="LiveId" clId="{88A60433-6414-4BD0-8EB6-31796CC6DF80}" dt="2020-10-24T16:09:55.812" v="4151"/>
+          <ac:picMkLst>
+            <pc:docMk/>
+            <pc:sldMk cId="1982144043" sldId="265"/>
+            <ac:picMk id="14" creationId="{55090F25-E59B-41E2-BF16-FDD0AA7A3AF7}"/>
+          </ac:picMkLst>
+        </pc:picChg>
+        <pc:picChg chg="add del mod">
+          <ac:chgData name="YUAN HE" userId="83267edd7d760aca" providerId="LiveId" clId="{88A60433-6414-4BD0-8EB6-31796CC6DF80}" dt="2020-10-24T18:07:09.240" v="4181"/>
+          <ac:picMkLst>
+            <pc:docMk/>
+            <pc:sldMk cId="1982144043" sldId="265"/>
+            <ac:picMk id="15" creationId="{C17C724F-EB74-49ED-93FB-47FD44E32BBF}"/>
+          </ac:picMkLst>
+        </pc:picChg>
         <pc:cxnChg chg="add del mod">
           <ac:chgData name="YUAN HE" userId="83267edd7d760aca" providerId="LiveId" clId="{88A60433-6414-4BD0-8EB6-31796CC6DF80}" dt="2020-10-15T13:34:57.297" v="1272" actId="478"/>
           <ac:cxnSpMkLst>
@@ -618,8 +1345,8 @@
           </ac:cxnSpMkLst>
         </pc:cxnChg>
       </pc:sldChg>
-      <pc:sldChg chg="modSp mod">
-        <pc:chgData name="YUAN HE" userId="83267edd7d760aca" providerId="LiveId" clId="{88A60433-6414-4BD0-8EB6-31796CC6DF80}" dt="2020-10-19T23:43:29.348" v="3236" actId="207"/>
+      <pc:sldChg chg="addSp delSp modSp mod modTransition modAnim">
+        <pc:chgData name="YUAN HE" userId="83267edd7d760aca" providerId="LiveId" clId="{88A60433-6414-4BD0-8EB6-31796CC6DF80}" dt="2020-10-24T18:07:09.240" v="4181"/>
         <pc:sldMkLst>
           <pc:docMk/>
           <pc:sldMk cId="1553483360" sldId="266"/>
@@ -632,9 +1359,25 @@
             <ac:graphicFrameMk id="11" creationId="{96626221-B518-4608-893C-9EDD09F2D24D}"/>
           </ac:graphicFrameMkLst>
         </pc:graphicFrameChg>
+        <pc:picChg chg="add del mod">
+          <ac:chgData name="YUAN HE" userId="83267edd7d760aca" providerId="LiveId" clId="{88A60433-6414-4BD0-8EB6-31796CC6DF80}" dt="2020-10-24T16:41:06.169" v="4171"/>
+          <ac:picMkLst>
+            <pc:docMk/>
+            <pc:sldMk cId="1553483360" sldId="266"/>
+            <ac:picMk id="3" creationId="{C8E8453E-A14D-4557-AD44-66795D2DE66B}"/>
+          </ac:picMkLst>
+        </pc:picChg>
+        <pc:picChg chg="add del mod">
+          <ac:chgData name="YUAN HE" userId="83267edd7d760aca" providerId="LiveId" clId="{88A60433-6414-4BD0-8EB6-31796CC6DF80}" dt="2020-10-24T18:07:09.240" v="4181"/>
+          <ac:picMkLst>
+            <pc:docMk/>
+            <pc:sldMk cId="1553483360" sldId="266"/>
+            <ac:picMk id="4" creationId="{5500F8BC-8B39-477C-80E9-A8AA2B6C915F}"/>
+          </ac:picMkLst>
+        </pc:picChg>
       </pc:sldChg>
-      <pc:sldChg chg="addSp delSp modSp mod modAnim">
-        <pc:chgData name="YUAN HE" userId="83267edd7d760aca" providerId="LiveId" clId="{88A60433-6414-4BD0-8EB6-31796CC6DF80}" dt="2020-10-19T23:43:50.124" v="3247" actId="1076"/>
+      <pc:sldChg chg="addSp delSp modSp mod modTransition modAnim">
+        <pc:chgData name="YUAN HE" userId="83267edd7d760aca" providerId="LiveId" clId="{88A60433-6414-4BD0-8EB6-31796CC6DF80}" dt="2020-10-24T18:07:09.240" v="4181"/>
         <pc:sldMkLst>
           <pc:docMk/>
           <pc:sldMk cId="2531450280" sldId="267"/>
@@ -695,9 +1438,17 @@
             <ac:graphicFrameMk id="7" creationId="{C2A88D51-197E-4CC9-A7CB-EC7994BA751D}"/>
           </ac:graphicFrameMkLst>
         </pc:graphicFrameChg>
+        <pc:picChg chg="add del mod">
+          <ac:chgData name="YUAN HE" userId="83267edd7d760aca" providerId="LiveId" clId="{88A60433-6414-4BD0-8EB6-31796CC6DF80}" dt="2020-10-24T18:07:09.240" v="4181"/>
+          <ac:picMkLst>
+            <pc:docMk/>
+            <pc:sldMk cId="2531450280" sldId="267"/>
+            <ac:picMk id="3" creationId="{EF7BF71A-2907-487F-8824-F8E1747CA9B1}"/>
+          </ac:picMkLst>
+        </pc:picChg>
       </pc:sldChg>
-      <pc:sldChg chg="addSp delSp modSp mod ord">
-        <pc:chgData name="YUAN HE" userId="83267edd7d760aca" providerId="LiveId" clId="{88A60433-6414-4BD0-8EB6-31796CC6DF80}" dt="2020-10-19T23:44:04.484" v="3255" actId="20577"/>
+      <pc:sldChg chg="addSp delSp modSp mod ord modTransition modAnim">
+        <pc:chgData name="YUAN HE" userId="83267edd7d760aca" providerId="LiveId" clId="{88A60433-6414-4BD0-8EB6-31796CC6DF80}" dt="2020-10-24T18:07:09.240" v="4181"/>
         <pc:sldMkLst>
           <pc:docMk/>
           <pc:sldMk cId="1315378316" sldId="268"/>
@@ -718,9 +1469,17 @@
             <ac:graphicFrameMk id="3" creationId="{F9814F55-1AD4-4335-A02F-841829E0581D}"/>
           </ac:graphicFrameMkLst>
         </pc:graphicFrameChg>
+        <pc:picChg chg="add del mod">
+          <ac:chgData name="YUAN HE" userId="83267edd7d760aca" providerId="LiveId" clId="{88A60433-6414-4BD0-8EB6-31796CC6DF80}" dt="2020-10-24T18:07:09.240" v="4181"/>
+          <ac:picMkLst>
+            <pc:docMk/>
+            <pc:sldMk cId="1315378316" sldId="268"/>
+            <ac:picMk id="4" creationId="{2E820244-8BED-4DD3-9399-4EDD29A68D01}"/>
+          </ac:picMkLst>
+        </pc:picChg>
       </pc:sldChg>
-      <pc:sldChg chg="modSp mod">
-        <pc:chgData name="YUAN HE" userId="83267edd7d760aca" providerId="LiveId" clId="{88A60433-6414-4BD0-8EB6-31796CC6DF80}" dt="2020-10-19T12:38:05.090" v="2822" actId="20577"/>
+      <pc:sldChg chg="addSp delSp modSp mod modTransition modAnim">
+        <pc:chgData name="YUAN HE" userId="83267edd7d760aca" providerId="LiveId" clId="{88A60433-6414-4BD0-8EB6-31796CC6DF80}" dt="2020-10-24T18:07:09.240" v="4181"/>
         <pc:sldMkLst>
           <pc:docMk/>
           <pc:sldMk cId="3303117943" sldId="269"/>
@@ -733,9 +1492,25 @@
             <ac:spMk id="4" creationId="{826A767C-6E1B-46DF-AFD9-F852745BF25D}"/>
           </ac:spMkLst>
         </pc:spChg>
+        <pc:picChg chg="add del mod">
+          <ac:chgData name="YUAN HE" userId="83267edd7d760aca" providerId="LiveId" clId="{88A60433-6414-4BD0-8EB6-31796CC6DF80}" dt="2020-10-24T16:49:26.906" v="4176"/>
+          <ac:picMkLst>
+            <pc:docMk/>
+            <pc:sldMk cId="3303117943" sldId="269"/>
+            <ac:picMk id="3" creationId="{4B6A645C-D4E1-47A9-ADA7-6C08B6689761}"/>
+          </ac:picMkLst>
+        </pc:picChg>
+        <pc:picChg chg="add del mod">
+          <ac:chgData name="YUAN HE" userId="83267edd7d760aca" providerId="LiveId" clId="{88A60433-6414-4BD0-8EB6-31796CC6DF80}" dt="2020-10-24T18:07:09.240" v="4181"/>
+          <ac:picMkLst>
+            <pc:docMk/>
+            <pc:sldMk cId="3303117943" sldId="269"/>
+            <ac:picMk id="5" creationId="{160E2C71-BFBB-4C44-AFBF-81DCEFCD66EC}"/>
+          </ac:picMkLst>
+        </pc:picChg>
       </pc:sldChg>
-      <pc:sldChg chg="delSp modSp mod">
-        <pc:chgData name="YUAN HE" userId="83267edd7d760aca" providerId="LiveId" clId="{88A60433-6414-4BD0-8EB6-31796CC6DF80}" dt="2020-10-17T12:50:09.152" v="2782" actId="255"/>
+      <pc:sldChg chg="addSp delSp modSp mod modTransition modAnim">
+        <pc:chgData name="YUAN HE" userId="83267edd7d760aca" providerId="LiveId" clId="{88A60433-6414-4BD0-8EB6-31796CC6DF80}" dt="2020-10-24T18:07:09.240" v="4181"/>
         <pc:sldMkLst>
           <pc:docMk/>
           <pc:sldMk cId="1653342606" sldId="270"/>
@@ -756,6 +1531,22 @@
             <ac:spMk id="3" creationId="{01428578-FFEE-4621-943C-3510021ACC65}"/>
           </ac:spMkLst>
         </pc:spChg>
+        <pc:picChg chg="add del mod">
+          <ac:chgData name="YUAN HE" userId="83267edd7d760aca" providerId="LiveId" clId="{88A60433-6414-4BD0-8EB6-31796CC6DF80}" dt="2020-10-24T16:50:41.303" v="4178"/>
+          <ac:picMkLst>
+            <pc:docMk/>
+            <pc:sldMk cId="1653342606" sldId="270"/>
+            <ac:picMk id="3" creationId="{3A6236AA-2528-42A1-9E89-A3E6EA4AD0C7}"/>
+          </ac:picMkLst>
+        </pc:picChg>
+        <pc:picChg chg="add del mod">
+          <ac:chgData name="YUAN HE" userId="83267edd7d760aca" providerId="LiveId" clId="{88A60433-6414-4BD0-8EB6-31796CC6DF80}" dt="2020-10-24T18:07:09.240" v="4181"/>
+          <ac:picMkLst>
+            <pc:docMk/>
+            <pc:sldMk cId="1653342606" sldId="270"/>
+            <ac:picMk id="4" creationId="{E7573C0C-2ED2-4B43-91BD-DC067CA78B76}"/>
+          </ac:picMkLst>
+        </pc:picChg>
       </pc:sldChg>
       <pc:sldChg chg="new del">
         <pc:chgData name="YUAN HE" userId="83267edd7d760aca" providerId="LiveId" clId="{88A60433-6414-4BD0-8EB6-31796CC6DF80}" dt="2020-10-15T16:59:14.036" v="1378" actId="680"/>
@@ -787,8 +1578,8 @@
           </ac:spMkLst>
         </pc:spChg>
       </pc:sldChg>
-      <pc:sldChg chg="addSp delSp modSp add mod">
-        <pc:chgData name="YUAN HE" userId="83267edd7d760aca" providerId="LiveId" clId="{88A60433-6414-4BD0-8EB6-31796CC6DF80}" dt="2020-10-15T17:21:57.695" v="1574" actId="20577"/>
+      <pc:sldChg chg="addSp delSp modSp add mod modTransition">
+        <pc:chgData name="YUAN HE" userId="83267edd7d760aca" providerId="LiveId" clId="{88A60433-6414-4BD0-8EB6-31796CC6DF80}" dt="2020-10-24T18:07:06.783" v="4180"/>
         <pc:sldMkLst>
           <pc:docMk/>
           <pc:sldMk cId="2959817619" sldId="272"/>
@@ -850,8 +1641,8 @@
           </ac:picMkLst>
         </pc:picChg>
       </pc:sldChg>
-      <pc:sldChg chg="addSp modSp add mod">
-        <pc:chgData name="YUAN HE" userId="83267edd7d760aca" providerId="LiveId" clId="{88A60433-6414-4BD0-8EB6-31796CC6DF80}" dt="2020-10-15T17:22:01.822" v="1577" actId="20577"/>
+      <pc:sldChg chg="addSp modSp add mod modTransition">
+        <pc:chgData name="YUAN HE" userId="83267edd7d760aca" providerId="LiveId" clId="{88A60433-6414-4BD0-8EB6-31796CC6DF80}" dt="2020-10-24T18:07:06.783" v="4180"/>
         <pc:sldMkLst>
           <pc:docMk/>
           <pc:sldMk cId="2165823546" sldId="273"/>
@@ -889,8 +1680,8 @@
           </ac:picMkLst>
         </pc:picChg>
       </pc:sldChg>
-      <pc:sldChg chg="addSp delSp modSp add mod">
-        <pc:chgData name="YUAN HE" userId="83267edd7d760aca" providerId="LiveId" clId="{88A60433-6414-4BD0-8EB6-31796CC6DF80}" dt="2020-10-19T23:42:12.964" v="3209" actId="1076"/>
+      <pc:sldChg chg="addSp delSp modSp add mod modTransition">
+        <pc:chgData name="YUAN HE" userId="83267edd7d760aca" providerId="LiveId" clId="{88A60433-6414-4BD0-8EB6-31796CC6DF80}" dt="2020-10-24T18:07:06.783" v="4180"/>
         <pc:sldMkLst>
           <pc:docMk/>
           <pc:sldMk cId="3869838074" sldId="274"/>
@@ -944,8 +1735,8 @@
           </ac:picMkLst>
         </pc:picChg>
       </pc:sldChg>
-      <pc:sldChg chg="addSp modSp add mod modAnim">
-        <pc:chgData name="YUAN HE" userId="83267edd7d760aca" providerId="LiveId" clId="{88A60433-6414-4BD0-8EB6-31796CC6DF80}" dt="2020-10-17T12:49:20.376" v="2779" actId="1076"/>
+      <pc:sldChg chg="addSp delSp modSp add mod modTransition modAnim">
+        <pc:chgData name="YUAN HE" userId="83267edd7d760aca" providerId="LiveId" clId="{88A60433-6414-4BD0-8EB6-31796CC6DF80}" dt="2020-10-24T18:07:09.240" v="4181"/>
         <pc:sldMkLst>
           <pc:docMk/>
           <pc:sldMk cId="1007608120" sldId="275"/>
@@ -1006,6 +1797,46 @@
             <ac:spMk id="15" creationId="{3261CFB0-1EEA-480F-AD7B-19C302CA7FEF}"/>
           </ac:spMkLst>
         </pc:spChg>
+        <pc:picChg chg="add del mod">
+          <ac:chgData name="YUAN HE" userId="83267edd7d760aca" providerId="LiveId" clId="{88A60433-6414-4BD0-8EB6-31796CC6DF80}" dt="2020-10-24T14:34:26.078" v="4011"/>
+          <ac:picMkLst>
+            <pc:docMk/>
+            <pc:sldMk cId="1007608120" sldId="275"/>
+            <ac:picMk id="7" creationId="{7DD25450-F84D-467F-B36F-008C58420C5F}"/>
+          </ac:picMkLst>
+        </pc:picChg>
+        <pc:picChg chg="add del mod">
+          <ac:chgData name="YUAN HE" userId="83267edd7d760aca" providerId="LiveId" clId="{88A60433-6414-4BD0-8EB6-31796CC6DF80}" dt="2020-10-24T15:45:04.741" v="4119"/>
+          <ac:picMkLst>
+            <pc:docMk/>
+            <pc:sldMk cId="1007608120" sldId="275"/>
+            <ac:picMk id="7" creationId="{A7B9B82B-D9EC-4148-85CB-A54CF70EAE92}"/>
+          </ac:picMkLst>
+        </pc:picChg>
+        <pc:picChg chg="add del mod">
+          <ac:chgData name="YUAN HE" userId="83267edd7d760aca" providerId="LiveId" clId="{88A60433-6414-4BD0-8EB6-31796CC6DF80}" dt="2020-10-24T15:45:57.831" v="4121"/>
+          <ac:picMkLst>
+            <pc:docMk/>
+            <pc:sldMk cId="1007608120" sldId="275"/>
+            <ac:picMk id="9" creationId="{8605687F-DF7A-4224-8056-F16DCC3E101A}"/>
+          </ac:picMkLst>
+        </pc:picChg>
+        <pc:picChg chg="add del mod">
+          <ac:chgData name="YUAN HE" userId="83267edd7d760aca" providerId="LiveId" clId="{88A60433-6414-4BD0-8EB6-31796CC6DF80}" dt="2020-10-24T15:46:14.793" v="4123"/>
+          <ac:picMkLst>
+            <pc:docMk/>
+            <pc:sldMk cId="1007608120" sldId="275"/>
+            <ac:picMk id="10" creationId="{916FA724-1C7E-4B05-9604-8506F0BA8F24}"/>
+          </ac:picMkLst>
+        </pc:picChg>
+        <pc:picChg chg="add del mod">
+          <ac:chgData name="YUAN HE" userId="83267edd7d760aca" providerId="LiveId" clId="{88A60433-6414-4BD0-8EB6-31796CC6DF80}" dt="2020-10-24T18:07:09.240" v="4181"/>
+          <ac:picMkLst>
+            <pc:docMk/>
+            <pc:sldMk cId="1007608120" sldId="275"/>
+            <ac:picMk id="12" creationId="{7762BFD3-A6AF-4567-8EF3-503D5B4952EB}"/>
+          </ac:picMkLst>
+        </pc:picChg>
         <pc:cxnChg chg="add mod">
           <ac:chgData name="YUAN HE" userId="83267edd7d760aca" providerId="LiveId" clId="{88A60433-6414-4BD0-8EB6-31796CC6DF80}" dt="2020-10-17T12:49:20.376" v="2779" actId="1076"/>
           <ac:cxnSpMkLst>
@@ -1023,8 +1854,8 @@
           </ac:cxnSpMkLst>
         </pc:cxnChg>
       </pc:sldChg>
-      <pc:sldChg chg="delSp modSp add mod delAnim modAnim">
-        <pc:chgData name="YUAN HE" userId="83267edd7d760aca" providerId="LiveId" clId="{88A60433-6414-4BD0-8EB6-31796CC6DF80}" dt="2020-10-20T18:54:48.100" v="4003" actId="20577"/>
+      <pc:sldChg chg="addSp delSp modSp add mod modTransition delAnim modAnim">
+        <pc:chgData name="YUAN HE" userId="83267edd7d760aca" providerId="LiveId" clId="{88A60433-6414-4BD0-8EB6-31796CC6DF80}" dt="2020-10-24T18:07:09.240" v="4181"/>
         <pc:sldMkLst>
           <pc:docMk/>
           <pc:sldMk cId="3544129574" sldId="276"/>
@@ -1069,6 +1900,38 @@
             <ac:graphicFrameMk id="4" creationId="{73B258A7-2279-4AE3-8317-4103BE58B152}"/>
           </ac:graphicFrameMkLst>
         </pc:graphicFrameChg>
+        <pc:picChg chg="add del mod">
+          <ac:chgData name="YUAN HE" userId="83267edd7d760aca" providerId="LiveId" clId="{88A60433-6414-4BD0-8EB6-31796CC6DF80}" dt="2020-10-24T16:13:07.453" v="4153"/>
+          <ac:picMkLst>
+            <pc:docMk/>
+            <pc:sldMk cId="3544129574" sldId="276"/>
+            <ac:picMk id="4" creationId="{886F7D58-8095-4D55-9FEE-93B464685226}"/>
+          </ac:picMkLst>
+        </pc:picChg>
+        <pc:picChg chg="add del mod">
+          <ac:chgData name="YUAN HE" userId="83267edd7d760aca" providerId="LiveId" clId="{88A60433-6414-4BD0-8EB6-31796CC6DF80}" dt="2020-10-24T14:34:26.078" v="4011"/>
+          <ac:picMkLst>
+            <pc:docMk/>
+            <pc:sldMk cId="3544129574" sldId="276"/>
+            <ac:picMk id="4" creationId="{AAD76637-3DB3-4009-A368-D6C76D896BF5}"/>
+          </ac:picMkLst>
+        </pc:picChg>
+        <pc:picChg chg="add del mod">
+          <ac:chgData name="YUAN HE" userId="83267edd7d760aca" providerId="LiveId" clId="{88A60433-6414-4BD0-8EB6-31796CC6DF80}" dt="2020-10-24T16:14:40.971" v="4155"/>
+          <ac:picMkLst>
+            <pc:docMk/>
+            <pc:sldMk cId="3544129574" sldId="276"/>
+            <ac:picMk id="5" creationId="{F99BE76D-8584-4BD3-8F2C-7EB818D212E9}"/>
+          </ac:picMkLst>
+        </pc:picChg>
+        <pc:picChg chg="add del mod">
+          <ac:chgData name="YUAN HE" userId="83267edd7d760aca" providerId="LiveId" clId="{88A60433-6414-4BD0-8EB6-31796CC6DF80}" dt="2020-10-24T18:07:09.240" v="4181"/>
+          <ac:picMkLst>
+            <pc:docMk/>
+            <pc:sldMk cId="3544129574" sldId="276"/>
+            <ac:picMk id="6" creationId="{410F140A-37F4-4DDC-83FE-29A119177AB7}"/>
+          </ac:picMkLst>
+        </pc:picChg>
       </pc:sldChg>
     </pc:docChg>
   </pc:docChgLst>
@@ -1224,7 +2087,7 @@
           <a:p>
             <a:fld id="{69843D93-4C90-4B93-A122-C742B4CB8EA4}" type="datetimeFigureOut">
               <a:rPr lang="en-GB" smtClean="0"/>
-              <a:t>20/10/2020</a:t>
+              <a:t>24/10/2020</a:t>
             </a:fld>
             <a:endParaRPr lang="en-GB"/>
           </a:p>
@@ -1424,7 +2287,7 @@
           <a:p>
             <a:fld id="{69843D93-4C90-4B93-A122-C742B4CB8EA4}" type="datetimeFigureOut">
               <a:rPr lang="en-GB" smtClean="0"/>
-              <a:t>20/10/2020</a:t>
+              <a:t>24/10/2020</a:t>
             </a:fld>
             <a:endParaRPr lang="en-GB"/>
           </a:p>
@@ -1634,7 +2497,7 @@
           <a:p>
             <a:fld id="{69843D93-4C90-4B93-A122-C742B4CB8EA4}" type="datetimeFigureOut">
               <a:rPr lang="en-GB" smtClean="0"/>
-              <a:t>20/10/2020</a:t>
+              <a:t>24/10/2020</a:t>
             </a:fld>
             <a:endParaRPr lang="en-GB"/>
           </a:p>
@@ -1834,7 +2697,7 @@
           <a:p>
             <a:fld id="{69843D93-4C90-4B93-A122-C742B4CB8EA4}" type="datetimeFigureOut">
               <a:rPr lang="en-GB" smtClean="0"/>
-              <a:t>20/10/2020</a:t>
+              <a:t>24/10/2020</a:t>
             </a:fld>
             <a:endParaRPr lang="en-GB"/>
           </a:p>
@@ -2110,7 +2973,7 @@
           <a:p>
             <a:fld id="{69843D93-4C90-4B93-A122-C742B4CB8EA4}" type="datetimeFigureOut">
               <a:rPr lang="en-GB" smtClean="0"/>
-              <a:t>20/10/2020</a:t>
+              <a:t>24/10/2020</a:t>
             </a:fld>
             <a:endParaRPr lang="en-GB"/>
           </a:p>
@@ -2378,7 +3241,7 @@
           <a:p>
             <a:fld id="{69843D93-4C90-4B93-A122-C742B4CB8EA4}" type="datetimeFigureOut">
               <a:rPr lang="en-GB" smtClean="0"/>
-              <a:t>20/10/2020</a:t>
+              <a:t>24/10/2020</a:t>
             </a:fld>
             <a:endParaRPr lang="en-GB"/>
           </a:p>
@@ -2793,7 +3656,7 @@
           <a:p>
             <a:fld id="{69843D93-4C90-4B93-A122-C742B4CB8EA4}" type="datetimeFigureOut">
               <a:rPr lang="en-GB" smtClean="0"/>
-              <a:t>20/10/2020</a:t>
+              <a:t>24/10/2020</a:t>
             </a:fld>
             <a:endParaRPr lang="en-GB"/>
           </a:p>
@@ -2935,7 +3798,7 @@
           <a:p>
             <a:fld id="{69843D93-4C90-4B93-A122-C742B4CB8EA4}" type="datetimeFigureOut">
               <a:rPr lang="en-GB" smtClean="0"/>
-              <a:t>20/10/2020</a:t>
+              <a:t>24/10/2020</a:t>
             </a:fld>
             <a:endParaRPr lang="en-GB"/>
           </a:p>
@@ -3048,7 +3911,7 @@
           <a:p>
             <a:fld id="{69843D93-4C90-4B93-A122-C742B4CB8EA4}" type="datetimeFigureOut">
               <a:rPr lang="en-GB" smtClean="0"/>
-              <a:t>20/10/2020</a:t>
+              <a:t>24/10/2020</a:t>
             </a:fld>
             <a:endParaRPr lang="en-GB"/>
           </a:p>
@@ -3361,7 +4224,7 @@
           <a:p>
             <a:fld id="{69843D93-4C90-4B93-A122-C742B4CB8EA4}" type="datetimeFigureOut">
               <a:rPr lang="en-GB" smtClean="0"/>
-              <a:t>20/10/2020</a:t>
+              <a:t>24/10/2020</a:t>
             </a:fld>
             <a:endParaRPr lang="en-GB"/>
           </a:p>
@@ -3650,7 +4513,7 @@
           <a:p>
             <a:fld id="{69843D93-4C90-4B93-A122-C742B4CB8EA4}" type="datetimeFigureOut">
               <a:rPr lang="en-GB" smtClean="0"/>
-              <a:t>20/10/2020</a:t>
+              <a:t>24/10/2020</a:t>
             </a:fld>
             <a:endParaRPr lang="en-GB"/>
           </a:p>
@@ -3893,7 +4756,7 @@
           <a:p>
             <a:fld id="{69843D93-4C90-4B93-A122-C742B4CB8EA4}" type="datetimeFigureOut">
               <a:rPr lang="en-GB" smtClean="0"/>
-              <a:t>20/10/2020</a:t>
+              <a:t>24/10/2020</a:t>
             </a:fld>
             <a:endParaRPr lang="en-GB"/>
           </a:p>
@@ -7455,6 +8318,9 @@
         </p:txBody>
       </p:sp>
     </p:spTree>
+    <p:custDataLst>
+      <p:tags r:id="rId1"/>
+    </p:custDataLst>
     <p:extLst>
       <p:ext uri="{BB962C8B-B14F-4D97-AF65-F5344CB8AC3E}">
         <p14:creationId xmlns:p14="http://schemas.microsoft.com/office/powerpoint/2010/main" val="2531450280"/>
@@ -14215,6 +15081,9 @@
         </p:txBody>
       </p:sp>
     </p:spTree>
+    <p:custDataLst>
+      <p:tags r:id="rId1"/>
+    </p:custDataLst>
     <p:extLst>
       <p:ext uri="{BB962C8B-B14F-4D97-AF65-F5344CB8AC3E}">
         <p14:creationId xmlns:p14="http://schemas.microsoft.com/office/powerpoint/2010/main" val="1007608120"/>
@@ -15165,7 +16034,7 @@
                 <a:avLst/>
               </a:prstGeom>
               <a:blipFill>
-                <a:blip r:embed="rId2"/>
+                <a:blip r:embed="rId4"/>
                 <a:stretch>
                   <a:fillRect l="-1415" t="-1064"/>
                 </a:stretch>
@@ -15251,7 +16120,7 @@
           </p:nvPr>
         </p:nvPicPr>
         <p:blipFill>
-          <a:blip r:embed="rId3"/>
+          <a:blip r:embed="rId5"/>
           <a:stretch>
             <a:fillRect/>
           </a:stretch>
@@ -15278,7 +16147,7 @@
           <p:nvPr/>
         </p:nvPicPr>
         <p:blipFill>
-          <a:blip r:embed="rId4"/>
+          <a:blip r:embed="rId6"/>
           <a:stretch>
             <a:fillRect/>
           </a:stretch>
@@ -15308,7 +16177,7 @@
           <p:nvPr/>
         </p:nvPicPr>
         <p:blipFill>
-          <a:blip r:embed="rId5"/>
+          <a:blip r:embed="rId7"/>
           <a:stretch>
             <a:fillRect/>
           </a:stretch>
@@ -16309,6 +17178,9 @@
         </p:txBody>
       </p:sp>
     </p:spTree>
+    <p:custDataLst>
+      <p:tags r:id="rId1"/>
+    </p:custDataLst>
     <p:extLst>
       <p:ext uri="{BB962C8B-B14F-4D97-AF65-F5344CB8AC3E}">
         <p14:creationId xmlns:p14="http://schemas.microsoft.com/office/powerpoint/2010/main" val="3699047063"/>
@@ -17403,6 +18275,9 @@
         </p:txBody>
       </p:sp>
     </p:spTree>
+    <p:custDataLst>
+      <p:tags r:id="rId1"/>
+    </p:custDataLst>
     <p:extLst>
       <p:ext uri="{BB962C8B-B14F-4D97-AF65-F5344CB8AC3E}">
         <p14:creationId xmlns:p14="http://schemas.microsoft.com/office/powerpoint/2010/main" val="1982144043"/>
@@ -18255,6 +19130,30 @@
     <a:masterClrMapping/>
   </p:clrMapOvr>
 </p:sld>
+</file>
+
+<file path=ppt/tags/tag1.xml><?xml version="1.0" encoding="utf-8"?>
+<p:tagLst xmlns:a="http://schemas.openxmlformats.org/drawingml/2006/main" xmlns:r="http://schemas.openxmlformats.org/officeDocument/2006/relationships" xmlns:p="http://schemas.openxmlformats.org/presentationml/2006/main">
+  <p:tag name="TIMING" val="|13.4|25|22.6"/>
+</p:tagLst>
+</file>
+
+<file path=ppt/tags/tag2.xml><?xml version="1.0" encoding="utf-8"?>
+<p:tagLst xmlns:a="http://schemas.openxmlformats.org/drawingml/2006/main" xmlns:r="http://schemas.openxmlformats.org/officeDocument/2006/relationships" xmlns:p="http://schemas.openxmlformats.org/presentationml/2006/main">
+  <p:tag name="TIMING" val="|16.1|13.1|4|11|0.8"/>
+</p:tagLst>
+</file>
+
+<file path=ppt/tags/tag3.xml><?xml version="1.0" encoding="utf-8"?>
+<p:tagLst xmlns:a="http://schemas.openxmlformats.org/drawingml/2006/main" xmlns:r="http://schemas.openxmlformats.org/officeDocument/2006/relationships" xmlns:p="http://schemas.openxmlformats.org/presentationml/2006/main">
+  <p:tag name="TIMING" val="|13|7.9|8.1|13.8|0.6"/>
+</p:tagLst>
+</file>
+
+<file path=ppt/tags/tag4.xml><?xml version="1.0" encoding="utf-8"?>
+<p:tagLst xmlns:a="http://schemas.openxmlformats.org/drawingml/2006/main" xmlns:r="http://schemas.openxmlformats.org/officeDocument/2006/relationships" xmlns:p="http://schemas.openxmlformats.org/presentationml/2006/main">
+  <p:tag name="TIMING" val="|9.3|0.8"/>
+</p:tagLst>
 </file>
 
 <file path=ppt/theme/theme1.xml><?xml version="1.0" encoding="utf-8"?>
